--- a/assets/Kavach_IIC3_deck.pptx
+++ b/assets/Kavach_IIC3_deck.pptx
@@ -11427,7 +11427,7 @@
                 <a:cs typeface="Poppins Light"/>
                 <a:sym typeface="Poppins Light"/>
               </a:rPr>
-              <a:t>ElderShield — Real-Time AI Voice-Clone Detection for UPI &amp; Voice Banking</a:t>
+              <a:t>Kavach — Real-Time AI Voice-Clone Detection for UPI &amp; Voice Banking</a:t>
             </a:r>
             <a:endParaRPr dirty="0"/>
           </a:p>
@@ -11691,7 +11691,4229 @@
 </p:sld>
 </file>
 
-<file path=ppt/slides/slide10.xml><?xml version="1.0" encoding="utf-8"?>
+<file path=ppt/slides/slide2.xml><?xml version="1.0" encoding="utf-8"?>
+<p:sld xmlns:a="http://schemas.openxmlformats.org/drawingml/2006/main" xmlns:r="http://schemas.openxmlformats.org/officeDocument/2006/relationships" xmlns:p="http://schemas.openxmlformats.org/presentationml/2006/main">
+  <p:cSld>
+    <p:spTree>
+      <p:nvGrpSpPr>
+        <p:cNvPr id="1" name="Shape 97"/>
+        <p:cNvGrpSpPr/>
+        <p:nvPr/>
+      </p:nvGrpSpPr>
+      <p:grpSpPr>
+        <a:xfrm>
+          <a:off x="0" y="0"/>
+          <a:ext cx="0" cy="0"/>
+          <a:chOff x="0" y="0"/>
+          <a:chExt cx="0" cy="0"/>
+        </a:xfrm>
+      </p:grpSpPr>
+      <p:pic>
+        <p:nvPicPr>
+          <p:cNvPr id="2" name="Google Shape;84;p13" descr="image.png">
+            <a:extLst>
+              <a:ext uri="{FF2B5EF4-FFF2-40B4-BE49-F238E27FC236}">
+                <a16:creationId xmlns:a16="http://schemas.microsoft.com/office/drawing/2014/main" id="{A7427FBB-6B82-28C2-C807-6A3DF49A1F1A}"/>
+              </a:ext>
+            </a:extLst>
+          </p:cNvPr>
+          <p:cNvPicPr preferRelativeResize="0"/>
+          <p:nvPr/>
+        </p:nvPicPr>
+        <p:blipFill rotWithShape="1">
+          <a:blip r:embed="rId3">
+            <a:alphaModFix/>
+          </a:blip>
+          <a:srcRect/>
+          <a:stretch/>
+        </p:blipFill>
+        <p:spPr>
+          <a:xfrm>
+            <a:off x="-157315" y="-88489"/>
+            <a:ext cx="12457469" cy="7007326"/>
+          </a:xfrm>
+          <a:prstGeom prst="rect">
+            <a:avLst/>
+          </a:prstGeom>
+          <a:noFill/>
+          <a:ln>
+            <a:noFill/>
+          </a:ln>
+        </p:spPr>
+      </p:pic>
+      <p:pic>
+        <p:nvPicPr>
+          <p:cNvPr id="98" name="Google Shape;98;p14" descr="image.png"/>
+          <p:cNvPicPr preferRelativeResize="0"/>
+          <p:nvPr/>
+        </p:nvPicPr>
+        <p:blipFill rotWithShape="1">
+          <a:blip r:embed="rId4">
+            <a:alphaModFix amt="50000"/>
+          </a:blip>
+          <a:srcRect/>
+          <a:stretch/>
+        </p:blipFill>
+        <p:spPr>
+          <a:xfrm>
+            <a:off x="0" y="0"/>
+            <a:ext cx="12192000" cy="6858000"/>
+          </a:xfrm>
+          <a:prstGeom prst="rect">
+            <a:avLst/>
+          </a:prstGeom>
+          <a:noFill/>
+          <a:ln>
+            <a:noFill/>
+          </a:ln>
+        </p:spPr>
+      </p:pic>
+      <p:grpSp>
+        <p:nvGrpSpPr>
+          <p:cNvPr id="3" name="Group 2">
+            <a:extLst>
+              <a:ext uri="{FF2B5EF4-FFF2-40B4-BE49-F238E27FC236}">
+                <a16:creationId xmlns:a16="http://schemas.microsoft.com/office/drawing/2014/main" id="{A73E524B-A1B2-0008-AF1C-66E70946F0B4}"/>
+              </a:ext>
+            </a:extLst>
+          </p:cNvPr>
+          <p:cNvGrpSpPr/>
+          <p:nvPr/>
+        </p:nvGrpSpPr>
+        <p:grpSpPr>
+          <a:xfrm>
+            <a:off x="571500" y="2658491"/>
+            <a:ext cx="10977715" cy="380873"/>
+            <a:chOff x="571500" y="2719451"/>
+            <a:chExt cx="10977715" cy="380873"/>
+          </a:xfrm>
+        </p:grpSpPr>
+        <p:sp>
+          <p:nvSpPr>
+            <p:cNvPr id="100" name="Google Shape;100;p14"/>
+            <p:cNvSpPr txBox="1"/>
+            <p:nvPr/>
+          </p:nvSpPr>
+          <p:spPr>
+            <a:xfrm>
+              <a:off x="928840" y="2719451"/>
+              <a:ext cx="10620375" cy="380873"/>
+            </a:xfrm>
+            <a:prstGeom prst="rect">
+              <a:avLst/>
+            </a:prstGeom>
+            <a:noFill/>
+            <a:ln>
+              <a:noFill/>
+            </a:ln>
+          </p:spPr>
+          <p:txBody>
+            <a:bodyPr spcFirstLastPara="1" wrap="square" lIns="0" tIns="0" rIns="0" bIns="0" anchor="t" anchorCtr="0">
+              <a:spAutoFit/>
+            </a:bodyPr>
+            <a:lstStyle/>
+            <a:p>
+              <a:pPr marL="0" marR="0" lvl="0" indent="0" algn="l" rtl="0">
+                <a:lnSpc>
+                  <a:spcPct val="150000"/>
+                </a:lnSpc>
+                <a:spcBef>
+                  <a:spcPts val="0"/>
+                </a:spcBef>
+                <a:spcAft>
+                  <a:spcPts val="0"/>
+                </a:spcAft>
+                <a:buNone/>
+              </a:pPr>
+              <a:r>
+                <a:rPr lang="en-US" sz="1650" b="0" i="0" u="none" strike="noStrike" cap="none" dirty="0">
+                  <a:solidFill>
+                    <a:srgbClr val="FFFFFF"/>
+                  </a:solidFill>
+                  <a:latin typeface="Poppins Light"/>
+                  <a:ea typeface="Poppins Light"/>
+                  <a:cs typeface="Poppins Light"/>
+                  <a:sym typeface="Poppins Light"/>
+                </a:rPr>
+                <a:t>VOICE CLONING IS NOW A PAYMENT FRAUD VECTOR</a:t>
+              </a:r>
+              <a:endParaRPr dirty="0"/>
+            </a:p>
+          </p:txBody>
+        </p:sp>
+        <p:pic>
+          <p:nvPicPr>
+            <p:cNvPr id="105" name="Google Shape;105;p14" descr="image.png"/>
+            <p:cNvPicPr preferRelativeResize="0"/>
+            <p:nvPr/>
+          </p:nvPicPr>
+          <p:blipFill rotWithShape="1">
+            <a:blip r:embed="rId5">
+              <a:alphaModFix/>
+            </a:blip>
+            <a:srcRect/>
+            <a:stretch/>
+          </p:blipFill>
+          <p:spPr>
+            <a:xfrm>
+              <a:off x="571500" y="2819400"/>
+              <a:ext cx="200025" cy="247650"/>
+            </a:xfrm>
+            <a:prstGeom prst="rect">
+              <a:avLst/>
+            </a:prstGeom>
+            <a:noFill/>
+            <a:ln>
+              <a:noFill/>
+            </a:ln>
+          </p:spPr>
+        </p:pic>
+      </p:grpSp>
+      <p:grpSp>
+        <p:nvGrpSpPr>
+          <p:cNvPr id="4" name="Group 3">
+            <a:extLst>
+              <a:ext uri="{FF2B5EF4-FFF2-40B4-BE49-F238E27FC236}">
+                <a16:creationId xmlns:a16="http://schemas.microsoft.com/office/drawing/2014/main" id="{8BDCEEF2-B973-65CB-4419-90818D61867D}"/>
+              </a:ext>
+            </a:extLst>
+          </p:cNvPr>
+          <p:cNvGrpSpPr/>
+          <p:nvPr/>
+        </p:nvGrpSpPr>
+        <p:grpSpPr>
+          <a:xfrm>
+            <a:off x="571500" y="3188813"/>
+            <a:ext cx="5238750" cy="314325"/>
+            <a:chOff x="571500" y="3657600"/>
+            <a:chExt cx="5238750" cy="314325"/>
+          </a:xfrm>
+        </p:grpSpPr>
+        <p:sp>
+          <p:nvSpPr>
+            <p:cNvPr id="101" name="Google Shape;101;p14"/>
+            <p:cNvSpPr txBox="1"/>
+            <p:nvPr/>
+          </p:nvSpPr>
+          <p:spPr>
+            <a:xfrm>
+              <a:off x="1000125" y="3657600"/>
+              <a:ext cx="4810125" cy="314325"/>
+            </a:xfrm>
+            <a:prstGeom prst="rect">
+              <a:avLst/>
+            </a:prstGeom>
+            <a:noFill/>
+            <a:ln>
+              <a:noFill/>
+            </a:ln>
+          </p:spPr>
+          <p:txBody>
+            <a:bodyPr spcFirstLastPara="1" wrap="square" lIns="0" tIns="0" rIns="0" bIns="0" anchor="t" anchorCtr="0">
+              <a:spAutoFit/>
+            </a:bodyPr>
+            <a:lstStyle/>
+            <a:p>
+              <a:pPr marL="0" marR="0" lvl="0" indent="0" algn="l" rtl="0">
+                <a:lnSpc>
+                  <a:spcPct val="150000"/>
+                </a:lnSpc>
+                <a:spcBef>
+                  <a:spcPts val="0"/>
+                </a:spcBef>
+                <a:spcAft>
+                  <a:spcPts val="0"/>
+                </a:spcAft>
+                <a:buNone/>
+              </a:pPr>
+              <a:r>
+                <a:rPr lang="en-US" sz="1650" b="0" i="0" u="none" strike="noStrike" cap="none" dirty="0">
+                  <a:solidFill>
+                    <a:srgbClr val="FFFFFF"/>
+                  </a:solidFill>
+                  <a:latin typeface="Poppins Light"/>
+                  <a:ea typeface="Poppins Light"/>
+                  <a:cs typeface="Poppins Light"/>
+                  <a:sym typeface="Poppins Light"/>
+                </a:rPr>
+                <a:t>UPI fraud: ₹805 crore, 10.64 lakh incidents (Apr–Nov FY26)</a:t>
+              </a:r>
+              <a:endParaRPr dirty="0"/>
+            </a:p>
+          </p:txBody>
+        </p:sp>
+        <p:pic>
+          <p:nvPicPr>
+            <p:cNvPr id="106" name="Google Shape;106;p14" descr="image.png"/>
+            <p:cNvPicPr preferRelativeResize="0"/>
+            <p:nvPr/>
+          </p:nvPicPr>
+          <p:blipFill rotWithShape="1">
+            <a:blip r:embed="rId5">
+              <a:alphaModFix/>
+            </a:blip>
+            <a:srcRect/>
+            <a:stretch/>
+          </p:blipFill>
+          <p:spPr>
+            <a:xfrm>
+              <a:off x="571500" y="3686175"/>
+              <a:ext cx="200025" cy="247650"/>
+            </a:xfrm>
+            <a:prstGeom prst="rect">
+              <a:avLst/>
+            </a:prstGeom>
+            <a:noFill/>
+            <a:ln>
+              <a:noFill/>
+            </a:ln>
+          </p:spPr>
+        </p:pic>
+      </p:grpSp>
+      <p:grpSp>
+        <p:nvGrpSpPr>
+          <p:cNvPr id="5" name="Group 4">
+            <a:extLst>
+              <a:ext uri="{FF2B5EF4-FFF2-40B4-BE49-F238E27FC236}">
+                <a16:creationId xmlns:a16="http://schemas.microsoft.com/office/drawing/2014/main" id="{776B38BC-4A69-5F43-A0F5-137CD55E4FA8}"/>
+              </a:ext>
+            </a:extLst>
+          </p:cNvPr>
+          <p:cNvGrpSpPr/>
+          <p:nvPr/>
+        </p:nvGrpSpPr>
+        <p:grpSpPr>
+          <a:xfrm>
+            <a:off x="571500" y="3741263"/>
+            <a:ext cx="5238750" cy="314325"/>
+            <a:chOff x="571500" y="4210050"/>
+            <a:chExt cx="5238750" cy="314325"/>
+          </a:xfrm>
+        </p:grpSpPr>
+        <p:sp>
+          <p:nvSpPr>
+            <p:cNvPr id="102" name="Google Shape;102;p14"/>
+            <p:cNvSpPr txBox="1"/>
+            <p:nvPr/>
+          </p:nvSpPr>
+          <p:spPr>
+            <a:xfrm>
+              <a:off x="1000125" y="4210050"/>
+              <a:ext cx="4810125" cy="314325"/>
+            </a:xfrm>
+            <a:prstGeom prst="rect">
+              <a:avLst/>
+            </a:prstGeom>
+            <a:noFill/>
+            <a:ln>
+              <a:noFill/>
+            </a:ln>
+          </p:spPr>
+          <p:txBody>
+            <a:bodyPr spcFirstLastPara="1" wrap="square" lIns="0" tIns="0" rIns="0" bIns="0" anchor="t" anchorCtr="0">
+              <a:spAutoFit/>
+            </a:bodyPr>
+            <a:lstStyle/>
+            <a:p>
+              <a:pPr marL="0" marR="0" lvl="0" indent="0" algn="l" rtl="0">
+                <a:lnSpc>
+                  <a:spcPct val="150000"/>
+                </a:lnSpc>
+                <a:spcBef>
+                  <a:spcPts val="0"/>
+                </a:spcBef>
+                <a:spcAft>
+                  <a:spcPts val="0"/>
+                </a:spcAft>
+                <a:buNone/>
+              </a:pPr>
+              <a:r>
+                <a:rPr lang="en-US" sz="1650" b="0" i="0" u="none" strike="noStrike" cap="none" dirty="0">
+                  <a:solidFill>
+                    <a:srgbClr val="FFFFFF"/>
+                  </a:solidFill>
+                  <a:latin typeface="Poppins Light"/>
+                  <a:ea typeface="Poppins Light"/>
+                  <a:cs typeface="Poppins Light"/>
+                  <a:sym typeface="Poppins Light"/>
+                </a:rPr>
+                <a:t>One cloned voice, ₹1.97 lakh lost, 10 minutes (Hyderabad, 2025)</a:t>
+              </a:r>
+              <a:endParaRPr dirty="0"/>
+            </a:p>
+          </p:txBody>
+        </p:sp>
+        <p:pic>
+          <p:nvPicPr>
+            <p:cNvPr id="107" name="Google Shape;107;p14" descr="image.png"/>
+            <p:cNvPicPr preferRelativeResize="0"/>
+            <p:nvPr/>
+          </p:nvPicPr>
+          <p:blipFill rotWithShape="1">
+            <a:blip r:embed="rId5">
+              <a:alphaModFix/>
+            </a:blip>
+            <a:srcRect/>
+            <a:stretch/>
+          </p:blipFill>
+          <p:spPr>
+            <a:xfrm>
+              <a:off x="571500" y="4238625"/>
+              <a:ext cx="200025" cy="247650"/>
+            </a:xfrm>
+            <a:prstGeom prst="rect">
+              <a:avLst/>
+            </a:prstGeom>
+            <a:noFill/>
+            <a:ln>
+              <a:noFill/>
+            </a:ln>
+          </p:spPr>
+        </p:pic>
+      </p:grpSp>
+      <p:grpSp>
+        <p:nvGrpSpPr>
+          <p:cNvPr id="6" name="Group 5">
+            <a:extLst>
+              <a:ext uri="{FF2B5EF4-FFF2-40B4-BE49-F238E27FC236}">
+                <a16:creationId xmlns:a16="http://schemas.microsoft.com/office/drawing/2014/main" id="{CF6956BC-D0DD-126D-0DC6-421091A25E5A}"/>
+              </a:ext>
+            </a:extLst>
+          </p:cNvPr>
+          <p:cNvGrpSpPr/>
+          <p:nvPr/>
+        </p:nvGrpSpPr>
+        <p:grpSpPr>
+          <a:xfrm>
+            <a:off x="571500" y="4293713"/>
+            <a:ext cx="5238750" cy="314325"/>
+            <a:chOff x="571500" y="4762500"/>
+            <a:chExt cx="5238750" cy="314325"/>
+          </a:xfrm>
+        </p:grpSpPr>
+        <p:sp>
+          <p:nvSpPr>
+            <p:cNvPr id="103" name="Google Shape;103;p14"/>
+            <p:cNvSpPr txBox="1"/>
+            <p:nvPr/>
+          </p:nvSpPr>
+          <p:spPr>
+            <a:xfrm>
+              <a:off x="1000125" y="4762500"/>
+              <a:ext cx="4810125" cy="314325"/>
+            </a:xfrm>
+            <a:prstGeom prst="rect">
+              <a:avLst/>
+            </a:prstGeom>
+            <a:noFill/>
+            <a:ln>
+              <a:noFill/>
+            </a:ln>
+          </p:spPr>
+          <p:txBody>
+            <a:bodyPr spcFirstLastPara="1" wrap="square" lIns="0" tIns="0" rIns="0" bIns="0" anchor="t" anchorCtr="0">
+              <a:spAutoFit/>
+            </a:bodyPr>
+            <a:lstStyle/>
+            <a:p>
+              <a:pPr marL="0" marR="0" lvl="0" indent="0" algn="l" rtl="0">
+                <a:lnSpc>
+                  <a:spcPct val="150000"/>
+                </a:lnSpc>
+                <a:spcBef>
+                  <a:spcPts val="0"/>
+                </a:spcBef>
+                <a:spcAft>
+                  <a:spcPts val="0"/>
+                </a:spcAft>
+                <a:buNone/>
+              </a:pPr>
+              <a:r>
+                <a:rPr lang="en-US" sz="1650" b="0" i="0" u="none" strike="noStrike" cap="none" dirty="0">
+                  <a:solidFill>
+                    <a:srgbClr val="FFFFFF"/>
+                  </a:solidFill>
+                  <a:latin typeface="Poppins Light"/>
+                  <a:ea typeface="Poppins Light"/>
+                  <a:cs typeface="Poppins Light"/>
+                  <a:sym typeface="Poppins Light"/>
+                </a:rPr>
+                <a:t>GenAI voice cloning: 10,000 frauds/day per scammer (expert est.)</a:t>
+              </a:r>
+              <a:endParaRPr dirty="0"/>
+            </a:p>
+          </p:txBody>
+        </p:sp>
+        <p:pic>
+          <p:nvPicPr>
+            <p:cNvPr id="108" name="Google Shape;108;p14" descr="image.png"/>
+            <p:cNvPicPr preferRelativeResize="0"/>
+            <p:nvPr/>
+          </p:nvPicPr>
+          <p:blipFill rotWithShape="1">
+            <a:blip r:embed="rId5">
+              <a:alphaModFix/>
+            </a:blip>
+            <a:srcRect/>
+            <a:stretch/>
+          </p:blipFill>
+          <p:spPr>
+            <a:xfrm>
+              <a:off x="571500" y="4791075"/>
+              <a:ext cx="200025" cy="247650"/>
+            </a:xfrm>
+            <a:prstGeom prst="rect">
+              <a:avLst/>
+            </a:prstGeom>
+            <a:noFill/>
+            <a:ln>
+              <a:noFill/>
+            </a:ln>
+          </p:spPr>
+        </p:pic>
+      </p:grpSp>
+      <p:sp>
+        <p:nvSpPr>
+          <p:cNvPr id="109" name="Google Shape;109;p14"/>
+          <p:cNvSpPr txBox="1"/>
+          <p:nvPr/>
+        </p:nvSpPr>
+        <p:spPr>
+          <a:xfrm>
+            <a:off x="571500" y="571500"/>
+            <a:ext cx="11601450" cy="628650"/>
+          </a:xfrm>
+          <a:prstGeom prst="rect">
+            <a:avLst/>
+          </a:prstGeom>
+          <a:noFill/>
+          <a:ln>
+            <a:noFill/>
+          </a:ln>
+        </p:spPr>
+        <p:txBody>
+          <a:bodyPr spcFirstLastPara="1" wrap="square" lIns="0" tIns="0" rIns="0" bIns="0" anchor="t" anchorCtr="0">
+            <a:spAutoFit/>
+          </a:bodyPr>
+          <a:lstStyle/>
+          <a:p>
+            <a:pPr marL="0" marR="0" lvl="0" indent="0" algn="l" rtl="0">
+              <a:spcBef>
+                <a:spcPts val="0"/>
+              </a:spcBef>
+              <a:spcAft>
+                <a:spcPts val="0"/>
+              </a:spcAft>
+              <a:buNone/>
+            </a:pPr>
+            <a:r>
+              <a:rPr lang="en-US" sz="3600" b="1" i="0" u="none" strike="noStrike" cap="none" dirty="0">
+                <a:solidFill>
+                  <a:srgbClr val="F2EEFA"/>
+                </a:solidFill>
+                <a:latin typeface="Playfair Display"/>
+                <a:ea typeface="Playfair Display"/>
+                <a:cs typeface="Playfair Display"/>
+                <a:sym typeface="Playfair Display"/>
+              </a:rPr>
+              <a:t>PROBLEM STATEMENT</a:t>
+            </a:r>
+            <a:endParaRPr dirty="0"/>
+          </a:p>
+        </p:txBody>
+      </p:sp>
+      <p:sp>
+        <p:nvSpPr>
+          <p:cNvPr id="110" name="Google Shape;110;p14"/>
+          <p:cNvSpPr/>
+          <p:nvPr/>
+        </p:nvSpPr>
+        <p:spPr>
+          <a:xfrm>
+            <a:off x="571500" y="1323975"/>
+            <a:ext cx="11049000" cy="19050"/>
+          </a:xfrm>
+          <a:prstGeom prst="rect">
+            <a:avLst/>
+          </a:prstGeom>
+          <a:solidFill>
+            <a:srgbClr val="D4AF37"/>
+          </a:solidFill>
+          <a:ln>
+            <a:noFill/>
+          </a:ln>
+        </p:spPr>
+        <p:txBody>
+          <a:bodyPr spcFirstLastPara="1" wrap="square" lIns="91425" tIns="45700" rIns="91425" bIns="45700" anchor="ctr" anchorCtr="0">
+            <a:noAutofit/>
+          </a:bodyPr>
+          <a:lstStyle/>
+          <a:p>
+            <a:pPr marL="0" marR="0" lvl="0" indent="0" algn="ctr" rtl="0">
+              <a:spcBef>
+                <a:spcPts val="0"/>
+              </a:spcBef>
+              <a:spcAft>
+                <a:spcPts val="0"/>
+              </a:spcAft>
+              <a:buNone/>
+            </a:pPr>
+            <a:endParaRPr sz="1800" b="0" i="0" u="none" strike="noStrike" cap="none" dirty="0">
+              <a:solidFill>
+                <a:schemeClr val="dk1"/>
+              </a:solidFill>
+              <a:latin typeface="Calibri"/>
+              <a:ea typeface="Calibri"/>
+              <a:cs typeface="Calibri"/>
+              <a:sym typeface="Calibri"/>
+            </a:endParaRPr>
+          </a:p>
+        </p:txBody>
+      </p:sp>
+      <p:sp>
+        <p:nvSpPr>
+          <p:cNvPr id="111" name="Google Shape;111;p14"/>
+          <p:cNvSpPr txBox="1"/>
+          <p:nvPr/>
+        </p:nvSpPr>
+        <p:spPr>
+          <a:xfrm>
+            <a:off x="11706225" y="6467475"/>
+            <a:ext cx="200025" cy="161583"/>
+          </a:xfrm>
+          <a:prstGeom prst="rect">
+            <a:avLst/>
+          </a:prstGeom>
+          <a:noFill/>
+          <a:ln>
+            <a:noFill/>
+          </a:ln>
+        </p:spPr>
+        <p:txBody>
+          <a:bodyPr spcFirstLastPara="1" wrap="square" lIns="0" tIns="0" rIns="0" bIns="0" anchor="t" anchorCtr="0">
+            <a:spAutoFit/>
+          </a:bodyPr>
+          <a:lstStyle/>
+          <a:p>
+            <a:pPr marL="0" marR="0" lvl="0" indent="0" algn="l" rtl="0">
+              <a:spcBef>
+                <a:spcPts val="0"/>
+              </a:spcBef>
+              <a:spcAft>
+                <a:spcPts val="0"/>
+              </a:spcAft>
+              <a:buNone/>
+            </a:pPr>
+            <a:r>
+              <a:rPr lang="en-US" sz="1050" b="0" i="0" u="none" strike="noStrike" cap="none" dirty="0">
+                <a:solidFill>
+                  <a:srgbClr val="FFFFFF"/>
+                </a:solidFill>
+                <a:latin typeface="Poppins"/>
+                <a:ea typeface="Poppins"/>
+                <a:cs typeface="Poppins"/>
+                <a:sym typeface="Poppins"/>
+              </a:rPr>
+              <a:t>02</a:t>
+            </a:r>
+            <a:endParaRPr dirty="0"/>
+          </a:p>
+        </p:txBody>
+      </p:sp>
+      <p:pic>
+        <p:nvPicPr>
+          <p:cNvPr id="7" name="Picture 6">
+            <a:extLst>
+              <a:ext uri="{FF2B5EF4-FFF2-40B4-BE49-F238E27FC236}">
+                <a16:creationId xmlns:a16="http://schemas.microsoft.com/office/drawing/2014/main" id="{81D6A019-74ED-9001-54F2-BCA9F7EF5C85}"/>
+              </a:ext>
+            </a:extLst>
+          </p:cNvPr>
+          <p:cNvPicPr>
+            <a:picLocks noChangeAspect="1"/>
+          </p:cNvPicPr>
+          <p:nvPr/>
+        </p:nvPicPr>
+        <p:blipFill>
+          <a:blip r:embed="rId6"/>
+          <a:stretch>
+            <a:fillRect/>
+          </a:stretch>
+        </p:blipFill>
+        <p:spPr>
+          <a:xfrm>
+            <a:off x="9361386" y="134593"/>
+            <a:ext cx="2259114" cy="1169718"/>
+          </a:xfrm>
+          <a:prstGeom prst="rect">
+            <a:avLst/>
+          </a:prstGeom>
+        </p:spPr>
+      </p:pic>
+    </p:spTree>
+  </p:cSld>
+  <p:clrMapOvr>
+    <a:masterClrMapping/>
+  </p:clrMapOvr>
+</p:sld>
+</file>
+
+<file path=ppt/slides/slide3.xml><?xml version="1.0" encoding="utf-8"?>
+<p:sld xmlns:a="http://schemas.openxmlformats.org/drawingml/2006/main" xmlns:r="http://schemas.openxmlformats.org/officeDocument/2006/relationships" xmlns:p="http://schemas.openxmlformats.org/presentationml/2006/main">
+  <p:cSld>
+    <p:spTree>
+      <p:nvGrpSpPr>
+        <p:cNvPr id="1" name="Shape 97"/>
+        <p:cNvGrpSpPr/>
+        <p:nvPr/>
+      </p:nvGrpSpPr>
+      <p:grpSpPr>
+        <a:xfrm>
+          <a:off x="0" y="0"/>
+          <a:ext cx="0" cy="0"/>
+          <a:chOff x="0" y="0"/>
+          <a:chExt cx="0" cy="0"/>
+        </a:xfrm>
+      </p:grpSpPr>
+      <p:pic>
+        <p:nvPicPr>
+          <p:cNvPr id="2" name="Google Shape;84;p13" descr="image.png">
+            <a:extLst>
+              <a:ext uri="{FF2B5EF4-FFF2-40B4-BE49-F238E27FC236}">
+                <a16:creationId xmlns:a16="http://schemas.microsoft.com/office/drawing/2014/main" id="{A7427FBB-6B82-28C2-C807-6A3DF49A1F1A}"/>
+              </a:ext>
+            </a:extLst>
+          </p:cNvPr>
+          <p:cNvPicPr preferRelativeResize="0"/>
+          <p:nvPr/>
+        </p:nvPicPr>
+        <p:blipFill rotWithShape="1">
+          <a:blip r:embed="rId3">
+            <a:alphaModFix/>
+          </a:blip>
+          <a:srcRect/>
+          <a:stretch/>
+        </p:blipFill>
+        <p:spPr>
+          <a:xfrm>
+            <a:off x="-157315" y="-88489"/>
+            <a:ext cx="12457469" cy="7007326"/>
+          </a:xfrm>
+          <a:prstGeom prst="rect">
+            <a:avLst/>
+          </a:prstGeom>
+          <a:noFill/>
+          <a:ln>
+            <a:noFill/>
+          </a:ln>
+        </p:spPr>
+      </p:pic>
+      <p:pic>
+        <p:nvPicPr>
+          <p:cNvPr id="98" name="Google Shape;98;p14" descr="image.png"/>
+          <p:cNvPicPr preferRelativeResize="0"/>
+          <p:nvPr/>
+        </p:nvPicPr>
+        <p:blipFill rotWithShape="1">
+          <a:blip r:embed="rId4">
+            <a:alphaModFix amt="50000"/>
+          </a:blip>
+          <a:srcRect/>
+          <a:stretch/>
+        </p:blipFill>
+        <p:spPr>
+          <a:xfrm>
+            <a:off x="0" y="0"/>
+            <a:ext cx="12192000" cy="6858000"/>
+          </a:xfrm>
+          <a:prstGeom prst="rect">
+            <a:avLst/>
+          </a:prstGeom>
+          <a:noFill/>
+          <a:ln>
+            <a:noFill/>
+          </a:ln>
+        </p:spPr>
+      </p:pic>
+      <p:grpSp>
+        <p:nvGrpSpPr>
+          <p:cNvPr id="3" name="Group 2">
+            <a:extLst>
+              <a:ext uri="{FF2B5EF4-FFF2-40B4-BE49-F238E27FC236}">
+                <a16:creationId xmlns:a16="http://schemas.microsoft.com/office/drawing/2014/main" id="{A73E524B-A1B2-0008-AF1C-66E70946F0B4}"/>
+              </a:ext>
+            </a:extLst>
+          </p:cNvPr>
+          <p:cNvGrpSpPr/>
+          <p:nvPr/>
+        </p:nvGrpSpPr>
+        <p:grpSpPr>
+          <a:xfrm>
+            <a:off x="571500" y="2658491"/>
+            <a:ext cx="10977715" cy="380873"/>
+            <a:chOff x="571500" y="2719451"/>
+            <a:chExt cx="10977715" cy="380873"/>
+          </a:xfrm>
+        </p:grpSpPr>
+        <p:sp>
+          <p:nvSpPr>
+            <p:cNvPr id="100" name="Google Shape;100;p14"/>
+            <p:cNvSpPr txBox="1"/>
+            <p:nvPr/>
+          </p:nvSpPr>
+          <p:spPr>
+            <a:xfrm>
+              <a:off x="928840" y="2719451"/>
+              <a:ext cx="10620375" cy="380873"/>
+            </a:xfrm>
+            <a:prstGeom prst="rect">
+              <a:avLst/>
+            </a:prstGeom>
+            <a:noFill/>
+            <a:ln>
+              <a:noFill/>
+            </a:ln>
+          </p:spPr>
+          <p:txBody>
+            <a:bodyPr spcFirstLastPara="1" wrap="square" lIns="0" tIns="0" rIns="0" bIns="0" anchor="t" anchorCtr="0">
+              <a:spAutoFit/>
+            </a:bodyPr>
+            <a:lstStyle/>
+            <a:p>
+              <a:pPr marL="0" marR="0" lvl="0" indent="0" algn="l" rtl="0">
+                <a:lnSpc>
+                  <a:spcPct val="150000"/>
+                </a:lnSpc>
+                <a:spcBef>
+                  <a:spcPts val="0"/>
+                </a:spcBef>
+                <a:spcAft>
+                  <a:spcPts val="0"/>
+                </a:spcAft>
+                <a:buNone/>
+              </a:pPr>
+              <a:r>
+                <a:rPr lang="en-US" sz="1650" b="0" i="0" u="none" strike="noStrike" cap="none" dirty="0">
+                  <a:solidFill>
+                    <a:srgbClr val="FFFFFF"/>
+                  </a:solidFill>
+                  <a:latin typeface="Poppins Light"/>
+                  <a:ea typeface="Poppins Light"/>
+                  <a:cs typeface="Poppins Light"/>
+                  <a:sym typeface="Poppins Light"/>
+                </a:rPr>
+                <a:t>PROPOSED SOLUTION</a:t>
+              </a:r>
+              <a:endParaRPr dirty="0"/>
+            </a:p>
+          </p:txBody>
+        </p:sp>
+        <p:pic>
+          <p:nvPicPr>
+            <p:cNvPr id="105" name="Google Shape;105;p14" descr="image.png"/>
+            <p:cNvPicPr preferRelativeResize="0"/>
+            <p:nvPr/>
+          </p:nvPicPr>
+          <p:blipFill rotWithShape="1">
+            <a:blip r:embed="rId5">
+              <a:alphaModFix/>
+            </a:blip>
+            <a:srcRect/>
+            <a:stretch/>
+          </p:blipFill>
+          <p:spPr>
+            <a:xfrm>
+              <a:off x="571500" y="2819400"/>
+              <a:ext cx="200025" cy="247650"/>
+            </a:xfrm>
+            <a:prstGeom prst="rect">
+              <a:avLst/>
+            </a:prstGeom>
+            <a:noFill/>
+            <a:ln>
+              <a:noFill/>
+            </a:ln>
+          </p:spPr>
+        </p:pic>
+      </p:grpSp>
+      <p:grpSp>
+        <p:nvGrpSpPr>
+          <p:cNvPr id="4" name="Group 3">
+            <a:extLst>
+              <a:ext uri="{FF2B5EF4-FFF2-40B4-BE49-F238E27FC236}">
+                <a16:creationId xmlns:a16="http://schemas.microsoft.com/office/drawing/2014/main" id="{8BDCEEF2-B973-65CB-4419-90818D61867D}"/>
+              </a:ext>
+            </a:extLst>
+          </p:cNvPr>
+          <p:cNvGrpSpPr/>
+          <p:nvPr/>
+        </p:nvGrpSpPr>
+        <p:grpSpPr>
+          <a:xfrm>
+            <a:off x="571500" y="3188813"/>
+            <a:ext cx="5238750" cy="314325"/>
+            <a:chOff x="571500" y="3657600"/>
+            <a:chExt cx="5238750" cy="314325"/>
+          </a:xfrm>
+        </p:grpSpPr>
+        <p:sp>
+          <p:nvSpPr>
+            <p:cNvPr id="101" name="Google Shape;101;p14"/>
+            <p:cNvSpPr txBox="1"/>
+            <p:nvPr/>
+          </p:nvSpPr>
+          <p:spPr>
+            <a:xfrm>
+              <a:off x="1000125" y="3657600"/>
+              <a:ext cx="4810125" cy="314325"/>
+            </a:xfrm>
+            <a:prstGeom prst="rect">
+              <a:avLst/>
+            </a:prstGeom>
+            <a:noFill/>
+            <a:ln>
+              <a:noFill/>
+            </a:ln>
+          </p:spPr>
+          <p:txBody>
+            <a:bodyPr spcFirstLastPara="1" wrap="square" lIns="0" tIns="0" rIns="0" bIns="0" anchor="t" anchorCtr="0">
+              <a:spAutoFit/>
+            </a:bodyPr>
+            <a:lstStyle/>
+            <a:p>
+              <a:pPr marL="0" marR="0" lvl="0" indent="0" algn="l" rtl="0">
+                <a:lnSpc>
+                  <a:spcPct val="150000"/>
+                </a:lnSpc>
+                <a:spcBef>
+                  <a:spcPts val="0"/>
+                </a:spcBef>
+                <a:spcAft>
+                  <a:spcPts val="0"/>
+                </a:spcAft>
+                <a:buNone/>
+              </a:pPr>
+              <a:r>
+                <a:rPr lang="en-US" sz="1650" b="0" i="0" u="none" strike="noStrike" cap="none" dirty="0">
+                  <a:solidFill>
+                    <a:srgbClr val="FFFFFF"/>
+                  </a:solidFill>
+                  <a:latin typeface="Poppins Light"/>
+                  <a:ea typeface="Poppins Light"/>
+                  <a:cs typeface="Poppins Light"/>
+                  <a:sym typeface="Poppins Light"/>
+                </a:rPr>
+                <a:t>Real-time deepfake-voice detector for UPI / voice-banking calls</a:t>
+              </a:r>
+              <a:endParaRPr dirty="0"/>
+            </a:p>
+          </p:txBody>
+        </p:sp>
+        <p:pic>
+          <p:nvPicPr>
+            <p:cNvPr id="106" name="Google Shape;106;p14" descr="image.png"/>
+            <p:cNvPicPr preferRelativeResize="0"/>
+            <p:nvPr/>
+          </p:nvPicPr>
+          <p:blipFill rotWithShape="1">
+            <a:blip r:embed="rId5">
+              <a:alphaModFix/>
+            </a:blip>
+            <a:srcRect/>
+            <a:stretch/>
+          </p:blipFill>
+          <p:spPr>
+            <a:xfrm>
+              <a:off x="571500" y="3686175"/>
+              <a:ext cx="200025" cy="247650"/>
+            </a:xfrm>
+            <a:prstGeom prst="rect">
+              <a:avLst/>
+            </a:prstGeom>
+            <a:noFill/>
+            <a:ln>
+              <a:noFill/>
+            </a:ln>
+          </p:spPr>
+        </p:pic>
+      </p:grpSp>
+      <p:grpSp>
+        <p:nvGrpSpPr>
+          <p:cNvPr id="5" name="Group 4">
+            <a:extLst>
+              <a:ext uri="{FF2B5EF4-FFF2-40B4-BE49-F238E27FC236}">
+                <a16:creationId xmlns:a16="http://schemas.microsoft.com/office/drawing/2014/main" id="{776B38BC-4A69-5F43-A0F5-137CD55E4FA8}"/>
+              </a:ext>
+            </a:extLst>
+          </p:cNvPr>
+          <p:cNvGrpSpPr/>
+          <p:nvPr/>
+        </p:nvGrpSpPr>
+        <p:grpSpPr>
+          <a:xfrm>
+            <a:off x="571500" y="3741263"/>
+            <a:ext cx="5238750" cy="314325"/>
+            <a:chOff x="571500" y="4210050"/>
+            <a:chExt cx="5238750" cy="314325"/>
+          </a:xfrm>
+        </p:grpSpPr>
+        <p:sp>
+          <p:nvSpPr>
+            <p:cNvPr id="102" name="Google Shape;102;p14"/>
+            <p:cNvSpPr txBox="1"/>
+            <p:nvPr/>
+          </p:nvSpPr>
+          <p:spPr>
+            <a:xfrm>
+              <a:off x="1000125" y="4210050"/>
+              <a:ext cx="4810125" cy="314325"/>
+            </a:xfrm>
+            <a:prstGeom prst="rect">
+              <a:avLst/>
+            </a:prstGeom>
+            <a:noFill/>
+            <a:ln>
+              <a:noFill/>
+            </a:ln>
+          </p:spPr>
+          <p:txBody>
+            <a:bodyPr spcFirstLastPara="1" wrap="square" lIns="0" tIns="0" rIns="0" bIns="0" anchor="t" anchorCtr="0">
+              <a:spAutoFit/>
+            </a:bodyPr>
+            <a:lstStyle/>
+            <a:p>
+              <a:pPr marL="0" marR="0" lvl="0" indent="0" algn="l" rtl="0">
+                <a:lnSpc>
+                  <a:spcPct val="150000"/>
+                </a:lnSpc>
+                <a:spcBef>
+                  <a:spcPts val="0"/>
+                </a:spcBef>
+                <a:spcAft>
+                  <a:spcPts val="0"/>
+                </a:spcAft>
+                <a:buNone/>
+              </a:pPr>
+              <a:r>
+                <a:rPr lang="en-US" sz="1650" b="0" i="0" u="none" strike="noStrike" cap="none" dirty="0">
+                  <a:solidFill>
+                    <a:srgbClr val="FFFFFF"/>
+                  </a:solidFill>
+                  <a:latin typeface="Poppins Light"/>
+                  <a:ea typeface="Poppins Light"/>
+                  <a:cs typeface="Poppins Light"/>
+                  <a:sym typeface="Poppins Light"/>
+                </a:rPr>
+                <a:t>Spoof score 0–1 + pass/fail verdict in &lt;500 ms</a:t>
+              </a:r>
+              <a:endParaRPr dirty="0"/>
+            </a:p>
+          </p:txBody>
+        </p:sp>
+        <p:pic>
+          <p:nvPicPr>
+            <p:cNvPr id="107" name="Google Shape;107;p14" descr="image.png"/>
+            <p:cNvPicPr preferRelativeResize="0"/>
+            <p:nvPr/>
+          </p:nvPicPr>
+          <p:blipFill rotWithShape="1">
+            <a:blip r:embed="rId5">
+              <a:alphaModFix/>
+            </a:blip>
+            <a:srcRect/>
+            <a:stretch/>
+          </p:blipFill>
+          <p:spPr>
+            <a:xfrm>
+              <a:off x="571500" y="4238625"/>
+              <a:ext cx="200025" cy="247650"/>
+            </a:xfrm>
+            <a:prstGeom prst="rect">
+              <a:avLst/>
+            </a:prstGeom>
+            <a:noFill/>
+            <a:ln>
+              <a:noFill/>
+            </a:ln>
+          </p:spPr>
+        </p:pic>
+      </p:grpSp>
+      <p:grpSp>
+        <p:nvGrpSpPr>
+          <p:cNvPr id="6" name="Group 5">
+            <a:extLst>
+              <a:ext uri="{FF2B5EF4-FFF2-40B4-BE49-F238E27FC236}">
+                <a16:creationId xmlns:a16="http://schemas.microsoft.com/office/drawing/2014/main" id="{CF6956BC-D0DD-126D-0DC6-421091A25E5A}"/>
+              </a:ext>
+            </a:extLst>
+          </p:cNvPr>
+          <p:cNvGrpSpPr/>
+          <p:nvPr/>
+        </p:nvGrpSpPr>
+        <p:grpSpPr>
+          <a:xfrm>
+            <a:off x="571500" y="4293713"/>
+            <a:ext cx="5238750" cy="314325"/>
+            <a:chOff x="571500" y="4762500"/>
+            <a:chExt cx="5238750" cy="314325"/>
+          </a:xfrm>
+        </p:grpSpPr>
+        <p:sp>
+          <p:nvSpPr>
+            <p:cNvPr id="103" name="Google Shape;103;p14"/>
+            <p:cNvSpPr txBox="1"/>
+            <p:nvPr/>
+          </p:nvSpPr>
+          <p:spPr>
+            <a:xfrm>
+              <a:off x="1000125" y="4762500"/>
+              <a:ext cx="4810125" cy="314325"/>
+            </a:xfrm>
+            <a:prstGeom prst="rect">
+              <a:avLst/>
+            </a:prstGeom>
+            <a:noFill/>
+            <a:ln>
+              <a:noFill/>
+            </a:ln>
+          </p:spPr>
+          <p:txBody>
+            <a:bodyPr spcFirstLastPara="1" wrap="square" lIns="0" tIns="0" rIns="0" bIns="0" anchor="t" anchorCtr="0">
+              <a:spAutoFit/>
+            </a:bodyPr>
+            <a:lstStyle/>
+            <a:p>
+              <a:pPr marL="0" marR="0" lvl="0" indent="0" algn="l" rtl="0">
+                <a:lnSpc>
+                  <a:spcPct val="150000"/>
+                </a:lnSpc>
+                <a:spcBef>
+                  <a:spcPts val="0"/>
+                </a:spcBef>
+                <a:spcAft>
+                  <a:spcPts val="0"/>
+                </a:spcAft>
+                <a:buNone/>
+              </a:pPr>
+              <a:r>
+                <a:rPr lang="en-US" sz="1650" b="0" i="0" u="none" strike="noStrike" cap="none" dirty="0">
+                  <a:solidFill>
+                    <a:srgbClr val="FFFFFF"/>
+                  </a:solidFill>
+                  <a:latin typeface="Poppins Light"/>
+                  <a:ea typeface="Poppins Light"/>
+                  <a:cs typeface="Poppins Light"/>
+                  <a:sym typeface="Poppins Light"/>
+                </a:rPr>
+                <a:t>India-first: Hindi data, UPI flow, RBI-aligned</a:t>
+              </a:r>
+              <a:endParaRPr dirty="0"/>
+            </a:p>
+          </p:txBody>
+        </p:sp>
+        <p:pic>
+          <p:nvPicPr>
+            <p:cNvPr id="108" name="Google Shape;108;p14" descr="image.png"/>
+            <p:cNvPicPr preferRelativeResize="0"/>
+            <p:nvPr/>
+          </p:nvPicPr>
+          <p:blipFill rotWithShape="1">
+            <a:blip r:embed="rId5">
+              <a:alphaModFix/>
+            </a:blip>
+            <a:srcRect/>
+            <a:stretch/>
+          </p:blipFill>
+          <p:spPr>
+            <a:xfrm>
+              <a:off x="571500" y="4791075"/>
+              <a:ext cx="200025" cy="247650"/>
+            </a:xfrm>
+            <a:prstGeom prst="rect">
+              <a:avLst/>
+            </a:prstGeom>
+            <a:noFill/>
+            <a:ln>
+              <a:noFill/>
+            </a:ln>
+          </p:spPr>
+        </p:pic>
+      </p:grpSp>
+      <p:sp>
+        <p:nvSpPr>
+          <p:cNvPr id="109" name="Google Shape;109;p14"/>
+          <p:cNvSpPr txBox="1"/>
+          <p:nvPr/>
+        </p:nvSpPr>
+        <p:spPr>
+          <a:xfrm>
+            <a:off x="571500" y="571500"/>
+            <a:ext cx="11601450" cy="628650"/>
+          </a:xfrm>
+          <a:prstGeom prst="rect">
+            <a:avLst/>
+          </a:prstGeom>
+          <a:noFill/>
+          <a:ln>
+            <a:noFill/>
+          </a:ln>
+        </p:spPr>
+        <p:txBody>
+          <a:bodyPr spcFirstLastPara="1" wrap="square" lIns="0" tIns="0" rIns="0" bIns="0" anchor="t" anchorCtr="0">
+            <a:spAutoFit/>
+          </a:bodyPr>
+          <a:lstStyle/>
+          <a:p>
+            <a:pPr marL="0" marR="0" lvl="0" indent="0" algn="l" rtl="0">
+              <a:spcBef>
+                <a:spcPts val="0"/>
+              </a:spcBef>
+              <a:spcAft>
+                <a:spcPts val="0"/>
+              </a:spcAft>
+              <a:buNone/>
+            </a:pPr>
+            <a:r>
+              <a:rPr lang="en-US" sz="3600" b="1" i="0" u="none" strike="noStrike" cap="none" dirty="0">
+                <a:solidFill>
+                  <a:srgbClr val="F2EEFA"/>
+                </a:solidFill>
+                <a:latin typeface="Playfair Display"/>
+                <a:ea typeface="Playfair Display"/>
+                <a:cs typeface="Playfair Display"/>
+                <a:sym typeface="Playfair Display"/>
+              </a:rPr>
+              <a:t>ELDERSHIELD — SPOOF-SCORE EVERY VOICE, BEFORE THE PAYMENT</a:t>
+            </a:r>
+            <a:endParaRPr dirty="0"/>
+          </a:p>
+        </p:txBody>
+      </p:sp>
+      <p:sp>
+        <p:nvSpPr>
+          <p:cNvPr id="110" name="Google Shape;110;p14"/>
+          <p:cNvSpPr/>
+          <p:nvPr/>
+        </p:nvSpPr>
+        <p:spPr>
+          <a:xfrm>
+            <a:off x="571500" y="1323975"/>
+            <a:ext cx="11049000" cy="19050"/>
+          </a:xfrm>
+          <a:prstGeom prst="rect">
+            <a:avLst/>
+          </a:prstGeom>
+          <a:solidFill>
+            <a:srgbClr val="D4AF37"/>
+          </a:solidFill>
+          <a:ln>
+            <a:noFill/>
+          </a:ln>
+        </p:spPr>
+        <p:txBody>
+          <a:bodyPr spcFirstLastPara="1" wrap="square" lIns="91425" tIns="45700" rIns="91425" bIns="45700" anchor="ctr" anchorCtr="0">
+            <a:noAutofit/>
+          </a:bodyPr>
+          <a:lstStyle/>
+          <a:p>
+            <a:pPr marL="0" marR="0" lvl="0" indent="0" algn="ctr" rtl="0">
+              <a:spcBef>
+                <a:spcPts val="0"/>
+              </a:spcBef>
+              <a:spcAft>
+                <a:spcPts val="0"/>
+              </a:spcAft>
+              <a:buNone/>
+            </a:pPr>
+            <a:endParaRPr sz="1800" b="0" i="0" u="none" strike="noStrike" cap="none" dirty="0">
+              <a:solidFill>
+                <a:schemeClr val="dk1"/>
+              </a:solidFill>
+              <a:latin typeface="Calibri"/>
+              <a:ea typeface="Calibri"/>
+              <a:cs typeface="Calibri"/>
+              <a:sym typeface="Calibri"/>
+            </a:endParaRPr>
+          </a:p>
+        </p:txBody>
+      </p:sp>
+      <p:sp>
+        <p:nvSpPr>
+          <p:cNvPr id="111" name="Google Shape;111;p14"/>
+          <p:cNvSpPr txBox="1"/>
+          <p:nvPr/>
+        </p:nvSpPr>
+        <p:spPr>
+          <a:xfrm>
+            <a:off x="11706225" y="6467475"/>
+            <a:ext cx="200025" cy="161583"/>
+          </a:xfrm>
+          <a:prstGeom prst="rect">
+            <a:avLst/>
+          </a:prstGeom>
+          <a:noFill/>
+          <a:ln>
+            <a:noFill/>
+          </a:ln>
+        </p:spPr>
+        <p:txBody>
+          <a:bodyPr spcFirstLastPara="1" wrap="square" lIns="0" tIns="0" rIns="0" bIns="0" anchor="t" anchorCtr="0">
+            <a:spAutoFit/>
+          </a:bodyPr>
+          <a:lstStyle/>
+          <a:p>
+            <a:pPr marL="0" marR="0" lvl="0" indent="0" algn="l" rtl="0">
+              <a:spcBef>
+                <a:spcPts val="0"/>
+              </a:spcBef>
+              <a:spcAft>
+                <a:spcPts val="0"/>
+              </a:spcAft>
+              <a:buNone/>
+            </a:pPr>
+            <a:r>
+              <a:rPr lang="en-US" sz="1050" b="0" i="0" u="none" strike="noStrike" cap="none" dirty="0">
+                <a:solidFill>
+                  <a:srgbClr val="FFFFFF"/>
+                </a:solidFill>
+                <a:latin typeface="Poppins"/>
+                <a:ea typeface="Poppins"/>
+                <a:cs typeface="Poppins"/>
+                <a:sym typeface="Poppins"/>
+              </a:rPr>
+              <a:t>02</a:t>
+            </a:r>
+            <a:endParaRPr dirty="0"/>
+          </a:p>
+        </p:txBody>
+      </p:sp>
+      <p:pic>
+        <p:nvPicPr>
+          <p:cNvPr id="7" name="Picture 6">
+            <a:extLst>
+              <a:ext uri="{FF2B5EF4-FFF2-40B4-BE49-F238E27FC236}">
+                <a16:creationId xmlns:a16="http://schemas.microsoft.com/office/drawing/2014/main" id="{81D6A019-74ED-9001-54F2-BCA9F7EF5C85}"/>
+              </a:ext>
+            </a:extLst>
+          </p:cNvPr>
+          <p:cNvPicPr>
+            <a:picLocks noChangeAspect="1"/>
+          </p:cNvPicPr>
+          <p:nvPr/>
+        </p:nvPicPr>
+        <p:blipFill>
+          <a:blip r:embed="rId6"/>
+          <a:stretch>
+            <a:fillRect/>
+          </a:stretch>
+        </p:blipFill>
+        <p:spPr>
+          <a:xfrm>
+            <a:off x="9361386" y="134593"/>
+            <a:ext cx="2259114" cy="1169718"/>
+          </a:xfrm>
+          <a:prstGeom prst="rect">
+            <a:avLst/>
+          </a:prstGeom>
+        </p:spPr>
+      </p:pic>
+    </p:spTree>
+  </p:cSld>
+  <p:clrMapOvr>
+    <a:masterClrMapping/>
+  </p:clrMapOvr>
+</p:sld>
+</file>
+
+<file path=ppt/slides/slide4.xml><?xml version="1.0" encoding="utf-8"?>
+<p:sld xmlns:a="http://schemas.openxmlformats.org/drawingml/2006/main" xmlns:r="http://schemas.openxmlformats.org/officeDocument/2006/relationships" xmlns:p="http://schemas.openxmlformats.org/presentationml/2006/main">
+  <p:cSld>
+    <p:spTree>
+      <p:nvGrpSpPr>
+        <p:cNvPr id="1" name="Shape 115"/>
+        <p:cNvGrpSpPr/>
+        <p:nvPr/>
+      </p:nvGrpSpPr>
+      <p:grpSpPr>
+        <a:xfrm>
+          <a:off x="0" y="0"/>
+          <a:ext cx="0" cy="0"/>
+          <a:chOff x="0" y="0"/>
+          <a:chExt cx="0" cy="0"/>
+        </a:xfrm>
+      </p:grpSpPr>
+      <p:grpSp>
+        <p:nvGrpSpPr>
+          <p:cNvPr id="4" name="Group 3">
+            <a:extLst>
+              <a:ext uri="{FF2B5EF4-FFF2-40B4-BE49-F238E27FC236}">
+                <a16:creationId xmlns:a16="http://schemas.microsoft.com/office/drawing/2014/main" id="{EB18FF61-1857-DD5F-D4B4-32B1030BFE8C}"/>
+              </a:ext>
+            </a:extLst>
+          </p:cNvPr>
+          <p:cNvGrpSpPr/>
+          <p:nvPr/>
+        </p:nvGrpSpPr>
+        <p:grpSpPr>
+          <a:xfrm>
+            <a:off x="-132734" y="-74663"/>
+            <a:ext cx="12457469" cy="7007326"/>
+            <a:chOff x="-157315" y="-88489"/>
+            <a:chExt cx="12457469" cy="7007326"/>
+          </a:xfrm>
+        </p:grpSpPr>
+        <p:pic>
+          <p:nvPicPr>
+            <p:cNvPr id="2" name="Google Shape;84;p13" descr="image.png">
+              <a:extLst>
+                <a:ext uri="{FF2B5EF4-FFF2-40B4-BE49-F238E27FC236}">
+                  <a16:creationId xmlns:a16="http://schemas.microsoft.com/office/drawing/2014/main" id="{1AED31AE-ABCF-23A6-5C8B-83D0AC31EAEC}"/>
+                </a:ext>
+              </a:extLst>
+            </p:cNvPr>
+            <p:cNvPicPr preferRelativeResize="0"/>
+            <p:nvPr/>
+          </p:nvPicPr>
+          <p:blipFill rotWithShape="1">
+            <a:blip r:embed="rId3">
+              <a:alphaModFix/>
+            </a:blip>
+            <a:srcRect/>
+            <a:stretch/>
+          </p:blipFill>
+          <p:spPr>
+            <a:xfrm>
+              <a:off x="-157315" y="-88489"/>
+              <a:ext cx="12457469" cy="7007326"/>
+            </a:xfrm>
+            <a:prstGeom prst="rect">
+              <a:avLst/>
+            </a:prstGeom>
+            <a:noFill/>
+            <a:ln>
+              <a:noFill/>
+            </a:ln>
+          </p:spPr>
+        </p:pic>
+        <p:pic>
+          <p:nvPicPr>
+            <p:cNvPr id="3" name="Google Shape;98;p14" descr="image.png">
+              <a:extLst>
+                <a:ext uri="{FF2B5EF4-FFF2-40B4-BE49-F238E27FC236}">
+                  <a16:creationId xmlns:a16="http://schemas.microsoft.com/office/drawing/2014/main" id="{1F32D93C-7343-8AF4-F453-702DCD511F75}"/>
+                </a:ext>
+              </a:extLst>
+            </p:cNvPr>
+            <p:cNvPicPr preferRelativeResize="0"/>
+            <p:nvPr/>
+          </p:nvPicPr>
+          <p:blipFill rotWithShape="1">
+            <a:blip r:embed="rId4">
+              <a:alphaModFix amt="50000"/>
+            </a:blip>
+            <a:srcRect/>
+            <a:stretch/>
+          </p:blipFill>
+          <p:spPr>
+            <a:xfrm>
+              <a:off x="0" y="0"/>
+              <a:ext cx="12192000" cy="6858000"/>
+            </a:xfrm>
+            <a:prstGeom prst="rect">
+              <a:avLst/>
+            </a:prstGeom>
+            <a:noFill/>
+            <a:ln>
+              <a:noFill/>
+            </a:ln>
+          </p:spPr>
+        </p:pic>
+      </p:grpSp>
+      <p:pic>
+        <p:nvPicPr>
+          <p:cNvPr id="117" name="Google Shape;117;p15" descr="image.png"/>
+          <p:cNvPicPr preferRelativeResize="0"/>
+          <p:nvPr/>
+        </p:nvPicPr>
+        <p:blipFill rotWithShape="1">
+          <a:blip r:embed="rId5">
+            <a:alphaModFix/>
+          </a:blip>
+          <a:srcRect/>
+          <a:stretch/>
+        </p:blipFill>
+        <p:spPr>
+          <a:xfrm>
+            <a:off x="571500" y="3086100"/>
+            <a:ext cx="5238750" cy="1933575"/>
+          </a:xfrm>
+          <a:prstGeom prst="rect">
+            <a:avLst/>
+          </a:prstGeom>
+          <a:noFill/>
+          <a:ln>
+            <a:noFill/>
+          </a:ln>
+        </p:spPr>
+      </p:pic>
+      <p:pic>
+        <p:nvPicPr>
+          <p:cNvPr id="118" name="Google Shape;118;p15" descr="image.png"/>
+          <p:cNvPicPr preferRelativeResize="0"/>
+          <p:nvPr/>
+        </p:nvPicPr>
+        <p:blipFill rotWithShape="1">
+          <a:blip r:embed="rId5">
+            <a:alphaModFix/>
+          </a:blip>
+          <a:srcRect/>
+          <a:stretch/>
+        </p:blipFill>
+        <p:spPr>
+          <a:xfrm>
+            <a:off x="6381750" y="3086100"/>
+            <a:ext cx="5238750" cy="1933575"/>
+          </a:xfrm>
+          <a:prstGeom prst="rect">
+            <a:avLst/>
+          </a:prstGeom>
+          <a:noFill/>
+          <a:ln>
+            <a:noFill/>
+          </a:ln>
+        </p:spPr>
+      </p:pic>
+      <p:sp>
+        <p:nvSpPr>
+          <p:cNvPr id="119" name="Google Shape;119;p15"/>
+          <p:cNvSpPr txBox="1"/>
+          <p:nvPr/>
+        </p:nvSpPr>
+        <p:spPr>
+          <a:xfrm>
+            <a:off x="850582" y="3476625"/>
+            <a:ext cx="4680585" cy="352425"/>
+          </a:xfrm>
+          <a:prstGeom prst="rect">
+            <a:avLst/>
+          </a:prstGeom>
+          <a:noFill/>
+          <a:ln>
+            <a:noFill/>
+          </a:ln>
+        </p:spPr>
+        <p:txBody>
+          <a:bodyPr spcFirstLastPara="1" wrap="square" lIns="0" tIns="0" rIns="0" bIns="0" anchor="t" anchorCtr="0">
+            <a:spAutoFit/>
+          </a:bodyPr>
+          <a:lstStyle/>
+          <a:p>
+            <a:pPr marL="0" marR="0" lvl="0" indent="0" algn="ctr" rtl="0">
+              <a:spcBef>
+                <a:spcPts val="0"/>
+              </a:spcBef>
+              <a:spcAft>
+                <a:spcPts val="0"/>
+              </a:spcAft>
+              <a:buNone/>
+            </a:pPr>
+            <a:r>
+              <a:rPr lang="en-US" sz="2100" b="1" i="0" u="none" strike="noStrike" cap="none" dirty="0">
+                <a:solidFill>
+                  <a:srgbClr val="F2EEFA"/>
+                </a:solidFill>
+                <a:latin typeface="Playfair Display"/>
+                <a:ea typeface="Playfair Display"/>
+                <a:cs typeface="Playfair Display"/>
+                <a:sym typeface="Playfair Display"/>
+              </a:rPr>
+              <a:t>Technologies</a:t>
+            </a:r>
+            <a:endParaRPr dirty="0"/>
+          </a:p>
+        </p:txBody>
+      </p:sp>
+      <p:sp>
+        <p:nvSpPr>
+          <p:cNvPr id="120" name="Google Shape;120;p15"/>
+          <p:cNvSpPr txBox="1"/>
+          <p:nvPr/>
+        </p:nvSpPr>
+        <p:spPr>
+          <a:xfrm>
+            <a:off x="962025" y="4019550"/>
+            <a:ext cx="4457700" cy="609600"/>
+          </a:xfrm>
+          <a:prstGeom prst="rect">
+            <a:avLst/>
+          </a:prstGeom>
+          <a:noFill/>
+          <a:ln>
+            <a:noFill/>
+          </a:ln>
+        </p:spPr>
+        <p:txBody>
+          <a:bodyPr spcFirstLastPara="1" wrap="square" lIns="0" tIns="0" rIns="0" bIns="0" anchor="t" anchorCtr="0">
+            <a:spAutoFit/>
+          </a:bodyPr>
+          <a:lstStyle/>
+          <a:p>
+            <a:pPr marL="0" marR="0" lvl="0" indent="0" algn="ctr" rtl="0">
+              <a:lnSpc>
+                <a:spcPct val="160000"/>
+              </a:lnSpc>
+              <a:spcBef>
+                <a:spcPts val="0"/>
+              </a:spcBef>
+              <a:spcAft>
+                <a:spcPts val="0"/>
+              </a:spcAft>
+              <a:buNone/>
+            </a:pPr>
+            <a:r>
+              <a:rPr lang="en-US" sz="1500" b="0" i="0" u="none" strike="noStrike" cap="none" dirty="0">
+                <a:solidFill>
+                  <a:srgbClr val="F2EEFA"/>
+                </a:solidFill>
+                <a:latin typeface="Poppins Light"/>
+                <a:ea typeface="Poppins Light"/>
+                <a:cs typeface="Poppins Light"/>
+                <a:sym typeface="Poppins Light"/>
+              </a:rPr>
+              <a:t>Python · PyTorch · RawNet3/AASIST · Flask API</a:t>
+            </a:r>
+            <a:endParaRPr dirty="0"/>
+          </a:p>
+        </p:txBody>
+      </p:sp>
+      <p:sp>
+        <p:nvSpPr>
+          <p:cNvPr id="121" name="Google Shape;121;p15"/>
+          <p:cNvSpPr txBox="1"/>
+          <p:nvPr/>
+        </p:nvSpPr>
+        <p:spPr>
+          <a:xfrm>
+            <a:off x="6660832" y="3476625"/>
+            <a:ext cx="4680585" cy="352425"/>
+          </a:xfrm>
+          <a:prstGeom prst="rect">
+            <a:avLst/>
+          </a:prstGeom>
+          <a:noFill/>
+          <a:ln>
+            <a:noFill/>
+          </a:ln>
+        </p:spPr>
+        <p:txBody>
+          <a:bodyPr spcFirstLastPara="1" wrap="square" lIns="0" tIns="0" rIns="0" bIns="0" anchor="t" anchorCtr="0">
+            <a:spAutoFit/>
+          </a:bodyPr>
+          <a:lstStyle/>
+          <a:p>
+            <a:pPr marL="0" marR="0" lvl="0" indent="0" algn="ctr" rtl="0">
+              <a:spcBef>
+                <a:spcPts val="0"/>
+              </a:spcBef>
+              <a:spcAft>
+                <a:spcPts val="0"/>
+              </a:spcAft>
+              <a:buNone/>
+            </a:pPr>
+            <a:r>
+              <a:rPr lang="en-US" sz="2100" b="1" i="0" u="none" strike="noStrike" cap="none" dirty="0">
+                <a:solidFill>
+                  <a:srgbClr val="F2EEFA"/>
+                </a:solidFill>
+                <a:latin typeface="Playfair Display"/>
+                <a:ea typeface="Playfair Display"/>
+                <a:cs typeface="Playfair Display"/>
+                <a:sym typeface="Playfair Display"/>
+              </a:rPr>
+              <a:t>Methodology</a:t>
+            </a:r>
+            <a:endParaRPr dirty="0"/>
+          </a:p>
+        </p:txBody>
+      </p:sp>
+      <p:sp>
+        <p:nvSpPr>
+          <p:cNvPr id="122" name="Google Shape;122;p15"/>
+          <p:cNvSpPr txBox="1"/>
+          <p:nvPr/>
+        </p:nvSpPr>
+        <p:spPr>
+          <a:xfrm>
+            <a:off x="6772275" y="4019550"/>
+            <a:ext cx="4457700" cy="609600"/>
+          </a:xfrm>
+          <a:prstGeom prst="rect">
+            <a:avLst/>
+          </a:prstGeom>
+          <a:noFill/>
+          <a:ln>
+            <a:noFill/>
+          </a:ln>
+        </p:spPr>
+        <p:txBody>
+          <a:bodyPr spcFirstLastPara="1" wrap="square" lIns="0" tIns="0" rIns="0" bIns="0" anchor="t" anchorCtr="0">
+            <a:spAutoFit/>
+          </a:bodyPr>
+          <a:lstStyle/>
+          <a:p>
+            <a:pPr marL="0" marR="0" lvl="0" indent="0" algn="ctr" rtl="0">
+              <a:lnSpc>
+                <a:spcPct val="160000"/>
+              </a:lnSpc>
+              <a:spcBef>
+                <a:spcPts val="0"/>
+              </a:spcBef>
+              <a:spcAft>
+                <a:spcPts val="0"/>
+              </a:spcAft>
+              <a:buNone/>
+            </a:pPr>
+            <a:r>
+              <a:rPr lang="en-US" sz="1500" b="0" i="0" u="none" strike="noStrike" cap="none" dirty="0">
+                <a:solidFill>
+                  <a:srgbClr val="F2EEFA"/>
+                </a:solidFill>
+                <a:latin typeface="Poppins Light"/>
+                <a:ea typeface="Poppins Light"/>
+                <a:cs typeface="Poppins Light"/>
+                <a:sym typeface="Poppins Light"/>
+              </a:rPr>
+              <a:t>Methodology and process for implementation (Flow Charts / Images / Working Prototype)</a:t>
+            </a:r>
+            <a:endParaRPr dirty="0"/>
+          </a:p>
+        </p:txBody>
+      </p:sp>
+      <p:sp>
+        <p:nvSpPr>
+          <p:cNvPr id="123" name="Google Shape;123;p15"/>
+          <p:cNvSpPr txBox="1"/>
+          <p:nvPr/>
+        </p:nvSpPr>
+        <p:spPr>
+          <a:xfrm>
+            <a:off x="571500" y="571500"/>
+            <a:ext cx="11601450" cy="628650"/>
+          </a:xfrm>
+          <a:prstGeom prst="rect">
+            <a:avLst/>
+          </a:prstGeom>
+          <a:noFill/>
+          <a:ln>
+            <a:noFill/>
+          </a:ln>
+        </p:spPr>
+        <p:txBody>
+          <a:bodyPr spcFirstLastPara="1" wrap="square" lIns="0" tIns="0" rIns="0" bIns="0" anchor="t" anchorCtr="0">
+            <a:spAutoFit/>
+          </a:bodyPr>
+          <a:lstStyle/>
+          <a:p>
+            <a:pPr marL="0" marR="0" lvl="0" indent="0" algn="l" rtl="0">
+              <a:spcBef>
+                <a:spcPts val="0"/>
+              </a:spcBef>
+              <a:spcAft>
+                <a:spcPts val="0"/>
+              </a:spcAft>
+              <a:buNone/>
+            </a:pPr>
+            <a:r>
+              <a:rPr lang="en-US" sz="3600" b="1" i="0" u="none" strike="noStrike" cap="none" dirty="0">
+                <a:solidFill>
+                  <a:srgbClr val="F2EEFA"/>
+                </a:solidFill>
+                <a:latin typeface="Playfair Display"/>
+                <a:ea typeface="Playfair Display"/>
+                <a:cs typeface="Playfair Display"/>
+                <a:sym typeface="Playfair Display"/>
+              </a:rPr>
+              <a:t>TECHNICAL APPROACH</a:t>
+            </a:r>
+            <a:endParaRPr dirty="0"/>
+          </a:p>
+        </p:txBody>
+      </p:sp>
+      <p:sp>
+        <p:nvSpPr>
+          <p:cNvPr id="124" name="Google Shape;124;p15"/>
+          <p:cNvSpPr/>
+          <p:nvPr/>
+        </p:nvSpPr>
+        <p:spPr>
+          <a:xfrm>
+            <a:off x="571500" y="1323975"/>
+            <a:ext cx="11049000" cy="19050"/>
+          </a:xfrm>
+          <a:prstGeom prst="rect">
+            <a:avLst/>
+          </a:prstGeom>
+          <a:solidFill>
+            <a:srgbClr val="D4AF37"/>
+          </a:solidFill>
+          <a:ln>
+            <a:noFill/>
+          </a:ln>
+        </p:spPr>
+        <p:txBody>
+          <a:bodyPr spcFirstLastPara="1" wrap="square" lIns="91425" tIns="45700" rIns="91425" bIns="45700" anchor="ctr" anchorCtr="0">
+            <a:noAutofit/>
+          </a:bodyPr>
+          <a:lstStyle/>
+          <a:p>
+            <a:pPr marL="0" marR="0" lvl="0" indent="0" algn="ctr" rtl="0">
+              <a:spcBef>
+                <a:spcPts val="0"/>
+              </a:spcBef>
+              <a:spcAft>
+                <a:spcPts val="0"/>
+              </a:spcAft>
+              <a:buNone/>
+            </a:pPr>
+            <a:endParaRPr sz="1800" b="0" i="0" u="none" strike="noStrike" cap="none" dirty="0">
+              <a:solidFill>
+                <a:schemeClr val="dk1"/>
+              </a:solidFill>
+              <a:latin typeface="Calibri"/>
+              <a:ea typeface="Calibri"/>
+              <a:cs typeface="Calibri"/>
+              <a:sym typeface="Calibri"/>
+            </a:endParaRPr>
+          </a:p>
+        </p:txBody>
+      </p:sp>
+      <p:sp>
+        <p:nvSpPr>
+          <p:cNvPr id="125" name="Google Shape;125;p15"/>
+          <p:cNvSpPr txBox="1"/>
+          <p:nvPr/>
+        </p:nvSpPr>
+        <p:spPr>
+          <a:xfrm>
+            <a:off x="11706225" y="6467475"/>
+            <a:ext cx="200025" cy="161583"/>
+          </a:xfrm>
+          <a:prstGeom prst="rect">
+            <a:avLst/>
+          </a:prstGeom>
+          <a:noFill/>
+          <a:ln>
+            <a:noFill/>
+          </a:ln>
+        </p:spPr>
+        <p:txBody>
+          <a:bodyPr spcFirstLastPara="1" wrap="square" lIns="0" tIns="0" rIns="0" bIns="0" anchor="t" anchorCtr="0">
+            <a:spAutoFit/>
+          </a:bodyPr>
+          <a:lstStyle/>
+          <a:p>
+            <a:pPr marL="0" marR="0" lvl="0" indent="0" algn="l" rtl="0">
+              <a:spcBef>
+                <a:spcPts val="0"/>
+              </a:spcBef>
+              <a:spcAft>
+                <a:spcPts val="0"/>
+              </a:spcAft>
+              <a:buNone/>
+            </a:pPr>
+            <a:r>
+              <a:rPr lang="en-US" sz="1050" b="0" i="0" u="none" strike="noStrike" cap="none" dirty="0">
+                <a:solidFill>
+                  <a:srgbClr val="FFFFFF"/>
+                </a:solidFill>
+                <a:latin typeface="Poppins"/>
+                <a:ea typeface="Poppins"/>
+                <a:cs typeface="Poppins"/>
+                <a:sym typeface="Poppins"/>
+              </a:rPr>
+              <a:t>03</a:t>
+            </a:r>
+            <a:endParaRPr dirty="0"/>
+          </a:p>
+        </p:txBody>
+      </p:sp>
+      <p:pic>
+        <p:nvPicPr>
+          <p:cNvPr id="5" name="Picture 4">
+            <a:extLst>
+              <a:ext uri="{FF2B5EF4-FFF2-40B4-BE49-F238E27FC236}">
+                <a16:creationId xmlns:a16="http://schemas.microsoft.com/office/drawing/2014/main" id="{1F4E2B5A-0D8D-0AB1-E15B-5102336B7597}"/>
+              </a:ext>
+            </a:extLst>
+          </p:cNvPr>
+          <p:cNvPicPr>
+            <a:picLocks noChangeAspect="1"/>
+          </p:cNvPicPr>
+          <p:nvPr/>
+        </p:nvPicPr>
+        <p:blipFill>
+          <a:blip r:embed="rId6"/>
+          <a:stretch>
+            <a:fillRect/>
+          </a:stretch>
+        </p:blipFill>
+        <p:spPr>
+          <a:xfrm>
+            <a:off x="9361386" y="134593"/>
+            <a:ext cx="2259114" cy="1169718"/>
+          </a:xfrm>
+          <a:prstGeom prst="rect">
+            <a:avLst/>
+          </a:prstGeom>
+        </p:spPr>
+      </p:pic>
+    </p:spTree>
+  </p:cSld>
+  <p:clrMapOvr>
+    <a:masterClrMapping/>
+  </p:clrMapOvr>
+</p:sld>
+</file>
+
+<file path=ppt/slides/slide5.xml><?xml version="1.0" encoding="utf-8"?>
+<p:sld xmlns:a="http://schemas.openxmlformats.org/drawingml/2006/main" xmlns:r="http://schemas.openxmlformats.org/officeDocument/2006/relationships" xmlns:p="http://schemas.openxmlformats.org/presentationml/2006/main">
+  <p:cSld>
+    <p:spTree>
+      <p:nvGrpSpPr>
+        <p:cNvPr id="1" name="Shape 129"/>
+        <p:cNvGrpSpPr/>
+        <p:nvPr/>
+      </p:nvGrpSpPr>
+      <p:grpSpPr>
+        <a:xfrm>
+          <a:off x="0" y="0"/>
+          <a:ext cx="0" cy="0"/>
+          <a:chOff x="0" y="0"/>
+          <a:chExt cx="0" cy="0"/>
+        </a:xfrm>
+      </p:grpSpPr>
+      <p:grpSp>
+        <p:nvGrpSpPr>
+          <p:cNvPr id="4" name="Group 3">
+            <a:extLst>
+              <a:ext uri="{FF2B5EF4-FFF2-40B4-BE49-F238E27FC236}">
+                <a16:creationId xmlns:a16="http://schemas.microsoft.com/office/drawing/2014/main" id="{9D9BBD4A-0CA1-32F3-26D6-3379A9124AC1}"/>
+              </a:ext>
+            </a:extLst>
+          </p:cNvPr>
+          <p:cNvGrpSpPr/>
+          <p:nvPr/>
+        </p:nvGrpSpPr>
+        <p:grpSpPr>
+          <a:xfrm>
+            <a:off x="-132734" y="-74663"/>
+            <a:ext cx="12457469" cy="7007326"/>
+            <a:chOff x="-157315" y="-88489"/>
+            <a:chExt cx="12457469" cy="7007326"/>
+          </a:xfrm>
+        </p:grpSpPr>
+        <p:pic>
+          <p:nvPicPr>
+            <p:cNvPr id="2" name="Google Shape;84;p13" descr="image.png">
+              <a:extLst>
+                <a:ext uri="{FF2B5EF4-FFF2-40B4-BE49-F238E27FC236}">
+                  <a16:creationId xmlns:a16="http://schemas.microsoft.com/office/drawing/2014/main" id="{E85BF679-52A2-A2B8-04BF-1A2CCF31193A}"/>
+                </a:ext>
+              </a:extLst>
+            </p:cNvPr>
+            <p:cNvPicPr preferRelativeResize="0"/>
+            <p:nvPr/>
+          </p:nvPicPr>
+          <p:blipFill rotWithShape="1">
+            <a:blip r:embed="rId3">
+              <a:alphaModFix/>
+            </a:blip>
+            <a:srcRect/>
+            <a:stretch/>
+          </p:blipFill>
+          <p:spPr>
+            <a:xfrm>
+              <a:off x="-157315" y="-88489"/>
+              <a:ext cx="12457469" cy="7007326"/>
+            </a:xfrm>
+            <a:prstGeom prst="rect">
+              <a:avLst/>
+            </a:prstGeom>
+            <a:noFill/>
+            <a:ln>
+              <a:noFill/>
+            </a:ln>
+          </p:spPr>
+        </p:pic>
+        <p:pic>
+          <p:nvPicPr>
+            <p:cNvPr id="3" name="Google Shape;98;p14" descr="image.png">
+              <a:extLst>
+                <a:ext uri="{FF2B5EF4-FFF2-40B4-BE49-F238E27FC236}">
+                  <a16:creationId xmlns:a16="http://schemas.microsoft.com/office/drawing/2014/main" id="{6A9C8AA2-5CCF-3436-C5FD-C0ADC42FFDE7}"/>
+                </a:ext>
+              </a:extLst>
+            </p:cNvPr>
+            <p:cNvPicPr preferRelativeResize="0"/>
+            <p:nvPr/>
+          </p:nvPicPr>
+          <p:blipFill rotWithShape="1">
+            <a:blip r:embed="rId4">
+              <a:alphaModFix amt="50000"/>
+            </a:blip>
+            <a:srcRect/>
+            <a:stretch/>
+          </p:blipFill>
+          <p:spPr>
+            <a:xfrm>
+              <a:off x="0" y="0"/>
+              <a:ext cx="12192000" cy="6858000"/>
+            </a:xfrm>
+            <a:prstGeom prst="rect">
+              <a:avLst/>
+            </a:prstGeom>
+            <a:noFill/>
+            <a:ln>
+              <a:noFill/>
+            </a:ln>
+          </p:spPr>
+        </p:pic>
+      </p:grpSp>
+      <p:pic>
+        <p:nvPicPr>
+          <p:cNvPr id="131" name="Google Shape;131;p16" descr="image.png"/>
+          <p:cNvPicPr preferRelativeResize="0"/>
+          <p:nvPr/>
+        </p:nvPicPr>
+        <p:blipFill rotWithShape="1">
+          <a:blip r:embed="rId5">
+            <a:alphaModFix/>
+          </a:blip>
+          <a:srcRect/>
+          <a:stretch/>
+        </p:blipFill>
+        <p:spPr>
+          <a:xfrm>
+            <a:off x="571500" y="2847975"/>
+            <a:ext cx="3429000" cy="2409825"/>
+          </a:xfrm>
+          <a:prstGeom prst="rect">
+            <a:avLst/>
+          </a:prstGeom>
+          <a:noFill/>
+          <a:ln>
+            <a:noFill/>
+          </a:ln>
+        </p:spPr>
+      </p:pic>
+      <p:pic>
+        <p:nvPicPr>
+          <p:cNvPr id="132" name="Google Shape;132;p16" descr="image.png"/>
+          <p:cNvPicPr preferRelativeResize="0"/>
+          <p:nvPr/>
+        </p:nvPicPr>
+        <p:blipFill rotWithShape="1">
+          <a:blip r:embed="rId6">
+            <a:alphaModFix/>
+          </a:blip>
+          <a:srcRect/>
+          <a:stretch/>
+        </p:blipFill>
+        <p:spPr>
+          <a:xfrm>
+            <a:off x="4381500" y="2847975"/>
+            <a:ext cx="3429000" cy="2409825"/>
+          </a:xfrm>
+          <a:prstGeom prst="rect">
+            <a:avLst/>
+          </a:prstGeom>
+          <a:noFill/>
+          <a:ln>
+            <a:noFill/>
+          </a:ln>
+        </p:spPr>
+      </p:pic>
+      <p:pic>
+        <p:nvPicPr>
+          <p:cNvPr id="133" name="Google Shape;133;p16" descr="image.png"/>
+          <p:cNvPicPr preferRelativeResize="0"/>
+          <p:nvPr/>
+        </p:nvPicPr>
+        <p:blipFill rotWithShape="1">
+          <a:blip r:embed="rId6">
+            <a:alphaModFix/>
+          </a:blip>
+          <a:srcRect/>
+          <a:stretch/>
+        </p:blipFill>
+        <p:spPr>
+          <a:xfrm>
+            <a:off x="8191500" y="2847975"/>
+            <a:ext cx="3429000" cy="2409825"/>
+          </a:xfrm>
+          <a:prstGeom prst="rect">
+            <a:avLst/>
+          </a:prstGeom>
+          <a:noFill/>
+          <a:ln>
+            <a:noFill/>
+          </a:ln>
+        </p:spPr>
+      </p:pic>
+      <p:pic>
+        <p:nvPicPr>
+          <p:cNvPr id="134" name="Google Shape;134;p16" descr="image.png"/>
+          <p:cNvPicPr preferRelativeResize="0"/>
+          <p:nvPr/>
+        </p:nvPicPr>
+        <p:blipFill rotWithShape="1">
+          <a:blip r:embed="rId7">
+            <a:alphaModFix/>
+          </a:blip>
+          <a:srcRect/>
+          <a:stretch/>
+        </p:blipFill>
+        <p:spPr>
+          <a:xfrm>
+            <a:off x="2095500" y="3238500"/>
+            <a:ext cx="381000" cy="381000"/>
+          </a:xfrm>
+          <a:prstGeom prst="rect">
+            <a:avLst/>
+          </a:prstGeom>
+          <a:noFill/>
+          <a:ln>
+            <a:noFill/>
+          </a:ln>
+        </p:spPr>
+      </p:pic>
+      <p:sp>
+        <p:nvSpPr>
+          <p:cNvPr id="135" name="Google Shape;135;p16"/>
+          <p:cNvSpPr txBox="1"/>
+          <p:nvPr/>
+        </p:nvSpPr>
+        <p:spPr>
+          <a:xfrm>
+            <a:off x="1720929" y="3810000"/>
+            <a:ext cx="1130141" cy="304800"/>
+          </a:xfrm>
+          <a:prstGeom prst="rect">
+            <a:avLst/>
+          </a:prstGeom>
+          <a:noFill/>
+          <a:ln>
+            <a:noFill/>
+          </a:ln>
+        </p:spPr>
+        <p:txBody>
+          <a:bodyPr spcFirstLastPara="1" wrap="square" lIns="0" tIns="0" rIns="0" bIns="0" anchor="t" anchorCtr="0">
+            <a:spAutoFit/>
+          </a:bodyPr>
+          <a:lstStyle/>
+          <a:p>
+            <a:pPr marL="0" marR="0" lvl="0" indent="0" algn="ctr" rtl="0">
+              <a:spcBef>
+                <a:spcPts val="0"/>
+              </a:spcBef>
+              <a:spcAft>
+                <a:spcPts val="0"/>
+              </a:spcAft>
+              <a:buNone/>
+            </a:pPr>
+            <a:r>
+              <a:rPr lang="en-US" sz="1800" b="1" i="0" u="none" strike="noStrike" cap="none" dirty="0">
+                <a:solidFill>
+                  <a:srgbClr val="FBE695"/>
+                </a:solidFill>
+                <a:latin typeface="Playfair Display"/>
+                <a:ea typeface="Playfair Display"/>
+                <a:cs typeface="Playfair Display"/>
+                <a:sym typeface="Playfair Display"/>
+              </a:rPr>
+              <a:t>Feasibility</a:t>
+            </a:r>
+            <a:endParaRPr dirty="0"/>
+          </a:p>
+        </p:txBody>
+      </p:sp>
+      <p:sp>
+        <p:nvSpPr>
+          <p:cNvPr id="136" name="Google Shape;136;p16"/>
+          <p:cNvSpPr txBox="1"/>
+          <p:nvPr/>
+        </p:nvSpPr>
+        <p:spPr>
+          <a:xfrm>
+            <a:off x="866775" y="4257675"/>
+            <a:ext cx="2838450" cy="609600"/>
+          </a:xfrm>
+          <a:prstGeom prst="rect">
+            <a:avLst/>
+          </a:prstGeom>
+          <a:noFill/>
+          <a:ln>
+            <a:noFill/>
+          </a:ln>
+        </p:spPr>
+        <p:txBody>
+          <a:bodyPr spcFirstLastPara="1" wrap="square" lIns="0" tIns="0" rIns="0" bIns="0" anchor="t" anchorCtr="0">
+            <a:spAutoFit/>
+          </a:bodyPr>
+          <a:lstStyle/>
+          <a:p>
+            <a:pPr marL="0" marR="0" lvl="0" indent="0" algn="ctr" rtl="0">
+              <a:lnSpc>
+                <a:spcPct val="160000"/>
+              </a:lnSpc>
+              <a:spcBef>
+                <a:spcPts val="0"/>
+              </a:spcBef>
+              <a:spcAft>
+                <a:spcPts val="0"/>
+              </a:spcAft>
+              <a:buNone/>
+            </a:pPr>
+            <a:r>
+              <a:rPr lang="en-US" sz="1500" b="0" i="0" u="none" strike="noStrike" cap="none" dirty="0">
+                <a:solidFill>
+                  <a:srgbClr val="F2EEFA"/>
+                </a:solidFill>
+                <a:latin typeface="Poppins Light"/>
+                <a:ea typeface="Poppins Light"/>
+                <a:cs typeface="Poppins Light"/>
+                <a:sym typeface="Poppins Light"/>
+              </a:rPr>
+              <a:t>SOTA baseline: 0.42% EER (NeXt-TDNN); trainable on laptop GPU</a:t>
+            </a:r>
+            <a:endParaRPr dirty="0"/>
+          </a:p>
+        </p:txBody>
+      </p:sp>
+      <p:pic>
+        <p:nvPicPr>
+          <p:cNvPr id="137" name="Google Shape;137;p16" descr="image.png"/>
+          <p:cNvPicPr preferRelativeResize="0"/>
+          <p:nvPr/>
+        </p:nvPicPr>
+        <p:blipFill rotWithShape="1">
+          <a:blip r:embed="rId8">
+            <a:alphaModFix/>
+          </a:blip>
+          <a:srcRect/>
+          <a:stretch/>
+        </p:blipFill>
+        <p:spPr>
+          <a:xfrm>
+            <a:off x="5905500" y="3238500"/>
+            <a:ext cx="381000" cy="381000"/>
+          </a:xfrm>
+          <a:prstGeom prst="rect">
+            <a:avLst/>
+          </a:prstGeom>
+          <a:noFill/>
+          <a:ln>
+            <a:noFill/>
+          </a:ln>
+        </p:spPr>
+      </p:pic>
+      <p:sp>
+        <p:nvSpPr>
+          <p:cNvPr id="138" name="Google Shape;138;p16"/>
+          <p:cNvSpPr txBox="1"/>
+          <p:nvPr/>
+        </p:nvSpPr>
+        <p:spPr>
+          <a:xfrm>
+            <a:off x="5490924" y="3810000"/>
+            <a:ext cx="1210151" cy="304800"/>
+          </a:xfrm>
+          <a:prstGeom prst="rect">
+            <a:avLst/>
+          </a:prstGeom>
+          <a:noFill/>
+          <a:ln>
+            <a:noFill/>
+          </a:ln>
+        </p:spPr>
+        <p:txBody>
+          <a:bodyPr spcFirstLastPara="1" wrap="square" lIns="0" tIns="0" rIns="0" bIns="0" anchor="t" anchorCtr="0">
+            <a:spAutoFit/>
+          </a:bodyPr>
+          <a:lstStyle/>
+          <a:p>
+            <a:pPr marL="0" marR="0" lvl="0" indent="0" algn="ctr" rtl="0">
+              <a:spcBef>
+                <a:spcPts val="0"/>
+              </a:spcBef>
+              <a:spcAft>
+                <a:spcPts val="0"/>
+              </a:spcAft>
+              <a:buNone/>
+            </a:pPr>
+            <a:r>
+              <a:rPr lang="en-US" sz="1800" b="1" i="0" u="none" strike="noStrike" cap="none" dirty="0">
+                <a:solidFill>
+                  <a:srgbClr val="FBE695"/>
+                </a:solidFill>
+                <a:latin typeface="Playfair Display"/>
+                <a:ea typeface="Playfair Display"/>
+                <a:cs typeface="Playfair Display"/>
+                <a:sym typeface="Playfair Display"/>
+              </a:rPr>
+              <a:t>Challenges</a:t>
+            </a:r>
+            <a:endParaRPr dirty="0"/>
+          </a:p>
+        </p:txBody>
+      </p:sp>
+      <p:sp>
+        <p:nvSpPr>
+          <p:cNvPr id="139" name="Google Shape;139;p16"/>
+          <p:cNvSpPr txBox="1"/>
+          <p:nvPr/>
+        </p:nvSpPr>
+        <p:spPr>
+          <a:xfrm>
+            <a:off x="4776787" y="4257675"/>
+            <a:ext cx="2638425" cy="304800"/>
+          </a:xfrm>
+          <a:prstGeom prst="rect">
+            <a:avLst/>
+          </a:prstGeom>
+          <a:noFill/>
+          <a:ln>
+            <a:noFill/>
+          </a:ln>
+        </p:spPr>
+        <p:txBody>
+          <a:bodyPr spcFirstLastPara="1" wrap="square" lIns="0" tIns="0" rIns="0" bIns="0" anchor="t" anchorCtr="0">
+            <a:spAutoFit/>
+          </a:bodyPr>
+          <a:lstStyle/>
+          <a:p>
+            <a:pPr marL="0" marR="0" lvl="0" indent="0" algn="ctr" rtl="0">
+              <a:lnSpc>
+                <a:spcPct val="160000"/>
+              </a:lnSpc>
+              <a:spcBef>
+                <a:spcPts val="0"/>
+              </a:spcBef>
+              <a:spcAft>
+                <a:spcPts val="0"/>
+              </a:spcAft>
+              <a:buNone/>
+            </a:pPr>
+            <a:r>
+              <a:rPr lang="en-US" sz="1500" b="0" i="0" u="none" strike="noStrike" cap="none" dirty="0">
+                <a:solidFill>
+                  <a:srgbClr val="F2EEFA"/>
+                </a:solidFill>
+                <a:latin typeface="Poppins Light"/>
+                <a:ea typeface="Poppins Light"/>
+                <a:cs typeface="Poppins Light"/>
+                <a:sym typeface="Poppins Light"/>
+              </a:rPr>
+              <a:t>21× accuracy drop 2019→2021 LA (channel shift); limited Hindi data</a:t>
+            </a:r>
+            <a:endParaRPr dirty="0"/>
+          </a:p>
+        </p:txBody>
+      </p:sp>
+      <p:pic>
+        <p:nvPicPr>
+          <p:cNvPr id="140" name="Google Shape;140;p16" descr="image.png"/>
+          <p:cNvPicPr preferRelativeResize="0"/>
+          <p:nvPr/>
+        </p:nvPicPr>
+        <p:blipFill rotWithShape="1">
+          <a:blip r:embed="rId9">
+            <a:alphaModFix/>
+          </a:blip>
+          <a:srcRect/>
+          <a:stretch/>
+        </p:blipFill>
+        <p:spPr>
+          <a:xfrm>
+            <a:off x="9739312" y="3238500"/>
+            <a:ext cx="333375" cy="381000"/>
+          </a:xfrm>
+          <a:prstGeom prst="rect">
+            <a:avLst/>
+          </a:prstGeom>
+          <a:noFill/>
+          <a:ln>
+            <a:noFill/>
+          </a:ln>
+        </p:spPr>
+      </p:pic>
+      <p:sp>
+        <p:nvSpPr>
+          <p:cNvPr id="141" name="Google Shape;141;p16"/>
+          <p:cNvSpPr txBox="1"/>
+          <p:nvPr/>
+        </p:nvSpPr>
+        <p:spPr>
+          <a:xfrm>
+            <a:off x="9360931" y="3810000"/>
+            <a:ext cx="1090136" cy="304800"/>
+          </a:xfrm>
+          <a:prstGeom prst="rect">
+            <a:avLst/>
+          </a:prstGeom>
+          <a:noFill/>
+          <a:ln>
+            <a:noFill/>
+          </a:ln>
+        </p:spPr>
+        <p:txBody>
+          <a:bodyPr spcFirstLastPara="1" wrap="square" lIns="0" tIns="0" rIns="0" bIns="0" anchor="t" anchorCtr="0">
+            <a:spAutoFit/>
+          </a:bodyPr>
+          <a:lstStyle/>
+          <a:p>
+            <a:pPr marL="0" marR="0" lvl="0" indent="0" algn="ctr" rtl="0">
+              <a:spcBef>
+                <a:spcPts val="0"/>
+              </a:spcBef>
+              <a:spcAft>
+                <a:spcPts val="0"/>
+              </a:spcAft>
+              <a:buNone/>
+            </a:pPr>
+            <a:r>
+              <a:rPr lang="en-US" sz="1800" b="1" i="0" u="none" strike="noStrike" cap="none" dirty="0">
+                <a:solidFill>
+                  <a:srgbClr val="FBE695"/>
+                </a:solidFill>
+                <a:latin typeface="Playfair Display"/>
+                <a:ea typeface="Playfair Display"/>
+                <a:cs typeface="Playfair Display"/>
+                <a:sym typeface="Playfair Display"/>
+              </a:rPr>
+              <a:t>Strategies</a:t>
+            </a:r>
+            <a:endParaRPr dirty="0"/>
+          </a:p>
+        </p:txBody>
+      </p:sp>
+      <p:sp>
+        <p:nvSpPr>
+          <p:cNvPr id="142" name="Google Shape;142;p16"/>
+          <p:cNvSpPr txBox="1"/>
+          <p:nvPr/>
+        </p:nvSpPr>
+        <p:spPr>
+          <a:xfrm>
+            <a:off x="8486775" y="4257675"/>
+            <a:ext cx="2838450" cy="609600"/>
+          </a:xfrm>
+          <a:prstGeom prst="rect">
+            <a:avLst/>
+          </a:prstGeom>
+          <a:noFill/>
+          <a:ln>
+            <a:noFill/>
+          </a:ln>
+        </p:spPr>
+        <p:txBody>
+          <a:bodyPr spcFirstLastPara="1" wrap="square" lIns="0" tIns="0" rIns="0" bIns="0" anchor="t" anchorCtr="0">
+            <a:spAutoFit/>
+          </a:bodyPr>
+          <a:lstStyle/>
+          <a:p>
+            <a:pPr marL="0" marR="0" lvl="0" indent="0" algn="ctr" rtl="0">
+              <a:lnSpc>
+                <a:spcPct val="160000"/>
+              </a:lnSpc>
+              <a:spcBef>
+                <a:spcPts val="0"/>
+              </a:spcBef>
+              <a:spcAft>
+                <a:spcPts val="0"/>
+              </a:spcAft>
+              <a:buNone/>
+            </a:pPr>
+            <a:r>
+              <a:rPr lang="en-US" sz="1500" b="0" i="0" u="none" strike="noStrike" cap="none" dirty="0">
+                <a:solidFill>
+                  <a:srgbClr val="F2EEFA"/>
+                </a:solidFill>
+                <a:latin typeface="Poppins Light"/>
+                <a:ea typeface="Poppins Light"/>
+                <a:cs typeface="Poppins Light"/>
+                <a:sym typeface="Poppins Light"/>
+              </a:rPr>
+              <a:t>Fine-tune on 2021 LA + HAV-DF + Common Voice hi-IN; RawBoost</a:t>
+            </a:r>
+            <a:endParaRPr dirty="0"/>
+          </a:p>
+        </p:txBody>
+      </p:sp>
+      <p:sp>
+        <p:nvSpPr>
+          <p:cNvPr id="143" name="Google Shape;143;p16"/>
+          <p:cNvSpPr txBox="1"/>
+          <p:nvPr/>
+        </p:nvSpPr>
+        <p:spPr>
+          <a:xfrm>
+            <a:off x="571500" y="571500"/>
+            <a:ext cx="11601450" cy="628650"/>
+          </a:xfrm>
+          <a:prstGeom prst="rect">
+            <a:avLst/>
+          </a:prstGeom>
+          <a:noFill/>
+          <a:ln>
+            <a:noFill/>
+          </a:ln>
+        </p:spPr>
+        <p:txBody>
+          <a:bodyPr spcFirstLastPara="1" wrap="square" lIns="0" tIns="0" rIns="0" bIns="0" anchor="t" anchorCtr="0">
+            <a:spAutoFit/>
+          </a:bodyPr>
+          <a:lstStyle/>
+          <a:p>
+            <a:pPr marL="0" marR="0" lvl="0" indent="0" algn="l" rtl="0">
+              <a:spcBef>
+                <a:spcPts val="0"/>
+              </a:spcBef>
+              <a:spcAft>
+                <a:spcPts val="0"/>
+              </a:spcAft>
+              <a:buNone/>
+            </a:pPr>
+            <a:r>
+              <a:rPr lang="en-US" sz="3600" b="1" i="0" u="none" strike="noStrike" cap="none" dirty="0">
+                <a:solidFill>
+                  <a:srgbClr val="F2EEFA"/>
+                </a:solidFill>
+                <a:latin typeface="Playfair Display"/>
+                <a:ea typeface="Playfair Display"/>
+                <a:cs typeface="Playfair Display"/>
+                <a:sym typeface="Playfair Display"/>
+              </a:rPr>
+              <a:t>FEASIBILITY AND VIABILITY</a:t>
+            </a:r>
+            <a:endParaRPr dirty="0"/>
+          </a:p>
+        </p:txBody>
+      </p:sp>
+      <p:sp>
+        <p:nvSpPr>
+          <p:cNvPr id="144" name="Google Shape;144;p16"/>
+          <p:cNvSpPr/>
+          <p:nvPr/>
+        </p:nvSpPr>
+        <p:spPr>
+          <a:xfrm>
+            <a:off x="571500" y="1323975"/>
+            <a:ext cx="11049000" cy="19050"/>
+          </a:xfrm>
+          <a:prstGeom prst="rect">
+            <a:avLst/>
+          </a:prstGeom>
+          <a:solidFill>
+            <a:srgbClr val="D4AF37"/>
+          </a:solidFill>
+          <a:ln>
+            <a:noFill/>
+          </a:ln>
+        </p:spPr>
+        <p:txBody>
+          <a:bodyPr spcFirstLastPara="1" wrap="square" lIns="91425" tIns="45700" rIns="91425" bIns="45700" anchor="ctr" anchorCtr="0">
+            <a:noAutofit/>
+          </a:bodyPr>
+          <a:lstStyle/>
+          <a:p>
+            <a:pPr marL="0" marR="0" lvl="0" indent="0" algn="ctr" rtl="0">
+              <a:spcBef>
+                <a:spcPts val="0"/>
+              </a:spcBef>
+              <a:spcAft>
+                <a:spcPts val="0"/>
+              </a:spcAft>
+              <a:buNone/>
+            </a:pPr>
+            <a:endParaRPr sz="1800" b="0" i="0" u="none" strike="noStrike" cap="none" dirty="0">
+              <a:solidFill>
+                <a:schemeClr val="dk1"/>
+              </a:solidFill>
+              <a:latin typeface="Calibri"/>
+              <a:ea typeface="Calibri"/>
+              <a:cs typeface="Calibri"/>
+              <a:sym typeface="Calibri"/>
+            </a:endParaRPr>
+          </a:p>
+        </p:txBody>
+      </p:sp>
+      <p:sp>
+        <p:nvSpPr>
+          <p:cNvPr id="145" name="Google Shape;145;p16"/>
+          <p:cNvSpPr txBox="1"/>
+          <p:nvPr/>
+        </p:nvSpPr>
+        <p:spPr>
+          <a:xfrm>
+            <a:off x="11687175" y="6467475"/>
+            <a:ext cx="219075" cy="200025"/>
+          </a:xfrm>
+          <a:prstGeom prst="rect">
+            <a:avLst/>
+          </a:prstGeom>
+          <a:noFill/>
+          <a:ln>
+            <a:noFill/>
+          </a:ln>
+        </p:spPr>
+        <p:txBody>
+          <a:bodyPr spcFirstLastPara="1" wrap="square" lIns="0" tIns="0" rIns="0" bIns="0" anchor="t" anchorCtr="0">
+            <a:spAutoFit/>
+          </a:bodyPr>
+          <a:lstStyle/>
+          <a:p>
+            <a:pPr marL="0" marR="0" lvl="0" indent="0" algn="l" rtl="0">
+              <a:spcBef>
+                <a:spcPts val="0"/>
+              </a:spcBef>
+              <a:spcAft>
+                <a:spcPts val="0"/>
+              </a:spcAft>
+              <a:buNone/>
+            </a:pPr>
+            <a:r>
+              <a:rPr lang="en-US" sz="1050" b="0" i="0" u="none" strike="noStrike" cap="none" dirty="0">
+                <a:solidFill>
+                  <a:srgbClr val="FFFFFF"/>
+                </a:solidFill>
+                <a:latin typeface="Poppins"/>
+                <a:ea typeface="Poppins"/>
+                <a:cs typeface="Poppins"/>
+                <a:sym typeface="Poppins"/>
+              </a:rPr>
+              <a:t>04</a:t>
+            </a:r>
+            <a:endParaRPr dirty="0"/>
+          </a:p>
+        </p:txBody>
+      </p:sp>
+      <p:pic>
+        <p:nvPicPr>
+          <p:cNvPr id="5" name="Picture 4">
+            <a:extLst>
+              <a:ext uri="{FF2B5EF4-FFF2-40B4-BE49-F238E27FC236}">
+                <a16:creationId xmlns:a16="http://schemas.microsoft.com/office/drawing/2014/main" id="{B9539AD2-9821-3F8D-A3D6-35A48800DBE8}"/>
+              </a:ext>
+            </a:extLst>
+          </p:cNvPr>
+          <p:cNvPicPr>
+            <a:picLocks noChangeAspect="1"/>
+          </p:cNvPicPr>
+          <p:nvPr/>
+        </p:nvPicPr>
+        <p:blipFill>
+          <a:blip r:embed="rId10"/>
+          <a:stretch>
+            <a:fillRect/>
+          </a:stretch>
+        </p:blipFill>
+        <p:spPr>
+          <a:xfrm>
+            <a:off x="9361386" y="134593"/>
+            <a:ext cx="2259114" cy="1169718"/>
+          </a:xfrm>
+          <a:prstGeom prst="rect">
+            <a:avLst/>
+          </a:prstGeom>
+        </p:spPr>
+      </p:pic>
+    </p:spTree>
+  </p:cSld>
+  <p:clrMapOvr>
+    <a:masterClrMapping/>
+  </p:clrMapOvr>
+</p:sld>
+</file>
+
+<file path=ppt/slides/slide6.xml><?xml version="1.0" encoding="utf-8"?>
+<p:sld xmlns:a="http://schemas.openxmlformats.org/drawingml/2006/main" xmlns:r="http://schemas.openxmlformats.org/officeDocument/2006/relationships" xmlns:p="http://schemas.openxmlformats.org/presentationml/2006/main">
+  <p:cSld>
+    <p:spTree>
+      <p:nvGrpSpPr>
+        <p:cNvPr id="1" name="Shape 149"/>
+        <p:cNvGrpSpPr/>
+        <p:nvPr/>
+      </p:nvGrpSpPr>
+      <p:grpSpPr>
+        <a:xfrm>
+          <a:off x="0" y="0"/>
+          <a:ext cx="0" cy="0"/>
+          <a:chOff x="0" y="0"/>
+          <a:chExt cx="0" cy="0"/>
+        </a:xfrm>
+      </p:grpSpPr>
+      <p:grpSp>
+        <p:nvGrpSpPr>
+          <p:cNvPr id="2" name="Group 1">
+            <a:extLst>
+              <a:ext uri="{FF2B5EF4-FFF2-40B4-BE49-F238E27FC236}">
+                <a16:creationId xmlns:a16="http://schemas.microsoft.com/office/drawing/2014/main" id="{D382BC47-C1E8-211A-F7F3-99B987C7EA87}"/>
+              </a:ext>
+            </a:extLst>
+          </p:cNvPr>
+          <p:cNvGrpSpPr>
+            <a:grpSpLocks noGrp="1" noUngrp="1" noRot="1" noMove="1" noResize="1"/>
+          </p:cNvGrpSpPr>
+          <p:nvPr/>
+        </p:nvGrpSpPr>
+        <p:grpSpPr>
+          <a:xfrm>
+            <a:off x="-132734" y="-74663"/>
+            <a:ext cx="12457469" cy="7007326"/>
+            <a:chOff x="-157315" y="-88489"/>
+            <a:chExt cx="12457469" cy="7007326"/>
+          </a:xfrm>
+        </p:grpSpPr>
+        <p:pic>
+          <p:nvPicPr>
+            <p:cNvPr id="3" name="Google Shape;84;p13" descr="image.png">
+              <a:extLst>
+                <a:ext uri="{FF2B5EF4-FFF2-40B4-BE49-F238E27FC236}">
+                  <a16:creationId xmlns:a16="http://schemas.microsoft.com/office/drawing/2014/main" id="{C50263B4-4851-C499-7453-724CE8EF500B}"/>
+                </a:ext>
+              </a:extLst>
+            </p:cNvPr>
+            <p:cNvPicPr preferRelativeResize="0">
+              <a:picLocks noGrp="1" noRot="1" noMove="1" noResize="1" noEditPoints="1" noAdjustHandles="1" noChangeArrowheads="1" noChangeShapeType="1" noCrop="1"/>
+            </p:cNvPicPr>
+            <p:nvPr/>
+          </p:nvPicPr>
+          <p:blipFill rotWithShape="1">
+            <a:blip r:embed="rId3">
+              <a:alphaModFix/>
+            </a:blip>
+            <a:srcRect/>
+            <a:stretch/>
+          </p:blipFill>
+          <p:spPr>
+            <a:xfrm>
+              <a:off x="-157315" y="-88489"/>
+              <a:ext cx="12457469" cy="7007326"/>
+            </a:xfrm>
+            <a:prstGeom prst="rect">
+              <a:avLst/>
+            </a:prstGeom>
+            <a:noFill/>
+            <a:ln>
+              <a:noFill/>
+            </a:ln>
+          </p:spPr>
+        </p:pic>
+        <p:pic>
+          <p:nvPicPr>
+            <p:cNvPr id="4" name="Google Shape;98;p14" descr="image.png">
+              <a:extLst>
+                <a:ext uri="{FF2B5EF4-FFF2-40B4-BE49-F238E27FC236}">
+                  <a16:creationId xmlns:a16="http://schemas.microsoft.com/office/drawing/2014/main" id="{0ED84BD7-0591-5A0E-6A51-006CBA369A9B}"/>
+                </a:ext>
+              </a:extLst>
+            </p:cNvPr>
+            <p:cNvPicPr preferRelativeResize="0">
+              <a:picLocks noGrp="1" noRot="1" noMove="1" noResize="1" noEditPoints="1" noAdjustHandles="1" noChangeArrowheads="1" noChangeShapeType="1" noCrop="1"/>
+            </p:cNvPicPr>
+            <p:nvPr/>
+          </p:nvPicPr>
+          <p:blipFill rotWithShape="1">
+            <a:blip r:embed="rId4">
+              <a:alphaModFix amt="50000"/>
+            </a:blip>
+            <a:srcRect/>
+            <a:stretch/>
+          </p:blipFill>
+          <p:spPr>
+            <a:xfrm>
+              <a:off x="0" y="0"/>
+              <a:ext cx="12192000" cy="6858000"/>
+            </a:xfrm>
+            <a:prstGeom prst="rect">
+              <a:avLst/>
+            </a:prstGeom>
+            <a:noFill/>
+            <a:ln>
+              <a:noFill/>
+            </a:ln>
+          </p:spPr>
+        </p:pic>
+      </p:grpSp>
+      <p:sp>
+        <p:nvSpPr>
+          <p:cNvPr id="154" name="Google Shape;154;p17"/>
+          <p:cNvSpPr txBox="1"/>
+          <p:nvPr/>
+        </p:nvSpPr>
+        <p:spPr>
+          <a:xfrm>
+            <a:off x="1000125" y="1683172"/>
+            <a:ext cx="4619625" cy="314325"/>
+          </a:xfrm>
+          <a:prstGeom prst="rect">
+            <a:avLst/>
+          </a:prstGeom>
+          <a:noFill/>
+          <a:ln>
+            <a:noFill/>
+          </a:ln>
+        </p:spPr>
+        <p:txBody>
+          <a:bodyPr spcFirstLastPara="1" wrap="square" lIns="0" tIns="0" rIns="0" bIns="0" anchor="t" anchorCtr="0">
+            <a:spAutoFit/>
+          </a:bodyPr>
+          <a:lstStyle/>
+          <a:p>
+            <a:pPr marL="0" marR="0" lvl="0" indent="0" algn="l" rtl="0">
+              <a:lnSpc>
+                <a:spcPct val="150000"/>
+              </a:lnSpc>
+              <a:spcBef>
+                <a:spcPts val="0"/>
+              </a:spcBef>
+              <a:spcAft>
+                <a:spcPts val="0"/>
+              </a:spcAft>
+              <a:buNone/>
+            </a:pPr>
+            <a:r>
+              <a:rPr lang="en-US" sz="1650" b="0" i="0" u="none" strike="noStrike" cap="none" dirty="0">
+                <a:solidFill>
+                  <a:srgbClr val="FFFFFF"/>
+                </a:solidFill>
+                <a:latin typeface="Poppins Light"/>
+                <a:ea typeface="Poppins Light"/>
+                <a:cs typeface="Poppins Light"/>
+                <a:sym typeface="Poppins Light"/>
+              </a:rPr>
+              <a:t>663+ banks, 79+ apps on UPI — every voice channel is a target surface</a:t>
+            </a:r>
+            <a:endParaRPr dirty="0"/>
+          </a:p>
+        </p:txBody>
+      </p:sp>
+      <p:sp>
+        <p:nvSpPr>
+          <p:cNvPr id="155" name="Google Shape;155;p17"/>
+          <p:cNvSpPr txBox="1"/>
+          <p:nvPr/>
+        </p:nvSpPr>
+        <p:spPr>
+          <a:xfrm>
+            <a:off x="957415" y="2197585"/>
+            <a:ext cx="8865235" cy="380873"/>
+          </a:xfrm>
+          <a:prstGeom prst="rect">
+            <a:avLst/>
+          </a:prstGeom>
+          <a:noFill/>
+          <a:ln>
+            <a:noFill/>
+          </a:ln>
+        </p:spPr>
+        <p:txBody>
+          <a:bodyPr spcFirstLastPara="1" wrap="square" lIns="0" tIns="0" rIns="0" bIns="0" anchor="t" anchorCtr="0">
+            <a:spAutoFit/>
+          </a:bodyPr>
+          <a:lstStyle/>
+          <a:p>
+            <a:pPr marL="0" marR="0" lvl="0" indent="0" algn="l" rtl="0">
+              <a:lnSpc>
+                <a:spcPct val="150000"/>
+              </a:lnSpc>
+              <a:spcBef>
+                <a:spcPts val="0"/>
+              </a:spcBef>
+              <a:spcAft>
+                <a:spcPts val="0"/>
+              </a:spcAft>
+              <a:buNone/>
+            </a:pPr>
+            <a:r>
+              <a:rPr lang="en-US" sz="1650" b="0" i="0" u="none" strike="noStrike" cap="none" dirty="0">
+                <a:solidFill>
+                  <a:srgbClr val="FFFFFF"/>
+                </a:solidFill>
+                <a:latin typeface="Poppins Light"/>
+                <a:ea typeface="Poppins Light"/>
+                <a:cs typeface="Poppins Light"/>
+                <a:sym typeface="Poppins Light"/>
+              </a:rPr>
+              <a:t>Social: fewer elderly victimized · Economic: ₹805 cr/yr runway · National: digital sovereignty</a:t>
+            </a:r>
+            <a:endParaRPr dirty="0"/>
+          </a:p>
+        </p:txBody>
+      </p:sp>
+      <p:pic>
+        <p:nvPicPr>
+          <p:cNvPr id="156" name="Google Shape;156;p17" descr="image.png"/>
+          <p:cNvPicPr preferRelativeResize="0"/>
+          <p:nvPr/>
+        </p:nvPicPr>
+        <p:blipFill rotWithShape="1">
+          <a:blip r:embed="rId5">
+            <a:alphaModFix/>
+          </a:blip>
+          <a:srcRect/>
+          <a:stretch/>
+        </p:blipFill>
+        <p:spPr>
+          <a:xfrm>
+            <a:off x="571500" y="1711747"/>
+            <a:ext cx="228600" cy="247650"/>
+          </a:xfrm>
+          <a:prstGeom prst="rect">
+            <a:avLst/>
+          </a:prstGeom>
+          <a:noFill/>
+          <a:ln>
+            <a:noFill/>
+          </a:ln>
+        </p:spPr>
+      </p:pic>
+      <p:pic>
+        <p:nvPicPr>
+          <p:cNvPr id="157" name="Google Shape;157;p17" descr="image.png"/>
+          <p:cNvPicPr preferRelativeResize="0"/>
+          <p:nvPr/>
+        </p:nvPicPr>
+        <p:blipFill rotWithShape="1">
+          <a:blip r:embed="rId6">
+            <a:alphaModFix/>
+          </a:blip>
+          <a:srcRect/>
+          <a:stretch/>
+        </p:blipFill>
+        <p:spPr>
+          <a:xfrm>
+            <a:off x="571500" y="2264197"/>
+            <a:ext cx="228600" cy="247650"/>
+          </a:xfrm>
+          <a:prstGeom prst="rect">
+            <a:avLst/>
+          </a:prstGeom>
+          <a:noFill/>
+          <a:ln>
+            <a:noFill/>
+          </a:ln>
+        </p:spPr>
+      </p:pic>
+      <p:sp>
+        <p:nvSpPr>
+          <p:cNvPr id="158" name="Google Shape;158;p17"/>
+          <p:cNvSpPr txBox="1"/>
+          <p:nvPr/>
+        </p:nvSpPr>
+        <p:spPr>
+          <a:xfrm>
+            <a:off x="11801475" y="6467475"/>
+            <a:ext cx="200025" cy="161583"/>
+          </a:xfrm>
+          <a:prstGeom prst="rect">
+            <a:avLst/>
+          </a:prstGeom>
+          <a:noFill/>
+          <a:ln>
+            <a:noFill/>
+          </a:ln>
+        </p:spPr>
+        <p:txBody>
+          <a:bodyPr spcFirstLastPara="1" wrap="square" lIns="0" tIns="0" rIns="0" bIns="0" anchor="t" anchorCtr="0">
+            <a:spAutoFit/>
+          </a:bodyPr>
+          <a:lstStyle/>
+          <a:p>
+            <a:pPr marL="0" marR="0" lvl="0" indent="0" algn="l" rtl="0">
+              <a:spcBef>
+                <a:spcPts val="0"/>
+              </a:spcBef>
+              <a:spcAft>
+                <a:spcPts val="0"/>
+              </a:spcAft>
+              <a:buNone/>
+            </a:pPr>
+            <a:r>
+              <a:rPr lang="en-US" sz="1050" b="0" i="0" u="none" strike="noStrike" cap="none" dirty="0">
+                <a:solidFill>
+                  <a:schemeClr val="bg1"/>
+                </a:solidFill>
+                <a:latin typeface="Poppins"/>
+                <a:ea typeface="Poppins"/>
+                <a:cs typeface="Poppins"/>
+                <a:sym typeface="Poppins"/>
+              </a:rPr>
+              <a:t>05</a:t>
+            </a:r>
+            <a:endParaRPr dirty="0">
+              <a:solidFill>
+                <a:schemeClr val="bg1"/>
+              </a:solidFill>
+            </a:endParaRPr>
+          </a:p>
+        </p:txBody>
+      </p:sp>
+      <p:sp>
+        <p:nvSpPr>
+          <p:cNvPr id="5" name="Google Shape;143;p16">
+            <a:extLst>
+              <a:ext uri="{FF2B5EF4-FFF2-40B4-BE49-F238E27FC236}">
+                <a16:creationId xmlns:a16="http://schemas.microsoft.com/office/drawing/2014/main" id="{3CAF39FC-C49D-1484-968C-D8CC6B6281EE}"/>
+              </a:ext>
+            </a:extLst>
+          </p:cNvPr>
+          <p:cNvSpPr txBox="1"/>
+          <p:nvPr/>
+        </p:nvSpPr>
+        <p:spPr>
+          <a:xfrm>
+            <a:off x="571500" y="571500"/>
+            <a:ext cx="11601450" cy="553998"/>
+          </a:xfrm>
+          <a:prstGeom prst="rect">
+            <a:avLst/>
+          </a:prstGeom>
+          <a:noFill/>
+          <a:ln>
+            <a:noFill/>
+          </a:ln>
+        </p:spPr>
+        <p:txBody>
+          <a:bodyPr spcFirstLastPara="1" wrap="square" lIns="0" tIns="0" rIns="0" bIns="0" anchor="t" anchorCtr="0">
+            <a:spAutoFit/>
+          </a:bodyPr>
+          <a:lstStyle/>
+          <a:p>
+            <a:pPr marL="0" marR="0" lvl="0" indent="0" algn="l" rtl="0">
+              <a:spcBef>
+                <a:spcPts val="0"/>
+              </a:spcBef>
+              <a:spcAft>
+                <a:spcPts val="0"/>
+              </a:spcAft>
+              <a:buNone/>
+            </a:pPr>
+            <a:r>
+              <a:rPr lang="en-US" sz="3600" b="1" i="0" u="none" strike="noStrike" cap="none" dirty="0">
+                <a:solidFill>
+                  <a:srgbClr val="F2EEFA"/>
+                </a:solidFill>
+                <a:latin typeface="Playfair Display"/>
+                <a:ea typeface="Playfair Display"/>
+                <a:cs typeface="Playfair Display"/>
+                <a:sym typeface="Playfair Display"/>
+              </a:rPr>
+              <a:t>IMPACT AND BENEFITS</a:t>
+            </a:r>
+            <a:endParaRPr dirty="0"/>
+          </a:p>
+        </p:txBody>
+      </p:sp>
+      <p:sp>
+        <p:nvSpPr>
+          <p:cNvPr id="6" name="Google Shape;144;p16">
+            <a:extLst>
+              <a:ext uri="{FF2B5EF4-FFF2-40B4-BE49-F238E27FC236}">
+                <a16:creationId xmlns:a16="http://schemas.microsoft.com/office/drawing/2014/main" id="{FDB0C6B6-D604-F5FA-8C1F-20E675C8EE7E}"/>
+              </a:ext>
+            </a:extLst>
+          </p:cNvPr>
+          <p:cNvSpPr/>
+          <p:nvPr/>
+        </p:nvSpPr>
+        <p:spPr>
+          <a:xfrm>
+            <a:off x="571500" y="1323975"/>
+            <a:ext cx="11049000" cy="19050"/>
+          </a:xfrm>
+          <a:prstGeom prst="rect">
+            <a:avLst/>
+          </a:prstGeom>
+          <a:solidFill>
+            <a:srgbClr val="D4AF37"/>
+          </a:solidFill>
+          <a:ln>
+            <a:noFill/>
+          </a:ln>
+        </p:spPr>
+        <p:txBody>
+          <a:bodyPr spcFirstLastPara="1" wrap="square" lIns="91425" tIns="45700" rIns="91425" bIns="45700" anchor="ctr" anchorCtr="0">
+            <a:noAutofit/>
+          </a:bodyPr>
+          <a:lstStyle/>
+          <a:p>
+            <a:pPr marL="0" marR="0" lvl="0" indent="0" algn="ctr" rtl="0">
+              <a:spcBef>
+                <a:spcPts val="0"/>
+              </a:spcBef>
+              <a:spcAft>
+                <a:spcPts val="0"/>
+              </a:spcAft>
+              <a:buNone/>
+            </a:pPr>
+            <a:endParaRPr sz="1800" b="0" i="0" u="none" strike="noStrike" cap="none" dirty="0">
+              <a:solidFill>
+                <a:schemeClr val="dk1"/>
+              </a:solidFill>
+              <a:latin typeface="Calibri"/>
+              <a:ea typeface="Calibri"/>
+              <a:cs typeface="Calibri"/>
+              <a:sym typeface="Calibri"/>
+            </a:endParaRPr>
+          </a:p>
+        </p:txBody>
+      </p:sp>
+      <p:pic>
+        <p:nvPicPr>
+          <p:cNvPr id="7" name="Picture 6">
+            <a:extLst>
+              <a:ext uri="{FF2B5EF4-FFF2-40B4-BE49-F238E27FC236}">
+                <a16:creationId xmlns:a16="http://schemas.microsoft.com/office/drawing/2014/main" id="{143EAE13-7287-2B9A-1824-778F4241D50E}"/>
+              </a:ext>
+            </a:extLst>
+          </p:cNvPr>
+          <p:cNvPicPr>
+            <a:picLocks noChangeAspect="1"/>
+          </p:cNvPicPr>
+          <p:nvPr/>
+        </p:nvPicPr>
+        <p:blipFill>
+          <a:blip r:embed="rId7"/>
+          <a:stretch>
+            <a:fillRect/>
+          </a:stretch>
+        </p:blipFill>
+        <p:spPr>
+          <a:xfrm>
+            <a:off x="9361386" y="134593"/>
+            <a:ext cx="2259114" cy="1169718"/>
+          </a:xfrm>
+          <a:prstGeom prst="rect">
+            <a:avLst/>
+          </a:prstGeom>
+        </p:spPr>
+      </p:pic>
+    </p:spTree>
+  </p:cSld>
+  <p:clrMapOvr>
+    <a:masterClrMapping/>
+  </p:clrMapOvr>
+</p:sld>
+</file>
+
+<file path=ppt/slides/slide7.xml><?xml version="1.0" encoding="utf-8"?>
+<p:sld xmlns:a="http://schemas.openxmlformats.org/drawingml/2006/main" xmlns:r="http://schemas.openxmlformats.org/officeDocument/2006/relationships" xmlns:p="http://schemas.openxmlformats.org/presentationml/2006/main">
+  <p:cSld>
+    <p:spTree>
+      <p:nvGrpSpPr>
+        <p:cNvPr id="1" name="Shape 97"/>
+        <p:cNvGrpSpPr/>
+        <p:nvPr/>
+      </p:nvGrpSpPr>
+      <p:grpSpPr>
+        <a:xfrm>
+          <a:off x="0" y="0"/>
+          <a:ext cx="0" cy="0"/>
+          <a:chOff x="0" y="0"/>
+          <a:chExt cx="0" cy="0"/>
+        </a:xfrm>
+      </p:grpSpPr>
+      <p:pic>
+        <p:nvPicPr>
+          <p:cNvPr id="2" name="Google Shape;84;p13" descr="image.png">
+            <a:extLst>
+              <a:ext uri="{FF2B5EF4-FFF2-40B4-BE49-F238E27FC236}">
+                <a16:creationId xmlns:a16="http://schemas.microsoft.com/office/drawing/2014/main" id="{A7427FBB-6B82-28C2-C807-6A3DF49A1F1A}"/>
+              </a:ext>
+            </a:extLst>
+          </p:cNvPr>
+          <p:cNvPicPr preferRelativeResize="0"/>
+          <p:nvPr/>
+        </p:nvPicPr>
+        <p:blipFill rotWithShape="1">
+          <a:blip r:embed="rId3">
+            <a:alphaModFix/>
+          </a:blip>
+          <a:srcRect/>
+          <a:stretch/>
+        </p:blipFill>
+        <p:spPr>
+          <a:xfrm>
+            <a:off x="-157315" y="-88489"/>
+            <a:ext cx="12457469" cy="7007326"/>
+          </a:xfrm>
+          <a:prstGeom prst="rect">
+            <a:avLst/>
+          </a:prstGeom>
+          <a:noFill/>
+          <a:ln>
+            <a:noFill/>
+          </a:ln>
+        </p:spPr>
+      </p:pic>
+      <p:pic>
+        <p:nvPicPr>
+          <p:cNvPr id="98" name="Google Shape;98;p14" descr="image.png"/>
+          <p:cNvPicPr preferRelativeResize="0"/>
+          <p:nvPr/>
+        </p:nvPicPr>
+        <p:blipFill rotWithShape="1">
+          <a:blip r:embed="rId4">
+            <a:alphaModFix amt="50000"/>
+          </a:blip>
+          <a:srcRect/>
+          <a:stretch/>
+        </p:blipFill>
+        <p:spPr>
+          <a:xfrm>
+            <a:off x="0" y="0"/>
+            <a:ext cx="12192000" cy="6858000"/>
+          </a:xfrm>
+          <a:prstGeom prst="rect">
+            <a:avLst/>
+          </a:prstGeom>
+          <a:noFill/>
+          <a:ln>
+            <a:noFill/>
+          </a:ln>
+        </p:spPr>
+      </p:pic>
+      <p:grpSp>
+        <p:nvGrpSpPr>
+          <p:cNvPr id="3" name="Group 2">
+            <a:extLst>
+              <a:ext uri="{FF2B5EF4-FFF2-40B4-BE49-F238E27FC236}">
+                <a16:creationId xmlns:a16="http://schemas.microsoft.com/office/drawing/2014/main" id="{A73E524B-A1B2-0008-AF1C-66E70946F0B4}"/>
+              </a:ext>
+            </a:extLst>
+          </p:cNvPr>
+          <p:cNvGrpSpPr/>
+          <p:nvPr/>
+        </p:nvGrpSpPr>
+        <p:grpSpPr>
+          <a:xfrm>
+            <a:off x="571500" y="2658491"/>
+            <a:ext cx="10977715" cy="380873"/>
+            <a:chOff x="571500" y="2719451"/>
+            <a:chExt cx="10977715" cy="380873"/>
+          </a:xfrm>
+        </p:grpSpPr>
+        <p:sp>
+          <p:nvSpPr>
+            <p:cNvPr id="100" name="Google Shape;100;p14"/>
+            <p:cNvSpPr txBox="1"/>
+            <p:nvPr/>
+          </p:nvSpPr>
+          <p:spPr>
+            <a:xfrm>
+              <a:off x="928840" y="2719451"/>
+              <a:ext cx="10620375" cy="380873"/>
+            </a:xfrm>
+            <a:prstGeom prst="rect">
+              <a:avLst/>
+            </a:prstGeom>
+            <a:noFill/>
+            <a:ln>
+              <a:noFill/>
+            </a:ln>
+          </p:spPr>
+          <p:txBody>
+            <a:bodyPr spcFirstLastPara="1" wrap="square" lIns="0" tIns="0" rIns="0" bIns="0" anchor="t" anchorCtr="0">
+              <a:spAutoFit/>
+            </a:bodyPr>
+            <a:lstStyle/>
+            <a:p>
+              <a:pPr marL="0" marR="0" lvl="0" indent="0" algn="l" rtl="0">
+                <a:lnSpc>
+                  <a:spcPct val="150000"/>
+                </a:lnSpc>
+                <a:spcBef>
+                  <a:spcPts val="0"/>
+                </a:spcBef>
+                <a:spcAft>
+                  <a:spcPts val="0"/>
+                </a:spcAft>
+                <a:buNone/>
+              </a:pPr>
+              <a:r>
+                <a:rPr lang="en-US" sz="1650" b="0" i="0" u="none" strike="noStrike" cap="none" dirty="0">
+                  <a:solidFill>
+                    <a:srgbClr val="FFFFFF"/>
+                  </a:solidFill>
+                  <a:latin typeface="Poppins Light"/>
+                  <a:ea typeface="Poppins Light"/>
+                  <a:cs typeface="Poppins Light"/>
+                  <a:sym typeface="Poppins Light"/>
+                </a:rPr>
+                <a:t>Real model: fine-tuned anti-spoof network (AASIST-hindi)</a:t>
+              </a:r>
+              <a:endParaRPr dirty="0"/>
+            </a:p>
+          </p:txBody>
+        </p:sp>
+        <p:pic>
+          <p:nvPicPr>
+            <p:cNvPr id="105" name="Google Shape;105;p14" descr="image.png"/>
+            <p:cNvPicPr preferRelativeResize="0"/>
+            <p:nvPr/>
+          </p:nvPicPr>
+          <p:blipFill rotWithShape="1">
+            <a:blip r:embed="rId5">
+              <a:alphaModFix/>
+            </a:blip>
+            <a:srcRect/>
+            <a:stretch/>
+          </p:blipFill>
+          <p:spPr>
+            <a:xfrm>
+              <a:off x="571500" y="2819400"/>
+              <a:ext cx="200025" cy="247650"/>
+            </a:xfrm>
+            <a:prstGeom prst="rect">
+              <a:avLst/>
+            </a:prstGeom>
+            <a:noFill/>
+            <a:ln>
+              <a:noFill/>
+            </a:ln>
+          </p:spPr>
+        </p:pic>
+      </p:grpSp>
+      <p:grpSp>
+        <p:nvGrpSpPr>
+          <p:cNvPr id="4" name="Group 3">
+            <a:extLst>
+              <a:ext uri="{FF2B5EF4-FFF2-40B4-BE49-F238E27FC236}">
+                <a16:creationId xmlns:a16="http://schemas.microsoft.com/office/drawing/2014/main" id="{8BDCEEF2-B973-65CB-4419-90818D61867D}"/>
+              </a:ext>
+            </a:extLst>
+          </p:cNvPr>
+          <p:cNvGrpSpPr/>
+          <p:nvPr/>
+        </p:nvGrpSpPr>
+        <p:grpSpPr>
+          <a:xfrm>
+            <a:off x="571500" y="3188813"/>
+            <a:ext cx="5238750" cy="314325"/>
+            <a:chOff x="571500" y="3657600"/>
+            <a:chExt cx="5238750" cy="314325"/>
+          </a:xfrm>
+        </p:grpSpPr>
+        <p:sp>
+          <p:nvSpPr>
+            <p:cNvPr id="101" name="Google Shape;101;p14"/>
+            <p:cNvSpPr txBox="1"/>
+            <p:nvPr/>
+          </p:nvSpPr>
+          <p:spPr>
+            <a:xfrm>
+              <a:off x="1000125" y="3657600"/>
+              <a:ext cx="4810125" cy="314325"/>
+            </a:xfrm>
+            <a:prstGeom prst="rect">
+              <a:avLst/>
+            </a:prstGeom>
+            <a:noFill/>
+            <a:ln>
+              <a:noFill/>
+            </a:ln>
+          </p:spPr>
+          <p:txBody>
+            <a:bodyPr spcFirstLastPara="1" wrap="square" lIns="0" tIns="0" rIns="0" bIns="0" anchor="t" anchorCtr="0">
+              <a:spAutoFit/>
+            </a:bodyPr>
+            <a:lstStyle/>
+            <a:p>
+              <a:pPr marL="0" marR="0" lvl="0" indent="0" algn="l" rtl="0">
+                <a:lnSpc>
+                  <a:spcPct val="150000"/>
+                </a:lnSpc>
+                <a:spcBef>
+                  <a:spcPts val="0"/>
+                </a:spcBef>
+                <a:spcAft>
+                  <a:spcPts val="0"/>
+                </a:spcAft>
+                <a:buNone/>
+              </a:pPr>
+              <a:r>
+                <a:rPr lang="en-US" sz="1650" b="0" i="0" u="none" strike="noStrike" cap="none" dirty="0">
+                  <a:solidFill>
+                    <a:srgbClr val="FFFFFF"/>
+                  </a:solidFill>
+                  <a:latin typeface="Poppins Light"/>
+                  <a:ea typeface="Poppins Light"/>
+                  <a:cs typeface="Poppins Light"/>
+                  <a:sym typeface="Poppins Light"/>
+                </a:rPr>
+                <a:t>Live API: audio in → spoof_score + verdict (&lt;500 ms)</a:t>
+              </a:r>
+              <a:endParaRPr dirty="0"/>
+            </a:p>
+          </p:txBody>
+        </p:sp>
+        <p:pic>
+          <p:nvPicPr>
+            <p:cNvPr id="106" name="Google Shape;106;p14" descr="image.png"/>
+            <p:cNvPicPr preferRelativeResize="0"/>
+            <p:nvPr/>
+          </p:nvPicPr>
+          <p:blipFill rotWithShape="1">
+            <a:blip r:embed="rId5">
+              <a:alphaModFix/>
+            </a:blip>
+            <a:srcRect/>
+            <a:stretch/>
+          </p:blipFill>
+          <p:spPr>
+            <a:xfrm>
+              <a:off x="571500" y="3686175"/>
+              <a:ext cx="200025" cy="247650"/>
+            </a:xfrm>
+            <a:prstGeom prst="rect">
+              <a:avLst/>
+            </a:prstGeom>
+            <a:noFill/>
+            <a:ln>
+              <a:noFill/>
+            </a:ln>
+          </p:spPr>
+        </p:pic>
+      </p:grpSp>
+      <p:grpSp>
+        <p:nvGrpSpPr>
+          <p:cNvPr id="5" name="Group 4">
+            <a:extLst>
+              <a:ext uri="{FF2B5EF4-FFF2-40B4-BE49-F238E27FC236}">
+                <a16:creationId xmlns:a16="http://schemas.microsoft.com/office/drawing/2014/main" id="{776B38BC-4A69-5F43-A0F5-137CD55E4FA8}"/>
+              </a:ext>
+            </a:extLst>
+          </p:cNvPr>
+          <p:cNvGrpSpPr/>
+          <p:nvPr/>
+        </p:nvGrpSpPr>
+        <p:grpSpPr>
+          <a:xfrm>
+            <a:off x="571500" y="3741263"/>
+            <a:ext cx="5238750" cy="314325"/>
+            <a:chOff x="571500" y="4210050"/>
+            <a:chExt cx="5238750" cy="314325"/>
+          </a:xfrm>
+        </p:grpSpPr>
+        <p:sp>
+          <p:nvSpPr>
+            <p:cNvPr id="102" name="Google Shape;102;p14"/>
+            <p:cNvSpPr txBox="1"/>
+            <p:nvPr/>
+          </p:nvSpPr>
+          <p:spPr>
+            <a:xfrm>
+              <a:off x="1000125" y="4210050"/>
+              <a:ext cx="4810125" cy="314325"/>
+            </a:xfrm>
+            <a:prstGeom prst="rect">
+              <a:avLst/>
+            </a:prstGeom>
+            <a:noFill/>
+            <a:ln>
+              <a:noFill/>
+            </a:ln>
+          </p:spPr>
+          <p:txBody>
+            <a:bodyPr spcFirstLastPara="1" wrap="square" lIns="0" tIns="0" rIns="0" bIns="0" anchor="t" anchorCtr="0">
+              <a:spAutoFit/>
+            </a:bodyPr>
+            <a:lstStyle/>
+            <a:p>
+              <a:pPr marL="0" marR="0" lvl="0" indent="0" algn="l" rtl="0">
+                <a:lnSpc>
+                  <a:spcPct val="150000"/>
+                </a:lnSpc>
+                <a:spcBef>
+                  <a:spcPts val="0"/>
+                </a:spcBef>
+                <a:spcAft>
+                  <a:spcPts val="0"/>
+                </a:spcAft>
+                <a:buNone/>
+              </a:pPr>
+              <a:r>
+                <a:rPr lang="en-US" sz="1650" b="0" i="0" u="none" strike="noStrike" cap="none" dirty="0">
+                  <a:solidFill>
+                    <a:srgbClr val="FFFFFF"/>
+                  </a:solidFill>
+                  <a:latin typeface="Poppins Light"/>
+                  <a:ea typeface="Poppins Light"/>
+                  <a:cs typeface="Poppins Light"/>
+                  <a:sym typeface="Poppins Light"/>
+                </a:rPr>
+                <a:t>GitHub: full code + training pipeline (link)</a:t>
+              </a:r>
+              <a:endParaRPr dirty="0"/>
+            </a:p>
+          </p:txBody>
+        </p:sp>
+        <p:pic>
+          <p:nvPicPr>
+            <p:cNvPr id="107" name="Google Shape;107;p14" descr="image.png"/>
+            <p:cNvPicPr preferRelativeResize="0"/>
+            <p:nvPr/>
+          </p:nvPicPr>
+          <p:blipFill rotWithShape="1">
+            <a:blip r:embed="rId5">
+              <a:alphaModFix/>
+            </a:blip>
+            <a:srcRect/>
+            <a:stretch/>
+          </p:blipFill>
+          <p:spPr>
+            <a:xfrm>
+              <a:off x="571500" y="4238625"/>
+              <a:ext cx="200025" cy="247650"/>
+            </a:xfrm>
+            <a:prstGeom prst="rect">
+              <a:avLst/>
+            </a:prstGeom>
+            <a:noFill/>
+            <a:ln>
+              <a:noFill/>
+            </a:ln>
+          </p:spPr>
+        </p:pic>
+      </p:grpSp>
+      <p:grpSp>
+        <p:nvGrpSpPr>
+          <p:cNvPr id="6" name="Group 5">
+            <a:extLst>
+              <a:ext uri="{FF2B5EF4-FFF2-40B4-BE49-F238E27FC236}">
+                <a16:creationId xmlns:a16="http://schemas.microsoft.com/office/drawing/2014/main" id="{CF6956BC-D0DD-126D-0DC6-421091A25E5A}"/>
+              </a:ext>
+            </a:extLst>
+          </p:cNvPr>
+          <p:cNvGrpSpPr/>
+          <p:nvPr/>
+        </p:nvGrpSpPr>
+        <p:grpSpPr>
+          <a:xfrm>
+            <a:off x="571500" y="4293713"/>
+            <a:ext cx="5238750" cy="314325"/>
+            <a:chOff x="571500" y="4762500"/>
+            <a:chExt cx="5238750" cy="314325"/>
+          </a:xfrm>
+        </p:grpSpPr>
+        <p:sp>
+          <p:nvSpPr>
+            <p:cNvPr id="103" name="Google Shape;103;p14"/>
+            <p:cNvSpPr txBox="1"/>
+            <p:nvPr/>
+          </p:nvSpPr>
+          <p:spPr>
+            <a:xfrm>
+              <a:off x="1000125" y="4762500"/>
+              <a:ext cx="4810125" cy="314325"/>
+            </a:xfrm>
+            <a:prstGeom prst="rect">
+              <a:avLst/>
+            </a:prstGeom>
+            <a:noFill/>
+            <a:ln>
+              <a:noFill/>
+            </a:ln>
+          </p:spPr>
+          <p:txBody>
+            <a:bodyPr spcFirstLastPara="1" wrap="square" lIns="0" tIns="0" rIns="0" bIns="0" anchor="t" anchorCtr="0">
+              <a:spAutoFit/>
+            </a:bodyPr>
+            <a:lstStyle/>
+            <a:p>
+              <a:pPr marL="0" marR="0" lvl="0" indent="0" algn="l" rtl="0">
+                <a:lnSpc>
+                  <a:spcPct val="150000"/>
+                </a:lnSpc>
+                <a:spcBef>
+                  <a:spcPts val="0"/>
+                </a:spcBef>
+                <a:spcAft>
+                  <a:spcPts val="0"/>
+                </a:spcAft>
+                <a:buNone/>
+              </a:pPr>
+              <a:r>
+                <a:rPr lang="en-US" sz="1650" b="0" i="0" u="none" strike="noStrike" cap="none" dirty="0">
+                  <a:solidFill>
+                    <a:srgbClr val="FFFFFF"/>
+                  </a:solidFill>
+                  <a:latin typeface="Poppins Light"/>
+                  <a:ea typeface="Poppins Light"/>
+                  <a:cs typeface="Poppins Light"/>
+                  <a:sym typeface="Poppins Light"/>
+                </a:rPr>
+                <a:t>Demo video: 90-sec call-scenario (link)</a:t>
+              </a:r>
+              <a:endParaRPr dirty="0"/>
+            </a:p>
+          </p:txBody>
+        </p:sp>
+        <p:pic>
+          <p:nvPicPr>
+            <p:cNvPr id="108" name="Google Shape;108;p14" descr="image.png"/>
+            <p:cNvPicPr preferRelativeResize="0"/>
+            <p:nvPr/>
+          </p:nvPicPr>
+          <p:blipFill rotWithShape="1">
+            <a:blip r:embed="rId5">
+              <a:alphaModFix/>
+            </a:blip>
+            <a:srcRect/>
+            <a:stretch/>
+          </p:blipFill>
+          <p:spPr>
+            <a:xfrm>
+              <a:off x="571500" y="4791075"/>
+              <a:ext cx="200025" cy="247650"/>
+            </a:xfrm>
+            <a:prstGeom prst="rect">
+              <a:avLst/>
+            </a:prstGeom>
+            <a:noFill/>
+            <a:ln>
+              <a:noFill/>
+            </a:ln>
+          </p:spPr>
+        </p:pic>
+      </p:grpSp>
+      <p:sp>
+        <p:nvSpPr>
+          <p:cNvPr id="109" name="Google Shape;109;p14"/>
+          <p:cNvSpPr txBox="1"/>
+          <p:nvPr/>
+        </p:nvSpPr>
+        <p:spPr>
+          <a:xfrm>
+            <a:off x="571500" y="571500"/>
+            <a:ext cx="11601450" cy="628650"/>
+          </a:xfrm>
+          <a:prstGeom prst="rect">
+            <a:avLst/>
+          </a:prstGeom>
+          <a:noFill/>
+          <a:ln>
+            <a:noFill/>
+          </a:ln>
+        </p:spPr>
+        <p:txBody>
+          <a:bodyPr spcFirstLastPara="1" wrap="square" lIns="0" tIns="0" rIns="0" bIns="0" anchor="t" anchorCtr="0">
+            <a:spAutoFit/>
+          </a:bodyPr>
+          <a:lstStyle/>
+          <a:p>
+            <a:pPr marL="0" marR="0" lvl="0" indent="0" algn="l" rtl="0">
+              <a:spcBef>
+                <a:spcPts val="0"/>
+              </a:spcBef>
+              <a:spcAft>
+                <a:spcPts val="0"/>
+              </a:spcAft>
+              <a:buNone/>
+            </a:pPr>
+            <a:r>
+              <a:rPr lang="en-US" sz="3600" b="1" i="0" u="none" strike="noStrike" cap="none" dirty="0">
+                <a:solidFill>
+                  <a:srgbClr val="F2EEFA"/>
+                </a:solidFill>
+                <a:latin typeface="Playfair Display"/>
+                <a:ea typeface="Playfair Display"/>
+                <a:cs typeface="Playfair Display"/>
+                <a:sym typeface="Playfair Display"/>
+              </a:rPr>
+              <a:t>WORKING PROTOTYPE — LIVE DEMO</a:t>
+            </a:r>
+            <a:endParaRPr dirty="0"/>
+          </a:p>
+        </p:txBody>
+      </p:sp>
+      <p:sp>
+        <p:nvSpPr>
+          <p:cNvPr id="110" name="Google Shape;110;p14"/>
+          <p:cNvSpPr/>
+          <p:nvPr/>
+        </p:nvSpPr>
+        <p:spPr>
+          <a:xfrm>
+            <a:off x="571500" y="1323975"/>
+            <a:ext cx="11049000" cy="19050"/>
+          </a:xfrm>
+          <a:prstGeom prst="rect">
+            <a:avLst/>
+          </a:prstGeom>
+          <a:solidFill>
+            <a:srgbClr val="D4AF37"/>
+          </a:solidFill>
+          <a:ln>
+            <a:noFill/>
+          </a:ln>
+        </p:spPr>
+        <p:txBody>
+          <a:bodyPr spcFirstLastPara="1" wrap="square" lIns="91425" tIns="45700" rIns="91425" bIns="45700" anchor="ctr" anchorCtr="0">
+            <a:noAutofit/>
+          </a:bodyPr>
+          <a:lstStyle/>
+          <a:p>
+            <a:pPr marL="0" marR="0" lvl="0" indent="0" algn="ctr" rtl="0">
+              <a:spcBef>
+                <a:spcPts val="0"/>
+              </a:spcBef>
+              <a:spcAft>
+                <a:spcPts val="0"/>
+              </a:spcAft>
+              <a:buNone/>
+            </a:pPr>
+            <a:endParaRPr sz="1800" b="0" i="0" u="none" strike="noStrike" cap="none" dirty="0">
+              <a:solidFill>
+                <a:schemeClr val="dk1"/>
+              </a:solidFill>
+              <a:latin typeface="Calibri"/>
+              <a:ea typeface="Calibri"/>
+              <a:cs typeface="Calibri"/>
+              <a:sym typeface="Calibri"/>
+            </a:endParaRPr>
+          </a:p>
+        </p:txBody>
+      </p:sp>
+      <p:sp>
+        <p:nvSpPr>
+          <p:cNvPr id="111" name="Google Shape;111;p14"/>
+          <p:cNvSpPr txBox="1"/>
+          <p:nvPr/>
+        </p:nvSpPr>
+        <p:spPr>
+          <a:xfrm>
+            <a:off x="11706225" y="6467475"/>
+            <a:ext cx="200025" cy="161583"/>
+          </a:xfrm>
+          <a:prstGeom prst="rect">
+            <a:avLst/>
+          </a:prstGeom>
+          <a:noFill/>
+          <a:ln>
+            <a:noFill/>
+          </a:ln>
+        </p:spPr>
+        <p:txBody>
+          <a:bodyPr spcFirstLastPara="1" wrap="square" lIns="0" tIns="0" rIns="0" bIns="0" anchor="t" anchorCtr="0">
+            <a:spAutoFit/>
+          </a:bodyPr>
+          <a:lstStyle/>
+          <a:p>
+            <a:pPr marL="0" marR="0" lvl="0" indent="0" algn="l" rtl="0">
+              <a:spcBef>
+                <a:spcPts val="0"/>
+              </a:spcBef>
+              <a:spcAft>
+                <a:spcPts val="0"/>
+              </a:spcAft>
+              <a:buNone/>
+            </a:pPr>
+            <a:r>
+              <a:rPr lang="en-US" sz="1050" b="0" i="0" u="none" strike="noStrike" cap="none" dirty="0">
+                <a:solidFill>
+                  <a:srgbClr val="FFFFFF"/>
+                </a:solidFill>
+                <a:latin typeface="Poppins"/>
+                <a:ea typeface="Poppins"/>
+                <a:cs typeface="Poppins"/>
+                <a:sym typeface="Poppins"/>
+              </a:rPr>
+              <a:t>07</a:t>
+            </a:r>
+            <a:endParaRPr dirty="0"/>
+          </a:p>
+        </p:txBody>
+      </p:sp>
+      <p:pic>
+        <p:nvPicPr>
+          <p:cNvPr id="7" name="Picture 6">
+            <a:extLst>
+              <a:ext uri="{FF2B5EF4-FFF2-40B4-BE49-F238E27FC236}">
+                <a16:creationId xmlns:a16="http://schemas.microsoft.com/office/drawing/2014/main" id="{81D6A019-74ED-9001-54F2-BCA9F7EF5C85}"/>
+              </a:ext>
+            </a:extLst>
+          </p:cNvPr>
+          <p:cNvPicPr>
+            <a:picLocks noChangeAspect="1"/>
+          </p:cNvPicPr>
+          <p:nvPr/>
+        </p:nvPicPr>
+        <p:blipFill>
+          <a:blip r:embed="rId6"/>
+          <a:stretch>
+            <a:fillRect/>
+          </a:stretch>
+        </p:blipFill>
+        <p:spPr>
+          <a:xfrm>
+            <a:off x="9361386" y="134593"/>
+            <a:ext cx="2259114" cy="1169718"/>
+          </a:xfrm>
+          <a:prstGeom prst="rect">
+            <a:avLst/>
+          </a:prstGeom>
+        </p:spPr>
+      </p:pic>
+    </p:spTree>
+  </p:cSld>
+  <p:clrMapOvr>
+    <a:masterClrMapping/>
+  </p:clrMapOvr>
+</p:sld>
+</file>
+
+<file path=ppt/slides/slide8.xml><?xml version="1.0" encoding="utf-8"?>
+<p:sld xmlns:a="http://schemas.openxmlformats.org/drawingml/2006/main" xmlns:r="http://schemas.openxmlformats.org/officeDocument/2006/relationships" xmlns:p="http://schemas.openxmlformats.org/presentationml/2006/main">
+  <p:cSld>
+    <p:spTree>
+      <p:nvGrpSpPr>
+        <p:cNvPr id="1" name="Shape 162"/>
+        <p:cNvGrpSpPr/>
+        <p:nvPr/>
+      </p:nvGrpSpPr>
+      <p:grpSpPr>
+        <a:xfrm>
+          <a:off x="0" y="0"/>
+          <a:ext cx="0" cy="0"/>
+          <a:chOff x="0" y="0"/>
+          <a:chExt cx="0" cy="0"/>
+        </a:xfrm>
+      </p:grpSpPr>
+      <p:grpSp>
+        <p:nvGrpSpPr>
+          <p:cNvPr id="2" name="Group 1">
+            <a:extLst>
+              <a:ext uri="{FF2B5EF4-FFF2-40B4-BE49-F238E27FC236}">
+                <a16:creationId xmlns:a16="http://schemas.microsoft.com/office/drawing/2014/main" id="{6C816A02-64BD-FBFB-2E8F-FE68591AE819}"/>
+              </a:ext>
+            </a:extLst>
+          </p:cNvPr>
+          <p:cNvGrpSpPr>
+            <a:grpSpLocks noGrp="1" noUngrp="1" noRot="1" noMove="1" noResize="1"/>
+          </p:cNvGrpSpPr>
+          <p:nvPr/>
+        </p:nvGrpSpPr>
+        <p:grpSpPr>
+          <a:xfrm>
+            <a:off x="-132734" y="-74663"/>
+            <a:ext cx="12457469" cy="7007326"/>
+            <a:chOff x="-157315" y="-88489"/>
+            <a:chExt cx="12457469" cy="7007326"/>
+          </a:xfrm>
+        </p:grpSpPr>
+        <p:pic>
+          <p:nvPicPr>
+            <p:cNvPr id="3" name="Google Shape;84;p13" descr="image.png">
+              <a:extLst>
+                <a:ext uri="{FF2B5EF4-FFF2-40B4-BE49-F238E27FC236}">
+                  <a16:creationId xmlns:a16="http://schemas.microsoft.com/office/drawing/2014/main" id="{0FC4E61E-2819-88A1-4D2E-25F6C534E60D}"/>
+                </a:ext>
+              </a:extLst>
+            </p:cNvPr>
+            <p:cNvPicPr preferRelativeResize="0">
+              <a:picLocks noGrp="1" noRot="1" noMove="1" noResize="1" noEditPoints="1" noAdjustHandles="1" noChangeArrowheads="1" noChangeShapeType="1" noCrop="1"/>
+            </p:cNvPicPr>
+            <p:nvPr/>
+          </p:nvPicPr>
+          <p:blipFill rotWithShape="1">
+            <a:blip r:embed="rId3">
+              <a:alphaModFix/>
+            </a:blip>
+            <a:srcRect/>
+            <a:stretch/>
+          </p:blipFill>
+          <p:spPr>
+            <a:xfrm>
+              <a:off x="-157315" y="-88489"/>
+              <a:ext cx="12457469" cy="7007326"/>
+            </a:xfrm>
+            <a:prstGeom prst="rect">
+              <a:avLst/>
+            </a:prstGeom>
+            <a:noFill/>
+            <a:ln>
+              <a:noFill/>
+            </a:ln>
+          </p:spPr>
+        </p:pic>
+        <p:pic>
+          <p:nvPicPr>
+            <p:cNvPr id="4" name="Google Shape;98;p14" descr="image.png">
+              <a:extLst>
+                <a:ext uri="{FF2B5EF4-FFF2-40B4-BE49-F238E27FC236}">
+                  <a16:creationId xmlns:a16="http://schemas.microsoft.com/office/drawing/2014/main" id="{062BE52A-6744-24D5-7827-BF7ABFAE66D8}"/>
+                </a:ext>
+              </a:extLst>
+            </p:cNvPr>
+            <p:cNvPicPr preferRelativeResize="0">
+              <a:picLocks noGrp="1" noRot="1" noMove="1" noResize="1" noEditPoints="1" noAdjustHandles="1" noChangeArrowheads="1" noChangeShapeType="1" noCrop="1"/>
+            </p:cNvPicPr>
+            <p:nvPr/>
+          </p:nvPicPr>
+          <p:blipFill rotWithShape="1">
+            <a:blip r:embed="rId4">
+              <a:alphaModFix amt="50000"/>
+            </a:blip>
+            <a:srcRect/>
+            <a:stretch/>
+          </p:blipFill>
+          <p:spPr>
+            <a:xfrm>
+              <a:off x="0" y="0"/>
+              <a:ext cx="12192000" cy="6858000"/>
+            </a:xfrm>
+            <a:prstGeom prst="rect">
+              <a:avLst/>
+            </a:prstGeom>
+            <a:noFill/>
+            <a:ln>
+              <a:noFill/>
+            </a:ln>
+          </p:spPr>
+        </p:pic>
+      </p:grpSp>
+      <p:pic>
+        <p:nvPicPr>
+          <p:cNvPr id="164" name="Google Shape;164;p18" descr="image.png"/>
+          <p:cNvPicPr preferRelativeResize="0"/>
+          <p:nvPr/>
+        </p:nvPicPr>
+        <p:blipFill rotWithShape="1">
+          <a:blip r:embed="rId5">
+            <a:alphaModFix/>
+          </a:blip>
+          <a:srcRect/>
+          <a:stretch/>
+        </p:blipFill>
+        <p:spPr>
+          <a:xfrm>
+            <a:off x="894735" y="1661038"/>
+            <a:ext cx="10491634" cy="4806437"/>
+          </a:xfrm>
+          <a:prstGeom prst="rect">
+            <a:avLst/>
+          </a:prstGeom>
+          <a:noFill/>
+          <a:ln>
+            <a:noFill/>
+          </a:ln>
+        </p:spPr>
+      </p:pic>
+      <p:sp>
+        <p:nvSpPr>
+          <p:cNvPr id="166" name="Google Shape;166;p18"/>
+          <p:cNvSpPr txBox="1"/>
+          <p:nvPr/>
+        </p:nvSpPr>
+        <p:spPr>
+          <a:xfrm>
+            <a:off x="571500" y="682747"/>
+            <a:ext cx="9291161" cy="553998"/>
+          </a:xfrm>
+          <a:prstGeom prst="rect">
+            <a:avLst/>
+          </a:prstGeom>
+          <a:noFill/>
+          <a:ln>
+            <a:noFill/>
+          </a:ln>
+        </p:spPr>
+        <p:txBody>
+          <a:bodyPr spcFirstLastPara="1" wrap="square" lIns="0" tIns="0" rIns="0" bIns="0" anchor="t" anchorCtr="0">
+            <a:spAutoFit/>
+          </a:bodyPr>
+          <a:lstStyle>
+            <a:defPPr marR="0" lvl="0" algn="l" rtl="0">
+              <a:lnSpc>
+                <a:spcPct val="100000"/>
+              </a:lnSpc>
+              <a:spcBef>
+                <a:spcPts val="0"/>
+              </a:spcBef>
+              <a:spcAft>
+                <a:spcPts val="0"/>
+              </a:spcAft>
+            </a:defPPr>
+            <a:lvl1pPr marL="0" indent="0">
+              <a:buNone/>
+              <a:defRPr sz="3600" b="1">
+                <a:solidFill>
+                  <a:srgbClr val="F2EEFA"/>
+                </a:solidFill>
+                <a:latin typeface="Playfair Display"/>
+                <a:ea typeface="Playfair Display"/>
+                <a:cs typeface="Playfair Display"/>
+              </a:defRPr>
+            </a:lvl1pPr>
+          </a:lstStyle>
+          <a:p>
+            <a:r>
+              <a:rPr lang="en-US" dirty="0">
+                <a:sym typeface="Playfair Display"/>
+              </a:rPr>
+              <a:t>RESEARCH AND REFERENCES</a:t>
+            </a:r>
+            <a:endParaRPr dirty="0"/>
+          </a:p>
+        </p:txBody>
+      </p:sp>
+      <p:grpSp>
+        <p:nvGrpSpPr>
+          <p:cNvPr id="7" name="Group 6">
+            <a:extLst>
+              <a:ext uri="{FF2B5EF4-FFF2-40B4-BE49-F238E27FC236}">
+                <a16:creationId xmlns:a16="http://schemas.microsoft.com/office/drawing/2014/main" id="{4E1C9CA6-2431-0A69-98BB-5E30EED6A492}"/>
+              </a:ext>
+            </a:extLst>
+          </p:cNvPr>
+          <p:cNvGrpSpPr/>
+          <p:nvPr/>
+        </p:nvGrpSpPr>
+        <p:grpSpPr>
+          <a:xfrm>
+            <a:off x="2306177" y="3813418"/>
+            <a:ext cx="8058150" cy="375455"/>
+            <a:chOff x="2168525" y="4214995"/>
+            <a:chExt cx="8058150" cy="375455"/>
+          </a:xfrm>
+        </p:grpSpPr>
+        <p:sp>
+          <p:nvSpPr>
+            <p:cNvPr id="168" name="Google Shape;168;p18"/>
+            <p:cNvSpPr txBox="1"/>
+            <p:nvPr/>
+          </p:nvSpPr>
+          <p:spPr>
+            <a:xfrm>
+              <a:off x="2168525" y="4214995"/>
+              <a:ext cx="8058150" cy="365670"/>
+            </a:xfrm>
+            <a:prstGeom prst="rect">
+              <a:avLst/>
+            </a:prstGeom>
+            <a:noFill/>
+            <a:ln>
+              <a:noFill/>
+            </a:ln>
+          </p:spPr>
+          <p:txBody>
+            <a:bodyPr spcFirstLastPara="1" wrap="square" lIns="428625" tIns="0" rIns="0" bIns="0" anchor="t" anchorCtr="0">
+              <a:spAutoFit/>
+            </a:bodyPr>
+            <a:lstStyle/>
+            <a:p>
+              <a:pPr marL="0" marR="0" lvl="0" indent="0" algn="ctr" rtl="0">
+                <a:lnSpc>
+                  <a:spcPct val="159944"/>
+                </a:lnSpc>
+                <a:spcBef>
+                  <a:spcPts val="0"/>
+                </a:spcBef>
+                <a:spcAft>
+                  <a:spcPts val="0"/>
+                </a:spcAft>
+                <a:buNone/>
+              </a:pPr>
+              <a:r>
+                <a:rPr lang="en-US" sz="1800" b="0" i="0" u="none" strike="noStrike" cap="none" dirty="0">
+                  <a:solidFill>
+                    <a:srgbClr val="F2EEFA"/>
+                  </a:solidFill>
+                  <a:latin typeface="Poppins Light"/>
+                  <a:ea typeface="Poppins Light"/>
+                  <a:cs typeface="Poppins Light"/>
+                  <a:sym typeface="Poppins Light"/>
+                </a:rPr>
+                <a:t>1. RBI/2024-25/105 · 2. CERT-In CIAD-2024-0060 · 3. ASVspoof 2021 LA · 4. AASIST (clovaai) · 5. UPI fraud ₹805 cr (FPJ) · 6. Hyderabad ₹1.97L (Indian Express)</a:t>
+              </a:r>
+              <a:endParaRPr dirty="0"/>
+            </a:p>
+          </p:txBody>
+        </p:sp>
+        <p:pic>
+          <p:nvPicPr>
+            <p:cNvPr id="169" name="Google Shape;169;p18" descr="image.png"/>
+            <p:cNvPicPr preferRelativeResize="0"/>
+            <p:nvPr/>
+          </p:nvPicPr>
+          <p:blipFill rotWithShape="1">
+            <a:blip r:embed="rId6">
+              <a:alphaModFix/>
+            </a:blip>
+            <a:srcRect/>
+            <a:stretch/>
+          </p:blipFill>
+          <p:spPr>
+            <a:xfrm>
+              <a:off x="3169920" y="4361850"/>
+              <a:ext cx="285750" cy="228600"/>
+            </a:xfrm>
+            <a:prstGeom prst="rect">
+              <a:avLst/>
+            </a:prstGeom>
+            <a:noFill/>
+            <a:ln>
+              <a:noFill/>
+            </a:ln>
+          </p:spPr>
+        </p:pic>
+      </p:grpSp>
+      <p:sp>
+        <p:nvSpPr>
+          <p:cNvPr id="170" name="Google Shape;170;p18"/>
+          <p:cNvSpPr txBox="1"/>
+          <p:nvPr/>
+        </p:nvSpPr>
+        <p:spPr>
+          <a:xfrm>
+            <a:off x="11696700" y="6467475"/>
+            <a:ext cx="209550" cy="200025"/>
+          </a:xfrm>
+          <a:prstGeom prst="rect">
+            <a:avLst/>
+          </a:prstGeom>
+          <a:noFill/>
+          <a:ln>
+            <a:noFill/>
+          </a:ln>
+        </p:spPr>
+        <p:txBody>
+          <a:bodyPr spcFirstLastPara="1" wrap="square" lIns="0" tIns="0" rIns="0" bIns="0" anchor="t" anchorCtr="0">
+            <a:spAutoFit/>
+          </a:bodyPr>
+          <a:lstStyle/>
+          <a:p>
+            <a:pPr marL="0" marR="0" lvl="0" indent="0" algn="l" rtl="0">
+              <a:spcBef>
+                <a:spcPts val="0"/>
+              </a:spcBef>
+              <a:spcAft>
+                <a:spcPts val="0"/>
+              </a:spcAft>
+              <a:buNone/>
+            </a:pPr>
+            <a:r>
+              <a:rPr lang="en-US" sz="1050" b="0" i="0" u="none" strike="noStrike" cap="none" dirty="0">
+                <a:solidFill>
+                  <a:srgbClr val="FFFFFF"/>
+                </a:solidFill>
+                <a:latin typeface="Poppins"/>
+                <a:ea typeface="Poppins"/>
+                <a:cs typeface="Poppins"/>
+                <a:sym typeface="Poppins"/>
+              </a:rPr>
+              <a:t>06</a:t>
+            </a:r>
+            <a:endParaRPr dirty="0"/>
+          </a:p>
+        </p:txBody>
+      </p:sp>
+      <p:pic>
+        <p:nvPicPr>
+          <p:cNvPr id="5" name="Picture 4">
+            <a:extLst>
+              <a:ext uri="{FF2B5EF4-FFF2-40B4-BE49-F238E27FC236}">
+                <a16:creationId xmlns:a16="http://schemas.microsoft.com/office/drawing/2014/main" id="{A2B84B2B-35C3-CD70-ED94-211E6AF95D2B}"/>
+              </a:ext>
+            </a:extLst>
+          </p:cNvPr>
+          <p:cNvPicPr>
+            <a:picLocks noChangeAspect="1"/>
+          </p:cNvPicPr>
+          <p:nvPr/>
+        </p:nvPicPr>
+        <p:blipFill>
+          <a:blip r:embed="rId7"/>
+          <a:stretch>
+            <a:fillRect/>
+          </a:stretch>
+        </p:blipFill>
+        <p:spPr>
+          <a:xfrm>
+            <a:off x="9793919" y="141850"/>
+            <a:ext cx="2259114" cy="1169718"/>
+          </a:xfrm>
+          <a:prstGeom prst="rect">
+            <a:avLst/>
+          </a:prstGeom>
+        </p:spPr>
+      </p:pic>
+      <p:sp>
+        <p:nvSpPr>
+          <p:cNvPr id="6" name="Google Shape;144;p16">
+            <a:extLst>
+              <a:ext uri="{FF2B5EF4-FFF2-40B4-BE49-F238E27FC236}">
+                <a16:creationId xmlns:a16="http://schemas.microsoft.com/office/drawing/2014/main" id="{D7515F0B-1E18-86AF-90B0-D093B0E72B20}"/>
+              </a:ext>
+            </a:extLst>
+          </p:cNvPr>
+          <p:cNvSpPr/>
+          <p:nvPr/>
+        </p:nvSpPr>
+        <p:spPr>
+          <a:xfrm>
+            <a:off x="571500" y="1323975"/>
+            <a:ext cx="11049000" cy="19050"/>
+          </a:xfrm>
+          <a:prstGeom prst="rect">
+            <a:avLst/>
+          </a:prstGeom>
+          <a:solidFill>
+            <a:srgbClr val="D4AF37"/>
+          </a:solidFill>
+          <a:ln>
+            <a:noFill/>
+          </a:ln>
+        </p:spPr>
+        <p:txBody>
+          <a:bodyPr spcFirstLastPara="1" wrap="square" lIns="91425" tIns="45700" rIns="91425" bIns="45700" anchor="ctr" anchorCtr="0">
+            <a:noAutofit/>
+          </a:bodyPr>
+          <a:lstStyle/>
+          <a:p>
+            <a:pPr marL="0" marR="0" lvl="0" indent="0" algn="ctr" rtl="0">
+              <a:spcBef>
+                <a:spcPts val="0"/>
+              </a:spcBef>
+              <a:spcAft>
+                <a:spcPts val="0"/>
+              </a:spcAft>
+              <a:buNone/>
+            </a:pPr>
+            <a:endParaRPr sz="1800" b="0" i="0" u="none" strike="noStrike" cap="none" dirty="0">
+              <a:solidFill>
+                <a:schemeClr val="dk1"/>
+              </a:solidFill>
+              <a:latin typeface="Calibri"/>
+              <a:ea typeface="Calibri"/>
+              <a:cs typeface="Calibri"/>
+              <a:sym typeface="Calibri"/>
+            </a:endParaRPr>
+          </a:p>
+        </p:txBody>
+      </p:sp>
+    </p:spTree>
+  </p:cSld>
+  <p:clrMapOvr>
+    <a:masterClrMapping/>
+  </p:clrMapOvr>
+</p:sld>
+</file>
+
+<file path=ppt/slides/slide9.xml><?xml version="1.0" encoding="utf-8"?>
 <p:sld xmlns:a="http://schemas.openxmlformats.org/drawingml/2006/main" xmlns:r="http://schemas.openxmlformats.org/officeDocument/2006/relationships" xmlns:p="http://schemas.openxmlformats.org/presentationml/2006/main">
   <p:cSld>
     <p:spTree>
@@ -12315,4228 +16537,6 @@
                 <a:sym typeface="Poppins"/>
               </a:rPr>
               <a:t>09</a:t>
-            </a:r>
-            <a:endParaRPr dirty="0"/>
-          </a:p>
-        </p:txBody>
-      </p:sp>
-      <p:pic>
-        <p:nvPicPr>
-          <p:cNvPr id="7" name="Picture 6">
-            <a:extLst>
-              <a:ext uri="{FF2B5EF4-FFF2-40B4-BE49-F238E27FC236}">
-                <a16:creationId xmlns:a16="http://schemas.microsoft.com/office/drawing/2014/main" id="{81D6A019-74ED-9001-54F2-BCA9F7EF5C85}"/>
-              </a:ext>
-            </a:extLst>
-          </p:cNvPr>
-          <p:cNvPicPr>
-            <a:picLocks noChangeAspect="1"/>
-          </p:cNvPicPr>
-          <p:nvPr/>
-        </p:nvPicPr>
-        <p:blipFill>
-          <a:blip r:embed="rId6"/>
-          <a:stretch>
-            <a:fillRect/>
-          </a:stretch>
-        </p:blipFill>
-        <p:spPr>
-          <a:xfrm>
-            <a:off x="9361386" y="134593"/>
-            <a:ext cx="2259114" cy="1169718"/>
-          </a:xfrm>
-          <a:prstGeom prst="rect">
-            <a:avLst/>
-          </a:prstGeom>
-        </p:spPr>
-      </p:pic>
-    </p:spTree>
-  </p:cSld>
-  <p:clrMapOvr>
-    <a:masterClrMapping/>
-  </p:clrMapOvr>
-</p:sld>
-</file>
-
-<file path=ppt/slides/slide2.xml><?xml version="1.0" encoding="utf-8"?>
-<p:sld xmlns:a="http://schemas.openxmlformats.org/drawingml/2006/main" xmlns:r="http://schemas.openxmlformats.org/officeDocument/2006/relationships" xmlns:p="http://schemas.openxmlformats.org/presentationml/2006/main">
-  <p:cSld>
-    <p:spTree>
-      <p:nvGrpSpPr>
-        <p:cNvPr id="1" name="Shape 97"/>
-        <p:cNvGrpSpPr/>
-        <p:nvPr/>
-      </p:nvGrpSpPr>
-      <p:grpSpPr>
-        <a:xfrm>
-          <a:off x="0" y="0"/>
-          <a:ext cx="0" cy="0"/>
-          <a:chOff x="0" y="0"/>
-          <a:chExt cx="0" cy="0"/>
-        </a:xfrm>
-      </p:grpSpPr>
-      <p:pic>
-        <p:nvPicPr>
-          <p:cNvPr id="2" name="Google Shape;84;p13" descr="image.png">
-            <a:extLst>
-              <a:ext uri="{FF2B5EF4-FFF2-40B4-BE49-F238E27FC236}">
-                <a16:creationId xmlns:a16="http://schemas.microsoft.com/office/drawing/2014/main" id="{A7427FBB-6B82-28C2-C807-6A3DF49A1F1A}"/>
-              </a:ext>
-            </a:extLst>
-          </p:cNvPr>
-          <p:cNvPicPr preferRelativeResize="0"/>
-          <p:nvPr/>
-        </p:nvPicPr>
-        <p:blipFill rotWithShape="1">
-          <a:blip r:embed="rId3">
-            <a:alphaModFix/>
-          </a:blip>
-          <a:srcRect/>
-          <a:stretch/>
-        </p:blipFill>
-        <p:spPr>
-          <a:xfrm>
-            <a:off x="-157315" y="-88489"/>
-            <a:ext cx="12457469" cy="7007326"/>
-          </a:xfrm>
-          <a:prstGeom prst="rect">
-            <a:avLst/>
-          </a:prstGeom>
-          <a:noFill/>
-          <a:ln>
-            <a:noFill/>
-          </a:ln>
-        </p:spPr>
-      </p:pic>
-      <p:pic>
-        <p:nvPicPr>
-          <p:cNvPr id="98" name="Google Shape;98;p14" descr="image.png"/>
-          <p:cNvPicPr preferRelativeResize="0"/>
-          <p:nvPr/>
-        </p:nvPicPr>
-        <p:blipFill rotWithShape="1">
-          <a:blip r:embed="rId4">
-            <a:alphaModFix amt="50000"/>
-          </a:blip>
-          <a:srcRect/>
-          <a:stretch/>
-        </p:blipFill>
-        <p:spPr>
-          <a:xfrm>
-            <a:off x="0" y="0"/>
-            <a:ext cx="12192000" cy="6858000"/>
-          </a:xfrm>
-          <a:prstGeom prst="rect">
-            <a:avLst/>
-          </a:prstGeom>
-          <a:noFill/>
-          <a:ln>
-            <a:noFill/>
-          </a:ln>
-        </p:spPr>
-      </p:pic>
-      <p:grpSp>
-        <p:nvGrpSpPr>
-          <p:cNvPr id="3" name="Group 2">
-            <a:extLst>
-              <a:ext uri="{FF2B5EF4-FFF2-40B4-BE49-F238E27FC236}">
-                <a16:creationId xmlns:a16="http://schemas.microsoft.com/office/drawing/2014/main" id="{A73E524B-A1B2-0008-AF1C-66E70946F0B4}"/>
-              </a:ext>
-            </a:extLst>
-          </p:cNvPr>
-          <p:cNvGrpSpPr/>
-          <p:nvPr/>
-        </p:nvGrpSpPr>
-        <p:grpSpPr>
-          <a:xfrm>
-            <a:off x="571500" y="2658491"/>
-            <a:ext cx="10977715" cy="380873"/>
-            <a:chOff x="571500" y="2719451"/>
-            <a:chExt cx="10977715" cy="380873"/>
-          </a:xfrm>
-        </p:grpSpPr>
-        <p:sp>
-          <p:nvSpPr>
-            <p:cNvPr id="100" name="Google Shape;100;p14"/>
-            <p:cNvSpPr txBox="1"/>
-            <p:nvPr/>
-          </p:nvSpPr>
-          <p:spPr>
-            <a:xfrm>
-              <a:off x="928840" y="2719451"/>
-              <a:ext cx="10620375" cy="380873"/>
-            </a:xfrm>
-            <a:prstGeom prst="rect">
-              <a:avLst/>
-            </a:prstGeom>
-            <a:noFill/>
-            <a:ln>
-              <a:noFill/>
-            </a:ln>
-          </p:spPr>
-          <p:txBody>
-            <a:bodyPr spcFirstLastPara="1" wrap="square" lIns="0" tIns="0" rIns="0" bIns="0" anchor="t" anchorCtr="0">
-              <a:spAutoFit/>
-            </a:bodyPr>
-            <a:lstStyle/>
-            <a:p>
-              <a:pPr marL="0" marR="0" lvl="0" indent="0" algn="l" rtl="0">
-                <a:lnSpc>
-                  <a:spcPct val="150000"/>
-                </a:lnSpc>
-                <a:spcBef>
-                  <a:spcPts val="0"/>
-                </a:spcBef>
-                <a:spcAft>
-                  <a:spcPts val="0"/>
-                </a:spcAft>
-                <a:buNone/>
-              </a:pPr>
-              <a:r>
-                <a:rPr lang="en-US" sz="1650" b="0" i="0" u="none" strike="noStrike" cap="none" dirty="0">
-                  <a:solidFill>
-                    <a:srgbClr val="FFFFFF"/>
-                  </a:solidFill>
-                  <a:latin typeface="Poppins Light"/>
-                  <a:ea typeface="Poppins Light"/>
-                  <a:cs typeface="Poppins Light"/>
-                  <a:sym typeface="Poppins Light"/>
-                </a:rPr>
-                <a:t>PROPOSED SOLUTION</a:t>
-              </a:r>
-              <a:endParaRPr dirty="0"/>
-            </a:p>
-          </p:txBody>
-        </p:sp>
-        <p:pic>
-          <p:nvPicPr>
-            <p:cNvPr id="105" name="Google Shape;105;p14" descr="image.png"/>
-            <p:cNvPicPr preferRelativeResize="0"/>
-            <p:nvPr/>
-          </p:nvPicPr>
-          <p:blipFill rotWithShape="1">
-            <a:blip r:embed="rId5">
-              <a:alphaModFix/>
-            </a:blip>
-            <a:srcRect/>
-            <a:stretch/>
-          </p:blipFill>
-          <p:spPr>
-            <a:xfrm>
-              <a:off x="571500" y="2819400"/>
-              <a:ext cx="200025" cy="247650"/>
-            </a:xfrm>
-            <a:prstGeom prst="rect">
-              <a:avLst/>
-            </a:prstGeom>
-            <a:noFill/>
-            <a:ln>
-              <a:noFill/>
-            </a:ln>
-          </p:spPr>
-        </p:pic>
-      </p:grpSp>
-      <p:grpSp>
-        <p:nvGrpSpPr>
-          <p:cNvPr id="4" name="Group 3">
-            <a:extLst>
-              <a:ext uri="{FF2B5EF4-FFF2-40B4-BE49-F238E27FC236}">
-                <a16:creationId xmlns:a16="http://schemas.microsoft.com/office/drawing/2014/main" id="{8BDCEEF2-B973-65CB-4419-90818D61867D}"/>
-              </a:ext>
-            </a:extLst>
-          </p:cNvPr>
-          <p:cNvGrpSpPr/>
-          <p:nvPr/>
-        </p:nvGrpSpPr>
-        <p:grpSpPr>
-          <a:xfrm>
-            <a:off x="571500" y="3188813"/>
-            <a:ext cx="5238750" cy="314325"/>
-            <a:chOff x="571500" y="3657600"/>
-            <a:chExt cx="5238750" cy="314325"/>
-          </a:xfrm>
-        </p:grpSpPr>
-        <p:sp>
-          <p:nvSpPr>
-            <p:cNvPr id="101" name="Google Shape;101;p14"/>
-            <p:cNvSpPr txBox="1"/>
-            <p:nvPr/>
-          </p:nvSpPr>
-          <p:spPr>
-            <a:xfrm>
-              <a:off x="1000125" y="3657600"/>
-              <a:ext cx="4810125" cy="314325"/>
-            </a:xfrm>
-            <a:prstGeom prst="rect">
-              <a:avLst/>
-            </a:prstGeom>
-            <a:noFill/>
-            <a:ln>
-              <a:noFill/>
-            </a:ln>
-          </p:spPr>
-          <p:txBody>
-            <a:bodyPr spcFirstLastPara="1" wrap="square" lIns="0" tIns="0" rIns="0" bIns="0" anchor="t" anchorCtr="0">
-              <a:spAutoFit/>
-            </a:bodyPr>
-            <a:lstStyle/>
-            <a:p>
-              <a:pPr marL="0" marR="0" lvl="0" indent="0" algn="l" rtl="0">
-                <a:lnSpc>
-                  <a:spcPct val="150000"/>
-                </a:lnSpc>
-                <a:spcBef>
-                  <a:spcPts val="0"/>
-                </a:spcBef>
-                <a:spcAft>
-                  <a:spcPts val="0"/>
-                </a:spcAft>
-                <a:buNone/>
-              </a:pPr>
-              <a:r>
-                <a:rPr lang="en-US" sz="1650" b="0" i="0" u="none" strike="noStrike" cap="none" dirty="0">
-                  <a:solidFill>
-                    <a:srgbClr val="FFFFFF"/>
-                  </a:solidFill>
-                  <a:latin typeface="Poppins Light"/>
-                  <a:ea typeface="Poppins Light"/>
-                  <a:cs typeface="Poppins Light"/>
-                  <a:sym typeface="Poppins Light"/>
-                </a:rPr>
-                <a:t>Real-time deepfake-voice detector for UPI / voice-banking calls</a:t>
-              </a:r>
-              <a:endParaRPr dirty="0"/>
-            </a:p>
-          </p:txBody>
-        </p:sp>
-        <p:pic>
-          <p:nvPicPr>
-            <p:cNvPr id="106" name="Google Shape;106;p14" descr="image.png"/>
-            <p:cNvPicPr preferRelativeResize="0"/>
-            <p:nvPr/>
-          </p:nvPicPr>
-          <p:blipFill rotWithShape="1">
-            <a:blip r:embed="rId5">
-              <a:alphaModFix/>
-            </a:blip>
-            <a:srcRect/>
-            <a:stretch/>
-          </p:blipFill>
-          <p:spPr>
-            <a:xfrm>
-              <a:off x="571500" y="3686175"/>
-              <a:ext cx="200025" cy="247650"/>
-            </a:xfrm>
-            <a:prstGeom prst="rect">
-              <a:avLst/>
-            </a:prstGeom>
-            <a:noFill/>
-            <a:ln>
-              <a:noFill/>
-            </a:ln>
-          </p:spPr>
-        </p:pic>
-      </p:grpSp>
-      <p:grpSp>
-        <p:nvGrpSpPr>
-          <p:cNvPr id="5" name="Group 4">
-            <a:extLst>
-              <a:ext uri="{FF2B5EF4-FFF2-40B4-BE49-F238E27FC236}">
-                <a16:creationId xmlns:a16="http://schemas.microsoft.com/office/drawing/2014/main" id="{776B38BC-4A69-5F43-A0F5-137CD55E4FA8}"/>
-              </a:ext>
-            </a:extLst>
-          </p:cNvPr>
-          <p:cNvGrpSpPr/>
-          <p:nvPr/>
-        </p:nvGrpSpPr>
-        <p:grpSpPr>
-          <a:xfrm>
-            <a:off x="571500" y="3741263"/>
-            <a:ext cx="5238750" cy="314325"/>
-            <a:chOff x="571500" y="4210050"/>
-            <a:chExt cx="5238750" cy="314325"/>
-          </a:xfrm>
-        </p:grpSpPr>
-        <p:sp>
-          <p:nvSpPr>
-            <p:cNvPr id="102" name="Google Shape;102;p14"/>
-            <p:cNvSpPr txBox="1"/>
-            <p:nvPr/>
-          </p:nvSpPr>
-          <p:spPr>
-            <a:xfrm>
-              <a:off x="1000125" y="4210050"/>
-              <a:ext cx="4810125" cy="314325"/>
-            </a:xfrm>
-            <a:prstGeom prst="rect">
-              <a:avLst/>
-            </a:prstGeom>
-            <a:noFill/>
-            <a:ln>
-              <a:noFill/>
-            </a:ln>
-          </p:spPr>
-          <p:txBody>
-            <a:bodyPr spcFirstLastPara="1" wrap="square" lIns="0" tIns="0" rIns="0" bIns="0" anchor="t" anchorCtr="0">
-              <a:spAutoFit/>
-            </a:bodyPr>
-            <a:lstStyle/>
-            <a:p>
-              <a:pPr marL="0" marR="0" lvl="0" indent="0" algn="l" rtl="0">
-                <a:lnSpc>
-                  <a:spcPct val="150000"/>
-                </a:lnSpc>
-                <a:spcBef>
-                  <a:spcPts val="0"/>
-                </a:spcBef>
-                <a:spcAft>
-                  <a:spcPts val="0"/>
-                </a:spcAft>
-                <a:buNone/>
-              </a:pPr>
-              <a:r>
-                <a:rPr lang="en-US" sz="1650" b="0" i="0" u="none" strike="noStrike" cap="none" dirty="0">
-                  <a:solidFill>
-                    <a:srgbClr val="FFFFFF"/>
-                  </a:solidFill>
-                  <a:latin typeface="Poppins Light"/>
-                  <a:ea typeface="Poppins Light"/>
-                  <a:cs typeface="Poppins Light"/>
-                  <a:sym typeface="Poppins Light"/>
-                </a:rPr>
-                <a:t>Spoof score 0–1 + pass/fail verdict in &lt;500 ms</a:t>
-              </a:r>
-              <a:endParaRPr dirty="0"/>
-            </a:p>
-          </p:txBody>
-        </p:sp>
-        <p:pic>
-          <p:nvPicPr>
-            <p:cNvPr id="107" name="Google Shape;107;p14" descr="image.png"/>
-            <p:cNvPicPr preferRelativeResize="0"/>
-            <p:nvPr/>
-          </p:nvPicPr>
-          <p:blipFill rotWithShape="1">
-            <a:blip r:embed="rId5">
-              <a:alphaModFix/>
-            </a:blip>
-            <a:srcRect/>
-            <a:stretch/>
-          </p:blipFill>
-          <p:spPr>
-            <a:xfrm>
-              <a:off x="571500" y="4238625"/>
-              <a:ext cx="200025" cy="247650"/>
-            </a:xfrm>
-            <a:prstGeom prst="rect">
-              <a:avLst/>
-            </a:prstGeom>
-            <a:noFill/>
-            <a:ln>
-              <a:noFill/>
-            </a:ln>
-          </p:spPr>
-        </p:pic>
-      </p:grpSp>
-      <p:grpSp>
-        <p:nvGrpSpPr>
-          <p:cNvPr id="6" name="Group 5">
-            <a:extLst>
-              <a:ext uri="{FF2B5EF4-FFF2-40B4-BE49-F238E27FC236}">
-                <a16:creationId xmlns:a16="http://schemas.microsoft.com/office/drawing/2014/main" id="{CF6956BC-D0DD-126D-0DC6-421091A25E5A}"/>
-              </a:ext>
-            </a:extLst>
-          </p:cNvPr>
-          <p:cNvGrpSpPr/>
-          <p:nvPr/>
-        </p:nvGrpSpPr>
-        <p:grpSpPr>
-          <a:xfrm>
-            <a:off x="571500" y="4293713"/>
-            <a:ext cx="5238750" cy="314325"/>
-            <a:chOff x="571500" y="4762500"/>
-            <a:chExt cx="5238750" cy="314325"/>
-          </a:xfrm>
-        </p:grpSpPr>
-        <p:sp>
-          <p:nvSpPr>
-            <p:cNvPr id="103" name="Google Shape;103;p14"/>
-            <p:cNvSpPr txBox="1"/>
-            <p:nvPr/>
-          </p:nvSpPr>
-          <p:spPr>
-            <a:xfrm>
-              <a:off x="1000125" y="4762500"/>
-              <a:ext cx="4810125" cy="314325"/>
-            </a:xfrm>
-            <a:prstGeom prst="rect">
-              <a:avLst/>
-            </a:prstGeom>
-            <a:noFill/>
-            <a:ln>
-              <a:noFill/>
-            </a:ln>
-          </p:spPr>
-          <p:txBody>
-            <a:bodyPr spcFirstLastPara="1" wrap="square" lIns="0" tIns="0" rIns="0" bIns="0" anchor="t" anchorCtr="0">
-              <a:spAutoFit/>
-            </a:bodyPr>
-            <a:lstStyle/>
-            <a:p>
-              <a:pPr marL="0" marR="0" lvl="0" indent="0" algn="l" rtl="0">
-                <a:lnSpc>
-                  <a:spcPct val="150000"/>
-                </a:lnSpc>
-                <a:spcBef>
-                  <a:spcPts val="0"/>
-                </a:spcBef>
-                <a:spcAft>
-                  <a:spcPts val="0"/>
-                </a:spcAft>
-                <a:buNone/>
-              </a:pPr>
-              <a:r>
-                <a:rPr lang="en-US" sz="1650" b="0" i="0" u="none" strike="noStrike" cap="none" dirty="0">
-                  <a:solidFill>
-                    <a:srgbClr val="FFFFFF"/>
-                  </a:solidFill>
-                  <a:latin typeface="Poppins Light"/>
-                  <a:ea typeface="Poppins Light"/>
-                  <a:cs typeface="Poppins Light"/>
-                  <a:sym typeface="Poppins Light"/>
-                </a:rPr>
-                <a:t>India-first: Hindi data, UPI flow, RBI-aligned</a:t>
-              </a:r>
-              <a:endParaRPr dirty="0"/>
-            </a:p>
-          </p:txBody>
-        </p:sp>
-        <p:pic>
-          <p:nvPicPr>
-            <p:cNvPr id="108" name="Google Shape;108;p14" descr="image.png"/>
-            <p:cNvPicPr preferRelativeResize="0"/>
-            <p:nvPr/>
-          </p:nvPicPr>
-          <p:blipFill rotWithShape="1">
-            <a:blip r:embed="rId5">
-              <a:alphaModFix/>
-            </a:blip>
-            <a:srcRect/>
-            <a:stretch/>
-          </p:blipFill>
-          <p:spPr>
-            <a:xfrm>
-              <a:off x="571500" y="4791075"/>
-              <a:ext cx="200025" cy="247650"/>
-            </a:xfrm>
-            <a:prstGeom prst="rect">
-              <a:avLst/>
-            </a:prstGeom>
-            <a:noFill/>
-            <a:ln>
-              <a:noFill/>
-            </a:ln>
-          </p:spPr>
-        </p:pic>
-      </p:grpSp>
-      <p:sp>
-        <p:nvSpPr>
-          <p:cNvPr id="109" name="Google Shape;109;p14"/>
-          <p:cNvSpPr txBox="1"/>
-          <p:nvPr/>
-        </p:nvSpPr>
-        <p:spPr>
-          <a:xfrm>
-            <a:off x="571500" y="571500"/>
-            <a:ext cx="11601450" cy="628650"/>
-          </a:xfrm>
-          <a:prstGeom prst="rect">
-            <a:avLst/>
-          </a:prstGeom>
-          <a:noFill/>
-          <a:ln>
-            <a:noFill/>
-          </a:ln>
-        </p:spPr>
-        <p:txBody>
-          <a:bodyPr spcFirstLastPara="1" wrap="square" lIns="0" tIns="0" rIns="0" bIns="0" anchor="t" anchorCtr="0">
-            <a:spAutoFit/>
-          </a:bodyPr>
-          <a:lstStyle/>
-          <a:p>
-            <a:pPr marL="0" marR="0" lvl="0" indent="0" algn="l" rtl="0">
-              <a:spcBef>
-                <a:spcPts val="0"/>
-              </a:spcBef>
-              <a:spcAft>
-                <a:spcPts val="0"/>
-              </a:spcAft>
-              <a:buNone/>
-            </a:pPr>
-            <a:r>
-              <a:rPr lang="en-US" sz="3600" b="1" i="0" u="none" strike="noStrike" cap="none" dirty="0">
-                <a:solidFill>
-                  <a:srgbClr val="F2EEFA"/>
-                </a:solidFill>
-                <a:latin typeface="Playfair Display"/>
-                <a:ea typeface="Playfair Display"/>
-                <a:cs typeface="Playfair Display"/>
-                <a:sym typeface="Playfair Display"/>
-              </a:rPr>
-              <a:t>ELDERSHIELD — SPOOF-SCORE EVERY VOICE, BEFORE THE PAYMENT</a:t>
-            </a:r>
-            <a:endParaRPr dirty="0"/>
-          </a:p>
-        </p:txBody>
-      </p:sp>
-      <p:sp>
-        <p:nvSpPr>
-          <p:cNvPr id="110" name="Google Shape;110;p14"/>
-          <p:cNvSpPr/>
-          <p:nvPr/>
-        </p:nvSpPr>
-        <p:spPr>
-          <a:xfrm>
-            <a:off x="571500" y="1323975"/>
-            <a:ext cx="11049000" cy="19050"/>
-          </a:xfrm>
-          <a:prstGeom prst="rect">
-            <a:avLst/>
-          </a:prstGeom>
-          <a:solidFill>
-            <a:srgbClr val="D4AF37"/>
-          </a:solidFill>
-          <a:ln>
-            <a:noFill/>
-          </a:ln>
-        </p:spPr>
-        <p:txBody>
-          <a:bodyPr spcFirstLastPara="1" wrap="square" lIns="91425" tIns="45700" rIns="91425" bIns="45700" anchor="ctr" anchorCtr="0">
-            <a:noAutofit/>
-          </a:bodyPr>
-          <a:lstStyle/>
-          <a:p>
-            <a:pPr marL="0" marR="0" lvl="0" indent="0" algn="ctr" rtl="0">
-              <a:spcBef>
-                <a:spcPts val="0"/>
-              </a:spcBef>
-              <a:spcAft>
-                <a:spcPts val="0"/>
-              </a:spcAft>
-              <a:buNone/>
-            </a:pPr>
-            <a:endParaRPr sz="1800" b="0" i="0" u="none" strike="noStrike" cap="none" dirty="0">
-              <a:solidFill>
-                <a:schemeClr val="dk1"/>
-              </a:solidFill>
-              <a:latin typeface="Calibri"/>
-              <a:ea typeface="Calibri"/>
-              <a:cs typeface="Calibri"/>
-              <a:sym typeface="Calibri"/>
-            </a:endParaRPr>
-          </a:p>
-        </p:txBody>
-      </p:sp>
-      <p:sp>
-        <p:nvSpPr>
-          <p:cNvPr id="111" name="Google Shape;111;p14"/>
-          <p:cNvSpPr txBox="1"/>
-          <p:nvPr/>
-        </p:nvSpPr>
-        <p:spPr>
-          <a:xfrm>
-            <a:off x="11706225" y="6467475"/>
-            <a:ext cx="200025" cy="161583"/>
-          </a:xfrm>
-          <a:prstGeom prst="rect">
-            <a:avLst/>
-          </a:prstGeom>
-          <a:noFill/>
-          <a:ln>
-            <a:noFill/>
-          </a:ln>
-        </p:spPr>
-        <p:txBody>
-          <a:bodyPr spcFirstLastPara="1" wrap="square" lIns="0" tIns="0" rIns="0" bIns="0" anchor="t" anchorCtr="0">
-            <a:spAutoFit/>
-          </a:bodyPr>
-          <a:lstStyle/>
-          <a:p>
-            <a:pPr marL="0" marR="0" lvl="0" indent="0" algn="l" rtl="0">
-              <a:spcBef>
-                <a:spcPts val="0"/>
-              </a:spcBef>
-              <a:spcAft>
-                <a:spcPts val="0"/>
-              </a:spcAft>
-              <a:buNone/>
-            </a:pPr>
-            <a:r>
-              <a:rPr lang="en-US" sz="1050" b="0" i="0" u="none" strike="noStrike" cap="none" dirty="0">
-                <a:solidFill>
-                  <a:srgbClr val="FFFFFF"/>
-                </a:solidFill>
-                <a:latin typeface="Poppins"/>
-                <a:ea typeface="Poppins"/>
-                <a:cs typeface="Poppins"/>
-                <a:sym typeface="Poppins"/>
-              </a:rPr>
-              <a:t>02</a:t>
-            </a:r>
-            <a:endParaRPr dirty="0"/>
-          </a:p>
-        </p:txBody>
-      </p:sp>
-      <p:pic>
-        <p:nvPicPr>
-          <p:cNvPr id="7" name="Picture 6">
-            <a:extLst>
-              <a:ext uri="{FF2B5EF4-FFF2-40B4-BE49-F238E27FC236}">
-                <a16:creationId xmlns:a16="http://schemas.microsoft.com/office/drawing/2014/main" id="{81D6A019-74ED-9001-54F2-BCA9F7EF5C85}"/>
-              </a:ext>
-            </a:extLst>
-          </p:cNvPr>
-          <p:cNvPicPr>
-            <a:picLocks noChangeAspect="1"/>
-          </p:cNvPicPr>
-          <p:nvPr/>
-        </p:nvPicPr>
-        <p:blipFill>
-          <a:blip r:embed="rId6"/>
-          <a:stretch>
-            <a:fillRect/>
-          </a:stretch>
-        </p:blipFill>
-        <p:spPr>
-          <a:xfrm>
-            <a:off x="9361386" y="134593"/>
-            <a:ext cx="2259114" cy="1169718"/>
-          </a:xfrm>
-          <a:prstGeom prst="rect">
-            <a:avLst/>
-          </a:prstGeom>
-        </p:spPr>
-      </p:pic>
-    </p:spTree>
-  </p:cSld>
-  <p:clrMapOvr>
-    <a:masterClrMapping/>
-  </p:clrMapOvr>
-</p:sld>
-</file>
-
-<file path=ppt/slides/slide3.xml><?xml version="1.0" encoding="utf-8"?>
-<p:sld xmlns:a="http://schemas.openxmlformats.org/drawingml/2006/main" xmlns:r="http://schemas.openxmlformats.org/officeDocument/2006/relationships" xmlns:p="http://schemas.openxmlformats.org/presentationml/2006/main">
-  <p:cSld>
-    <p:spTree>
-      <p:nvGrpSpPr>
-        <p:cNvPr id="1" name="Shape 115"/>
-        <p:cNvGrpSpPr/>
-        <p:nvPr/>
-      </p:nvGrpSpPr>
-      <p:grpSpPr>
-        <a:xfrm>
-          <a:off x="0" y="0"/>
-          <a:ext cx="0" cy="0"/>
-          <a:chOff x="0" y="0"/>
-          <a:chExt cx="0" cy="0"/>
-        </a:xfrm>
-      </p:grpSpPr>
-      <p:grpSp>
-        <p:nvGrpSpPr>
-          <p:cNvPr id="4" name="Group 3">
-            <a:extLst>
-              <a:ext uri="{FF2B5EF4-FFF2-40B4-BE49-F238E27FC236}">
-                <a16:creationId xmlns:a16="http://schemas.microsoft.com/office/drawing/2014/main" id="{EB18FF61-1857-DD5F-D4B4-32B1030BFE8C}"/>
-              </a:ext>
-            </a:extLst>
-          </p:cNvPr>
-          <p:cNvGrpSpPr/>
-          <p:nvPr/>
-        </p:nvGrpSpPr>
-        <p:grpSpPr>
-          <a:xfrm>
-            <a:off x="-132734" y="-74663"/>
-            <a:ext cx="12457469" cy="7007326"/>
-            <a:chOff x="-157315" y="-88489"/>
-            <a:chExt cx="12457469" cy="7007326"/>
-          </a:xfrm>
-        </p:grpSpPr>
-        <p:pic>
-          <p:nvPicPr>
-            <p:cNvPr id="2" name="Google Shape;84;p13" descr="image.png">
-              <a:extLst>
-                <a:ext uri="{FF2B5EF4-FFF2-40B4-BE49-F238E27FC236}">
-                  <a16:creationId xmlns:a16="http://schemas.microsoft.com/office/drawing/2014/main" id="{1AED31AE-ABCF-23A6-5C8B-83D0AC31EAEC}"/>
-                </a:ext>
-              </a:extLst>
-            </p:cNvPr>
-            <p:cNvPicPr preferRelativeResize="0"/>
-            <p:nvPr/>
-          </p:nvPicPr>
-          <p:blipFill rotWithShape="1">
-            <a:blip r:embed="rId3">
-              <a:alphaModFix/>
-            </a:blip>
-            <a:srcRect/>
-            <a:stretch/>
-          </p:blipFill>
-          <p:spPr>
-            <a:xfrm>
-              <a:off x="-157315" y="-88489"/>
-              <a:ext cx="12457469" cy="7007326"/>
-            </a:xfrm>
-            <a:prstGeom prst="rect">
-              <a:avLst/>
-            </a:prstGeom>
-            <a:noFill/>
-            <a:ln>
-              <a:noFill/>
-            </a:ln>
-          </p:spPr>
-        </p:pic>
-        <p:pic>
-          <p:nvPicPr>
-            <p:cNvPr id="3" name="Google Shape;98;p14" descr="image.png">
-              <a:extLst>
-                <a:ext uri="{FF2B5EF4-FFF2-40B4-BE49-F238E27FC236}">
-                  <a16:creationId xmlns:a16="http://schemas.microsoft.com/office/drawing/2014/main" id="{1F32D93C-7343-8AF4-F453-702DCD511F75}"/>
-                </a:ext>
-              </a:extLst>
-            </p:cNvPr>
-            <p:cNvPicPr preferRelativeResize="0"/>
-            <p:nvPr/>
-          </p:nvPicPr>
-          <p:blipFill rotWithShape="1">
-            <a:blip r:embed="rId4">
-              <a:alphaModFix amt="50000"/>
-            </a:blip>
-            <a:srcRect/>
-            <a:stretch/>
-          </p:blipFill>
-          <p:spPr>
-            <a:xfrm>
-              <a:off x="0" y="0"/>
-              <a:ext cx="12192000" cy="6858000"/>
-            </a:xfrm>
-            <a:prstGeom prst="rect">
-              <a:avLst/>
-            </a:prstGeom>
-            <a:noFill/>
-            <a:ln>
-              <a:noFill/>
-            </a:ln>
-          </p:spPr>
-        </p:pic>
-      </p:grpSp>
-      <p:pic>
-        <p:nvPicPr>
-          <p:cNvPr id="117" name="Google Shape;117;p15" descr="image.png"/>
-          <p:cNvPicPr preferRelativeResize="0"/>
-          <p:nvPr/>
-        </p:nvPicPr>
-        <p:blipFill rotWithShape="1">
-          <a:blip r:embed="rId5">
-            <a:alphaModFix/>
-          </a:blip>
-          <a:srcRect/>
-          <a:stretch/>
-        </p:blipFill>
-        <p:spPr>
-          <a:xfrm>
-            <a:off x="571500" y="3086100"/>
-            <a:ext cx="5238750" cy="1933575"/>
-          </a:xfrm>
-          <a:prstGeom prst="rect">
-            <a:avLst/>
-          </a:prstGeom>
-          <a:noFill/>
-          <a:ln>
-            <a:noFill/>
-          </a:ln>
-        </p:spPr>
-      </p:pic>
-      <p:pic>
-        <p:nvPicPr>
-          <p:cNvPr id="118" name="Google Shape;118;p15" descr="image.png"/>
-          <p:cNvPicPr preferRelativeResize="0"/>
-          <p:nvPr/>
-        </p:nvPicPr>
-        <p:blipFill rotWithShape="1">
-          <a:blip r:embed="rId5">
-            <a:alphaModFix/>
-          </a:blip>
-          <a:srcRect/>
-          <a:stretch/>
-        </p:blipFill>
-        <p:spPr>
-          <a:xfrm>
-            <a:off x="6381750" y="3086100"/>
-            <a:ext cx="5238750" cy="1933575"/>
-          </a:xfrm>
-          <a:prstGeom prst="rect">
-            <a:avLst/>
-          </a:prstGeom>
-          <a:noFill/>
-          <a:ln>
-            <a:noFill/>
-          </a:ln>
-        </p:spPr>
-      </p:pic>
-      <p:sp>
-        <p:nvSpPr>
-          <p:cNvPr id="119" name="Google Shape;119;p15"/>
-          <p:cNvSpPr txBox="1"/>
-          <p:nvPr/>
-        </p:nvSpPr>
-        <p:spPr>
-          <a:xfrm>
-            <a:off x="850582" y="3476625"/>
-            <a:ext cx="4680585" cy="352425"/>
-          </a:xfrm>
-          <a:prstGeom prst="rect">
-            <a:avLst/>
-          </a:prstGeom>
-          <a:noFill/>
-          <a:ln>
-            <a:noFill/>
-          </a:ln>
-        </p:spPr>
-        <p:txBody>
-          <a:bodyPr spcFirstLastPara="1" wrap="square" lIns="0" tIns="0" rIns="0" bIns="0" anchor="t" anchorCtr="0">
-            <a:spAutoFit/>
-          </a:bodyPr>
-          <a:lstStyle/>
-          <a:p>
-            <a:pPr marL="0" marR="0" lvl="0" indent="0" algn="ctr" rtl="0">
-              <a:spcBef>
-                <a:spcPts val="0"/>
-              </a:spcBef>
-              <a:spcAft>
-                <a:spcPts val="0"/>
-              </a:spcAft>
-              <a:buNone/>
-            </a:pPr>
-            <a:r>
-              <a:rPr lang="en-US" sz="2100" b="1" i="0" u="none" strike="noStrike" cap="none" dirty="0">
-                <a:solidFill>
-                  <a:srgbClr val="F2EEFA"/>
-                </a:solidFill>
-                <a:latin typeface="Playfair Display"/>
-                <a:ea typeface="Playfair Display"/>
-                <a:cs typeface="Playfair Display"/>
-                <a:sym typeface="Playfair Display"/>
-              </a:rPr>
-              <a:t>Technologies</a:t>
-            </a:r>
-            <a:endParaRPr dirty="0"/>
-          </a:p>
-        </p:txBody>
-      </p:sp>
-      <p:sp>
-        <p:nvSpPr>
-          <p:cNvPr id="120" name="Google Shape;120;p15"/>
-          <p:cNvSpPr txBox="1"/>
-          <p:nvPr/>
-        </p:nvSpPr>
-        <p:spPr>
-          <a:xfrm>
-            <a:off x="962025" y="4019550"/>
-            <a:ext cx="4457700" cy="609600"/>
-          </a:xfrm>
-          <a:prstGeom prst="rect">
-            <a:avLst/>
-          </a:prstGeom>
-          <a:noFill/>
-          <a:ln>
-            <a:noFill/>
-          </a:ln>
-        </p:spPr>
-        <p:txBody>
-          <a:bodyPr spcFirstLastPara="1" wrap="square" lIns="0" tIns="0" rIns="0" bIns="0" anchor="t" anchorCtr="0">
-            <a:spAutoFit/>
-          </a:bodyPr>
-          <a:lstStyle/>
-          <a:p>
-            <a:pPr marL="0" marR="0" lvl="0" indent="0" algn="ctr" rtl="0">
-              <a:lnSpc>
-                <a:spcPct val="160000"/>
-              </a:lnSpc>
-              <a:spcBef>
-                <a:spcPts val="0"/>
-              </a:spcBef>
-              <a:spcAft>
-                <a:spcPts val="0"/>
-              </a:spcAft>
-              <a:buNone/>
-            </a:pPr>
-            <a:r>
-              <a:rPr lang="en-US" sz="1500" b="0" i="0" u="none" strike="noStrike" cap="none" dirty="0">
-                <a:solidFill>
-                  <a:srgbClr val="F2EEFA"/>
-                </a:solidFill>
-                <a:latin typeface="Poppins Light"/>
-                <a:ea typeface="Poppins Light"/>
-                <a:cs typeface="Poppins Light"/>
-                <a:sym typeface="Poppins Light"/>
-              </a:rPr>
-              <a:t>Python · PyTorch · RawNet3/AASIST · Flask API</a:t>
-            </a:r>
-            <a:endParaRPr dirty="0"/>
-          </a:p>
-        </p:txBody>
-      </p:sp>
-      <p:sp>
-        <p:nvSpPr>
-          <p:cNvPr id="121" name="Google Shape;121;p15"/>
-          <p:cNvSpPr txBox="1"/>
-          <p:nvPr/>
-        </p:nvSpPr>
-        <p:spPr>
-          <a:xfrm>
-            <a:off x="6660832" y="3476625"/>
-            <a:ext cx="4680585" cy="352425"/>
-          </a:xfrm>
-          <a:prstGeom prst="rect">
-            <a:avLst/>
-          </a:prstGeom>
-          <a:noFill/>
-          <a:ln>
-            <a:noFill/>
-          </a:ln>
-        </p:spPr>
-        <p:txBody>
-          <a:bodyPr spcFirstLastPara="1" wrap="square" lIns="0" tIns="0" rIns="0" bIns="0" anchor="t" anchorCtr="0">
-            <a:spAutoFit/>
-          </a:bodyPr>
-          <a:lstStyle/>
-          <a:p>
-            <a:pPr marL="0" marR="0" lvl="0" indent="0" algn="ctr" rtl="0">
-              <a:spcBef>
-                <a:spcPts val="0"/>
-              </a:spcBef>
-              <a:spcAft>
-                <a:spcPts val="0"/>
-              </a:spcAft>
-              <a:buNone/>
-            </a:pPr>
-            <a:r>
-              <a:rPr lang="en-US" sz="2100" b="1" i="0" u="none" strike="noStrike" cap="none" dirty="0">
-                <a:solidFill>
-                  <a:srgbClr val="F2EEFA"/>
-                </a:solidFill>
-                <a:latin typeface="Playfair Display"/>
-                <a:ea typeface="Playfair Display"/>
-                <a:cs typeface="Playfair Display"/>
-                <a:sym typeface="Playfair Display"/>
-              </a:rPr>
-              <a:t>Methodology</a:t>
-            </a:r>
-            <a:endParaRPr dirty="0"/>
-          </a:p>
-        </p:txBody>
-      </p:sp>
-      <p:sp>
-        <p:nvSpPr>
-          <p:cNvPr id="122" name="Google Shape;122;p15"/>
-          <p:cNvSpPr txBox="1"/>
-          <p:nvPr/>
-        </p:nvSpPr>
-        <p:spPr>
-          <a:xfrm>
-            <a:off x="6772275" y="4019550"/>
-            <a:ext cx="4457700" cy="609600"/>
-          </a:xfrm>
-          <a:prstGeom prst="rect">
-            <a:avLst/>
-          </a:prstGeom>
-          <a:noFill/>
-          <a:ln>
-            <a:noFill/>
-          </a:ln>
-        </p:spPr>
-        <p:txBody>
-          <a:bodyPr spcFirstLastPara="1" wrap="square" lIns="0" tIns="0" rIns="0" bIns="0" anchor="t" anchorCtr="0">
-            <a:spAutoFit/>
-          </a:bodyPr>
-          <a:lstStyle/>
-          <a:p>
-            <a:pPr marL="0" marR="0" lvl="0" indent="0" algn="ctr" rtl="0">
-              <a:lnSpc>
-                <a:spcPct val="160000"/>
-              </a:lnSpc>
-              <a:spcBef>
-                <a:spcPts val="0"/>
-              </a:spcBef>
-              <a:spcAft>
-                <a:spcPts val="0"/>
-              </a:spcAft>
-              <a:buNone/>
-            </a:pPr>
-            <a:r>
-              <a:rPr lang="en-US" sz="1500" b="0" i="0" u="none" strike="noStrike" cap="none" dirty="0">
-                <a:solidFill>
-                  <a:srgbClr val="F2EEFA"/>
-                </a:solidFill>
-                <a:latin typeface="Poppins Light"/>
-                <a:ea typeface="Poppins Light"/>
-                <a:cs typeface="Poppins Light"/>
-                <a:sym typeface="Poppins Light"/>
-              </a:rPr>
-              <a:t>Methodology and process for implementation (Flow Charts / Images / Working Prototype)</a:t>
-            </a:r>
-            <a:endParaRPr dirty="0"/>
-          </a:p>
-        </p:txBody>
-      </p:sp>
-      <p:sp>
-        <p:nvSpPr>
-          <p:cNvPr id="123" name="Google Shape;123;p15"/>
-          <p:cNvSpPr txBox="1"/>
-          <p:nvPr/>
-        </p:nvSpPr>
-        <p:spPr>
-          <a:xfrm>
-            <a:off x="571500" y="571500"/>
-            <a:ext cx="11601450" cy="628650"/>
-          </a:xfrm>
-          <a:prstGeom prst="rect">
-            <a:avLst/>
-          </a:prstGeom>
-          <a:noFill/>
-          <a:ln>
-            <a:noFill/>
-          </a:ln>
-        </p:spPr>
-        <p:txBody>
-          <a:bodyPr spcFirstLastPara="1" wrap="square" lIns="0" tIns="0" rIns="0" bIns="0" anchor="t" anchorCtr="0">
-            <a:spAutoFit/>
-          </a:bodyPr>
-          <a:lstStyle/>
-          <a:p>
-            <a:pPr marL="0" marR="0" lvl="0" indent="0" algn="l" rtl="0">
-              <a:spcBef>
-                <a:spcPts val="0"/>
-              </a:spcBef>
-              <a:spcAft>
-                <a:spcPts val="0"/>
-              </a:spcAft>
-              <a:buNone/>
-            </a:pPr>
-            <a:r>
-              <a:rPr lang="en-US" sz="3600" b="1" i="0" u="none" strike="noStrike" cap="none" dirty="0">
-                <a:solidFill>
-                  <a:srgbClr val="F2EEFA"/>
-                </a:solidFill>
-                <a:latin typeface="Playfair Display"/>
-                <a:ea typeface="Playfair Display"/>
-                <a:cs typeface="Playfair Display"/>
-                <a:sym typeface="Playfair Display"/>
-              </a:rPr>
-              <a:t>TECHNICAL APPROACH</a:t>
-            </a:r>
-            <a:endParaRPr dirty="0"/>
-          </a:p>
-        </p:txBody>
-      </p:sp>
-      <p:sp>
-        <p:nvSpPr>
-          <p:cNvPr id="124" name="Google Shape;124;p15"/>
-          <p:cNvSpPr/>
-          <p:nvPr/>
-        </p:nvSpPr>
-        <p:spPr>
-          <a:xfrm>
-            <a:off x="571500" y="1323975"/>
-            <a:ext cx="11049000" cy="19050"/>
-          </a:xfrm>
-          <a:prstGeom prst="rect">
-            <a:avLst/>
-          </a:prstGeom>
-          <a:solidFill>
-            <a:srgbClr val="D4AF37"/>
-          </a:solidFill>
-          <a:ln>
-            <a:noFill/>
-          </a:ln>
-        </p:spPr>
-        <p:txBody>
-          <a:bodyPr spcFirstLastPara="1" wrap="square" lIns="91425" tIns="45700" rIns="91425" bIns="45700" anchor="ctr" anchorCtr="0">
-            <a:noAutofit/>
-          </a:bodyPr>
-          <a:lstStyle/>
-          <a:p>
-            <a:pPr marL="0" marR="0" lvl="0" indent="0" algn="ctr" rtl="0">
-              <a:spcBef>
-                <a:spcPts val="0"/>
-              </a:spcBef>
-              <a:spcAft>
-                <a:spcPts val="0"/>
-              </a:spcAft>
-              <a:buNone/>
-            </a:pPr>
-            <a:endParaRPr sz="1800" b="0" i="0" u="none" strike="noStrike" cap="none" dirty="0">
-              <a:solidFill>
-                <a:schemeClr val="dk1"/>
-              </a:solidFill>
-              <a:latin typeface="Calibri"/>
-              <a:ea typeface="Calibri"/>
-              <a:cs typeface="Calibri"/>
-              <a:sym typeface="Calibri"/>
-            </a:endParaRPr>
-          </a:p>
-        </p:txBody>
-      </p:sp>
-      <p:sp>
-        <p:nvSpPr>
-          <p:cNvPr id="125" name="Google Shape;125;p15"/>
-          <p:cNvSpPr txBox="1"/>
-          <p:nvPr/>
-        </p:nvSpPr>
-        <p:spPr>
-          <a:xfrm>
-            <a:off x="11706225" y="6467475"/>
-            <a:ext cx="200025" cy="161583"/>
-          </a:xfrm>
-          <a:prstGeom prst="rect">
-            <a:avLst/>
-          </a:prstGeom>
-          <a:noFill/>
-          <a:ln>
-            <a:noFill/>
-          </a:ln>
-        </p:spPr>
-        <p:txBody>
-          <a:bodyPr spcFirstLastPara="1" wrap="square" lIns="0" tIns="0" rIns="0" bIns="0" anchor="t" anchorCtr="0">
-            <a:spAutoFit/>
-          </a:bodyPr>
-          <a:lstStyle/>
-          <a:p>
-            <a:pPr marL="0" marR="0" lvl="0" indent="0" algn="l" rtl="0">
-              <a:spcBef>
-                <a:spcPts val="0"/>
-              </a:spcBef>
-              <a:spcAft>
-                <a:spcPts val="0"/>
-              </a:spcAft>
-              <a:buNone/>
-            </a:pPr>
-            <a:r>
-              <a:rPr lang="en-US" sz="1050" b="0" i="0" u="none" strike="noStrike" cap="none" dirty="0">
-                <a:solidFill>
-                  <a:srgbClr val="FFFFFF"/>
-                </a:solidFill>
-                <a:latin typeface="Poppins"/>
-                <a:ea typeface="Poppins"/>
-                <a:cs typeface="Poppins"/>
-                <a:sym typeface="Poppins"/>
-              </a:rPr>
-              <a:t>03</a:t>
-            </a:r>
-            <a:endParaRPr dirty="0"/>
-          </a:p>
-        </p:txBody>
-      </p:sp>
-      <p:pic>
-        <p:nvPicPr>
-          <p:cNvPr id="5" name="Picture 4">
-            <a:extLst>
-              <a:ext uri="{FF2B5EF4-FFF2-40B4-BE49-F238E27FC236}">
-                <a16:creationId xmlns:a16="http://schemas.microsoft.com/office/drawing/2014/main" id="{1F4E2B5A-0D8D-0AB1-E15B-5102336B7597}"/>
-              </a:ext>
-            </a:extLst>
-          </p:cNvPr>
-          <p:cNvPicPr>
-            <a:picLocks noChangeAspect="1"/>
-          </p:cNvPicPr>
-          <p:nvPr/>
-        </p:nvPicPr>
-        <p:blipFill>
-          <a:blip r:embed="rId6"/>
-          <a:stretch>
-            <a:fillRect/>
-          </a:stretch>
-        </p:blipFill>
-        <p:spPr>
-          <a:xfrm>
-            <a:off x="9361386" y="134593"/>
-            <a:ext cx="2259114" cy="1169718"/>
-          </a:xfrm>
-          <a:prstGeom prst="rect">
-            <a:avLst/>
-          </a:prstGeom>
-        </p:spPr>
-      </p:pic>
-    </p:spTree>
-  </p:cSld>
-  <p:clrMapOvr>
-    <a:masterClrMapping/>
-  </p:clrMapOvr>
-</p:sld>
-</file>
-
-<file path=ppt/slides/slide4.xml><?xml version="1.0" encoding="utf-8"?>
-<p:sld xmlns:a="http://schemas.openxmlformats.org/drawingml/2006/main" xmlns:r="http://schemas.openxmlformats.org/officeDocument/2006/relationships" xmlns:p="http://schemas.openxmlformats.org/presentationml/2006/main">
-  <p:cSld>
-    <p:spTree>
-      <p:nvGrpSpPr>
-        <p:cNvPr id="1" name="Shape 129"/>
-        <p:cNvGrpSpPr/>
-        <p:nvPr/>
-      </p:nvGrpSpPr>
-      <p:grpSpPr>
-        <a:xfrm>
-          <a:off x="0" y="0"/>
-          <a:ext cx="0" cy="0"/>
-          <a:chOff x="0" y="0"/>
-          <a:chExt cx="0" cy="0"/>
-        </a:xfrm>
-      </p:grpSpPr>
-      <p:grpSp>
-        <p:nvGrpSpPr>
-          <p:cNvPr id="4" name="Group 3">
-            <a:extLst>
-              <a:ext uri="{FF2B5EF4-FFF2-40B4-BE49-F238E27FC236}">
-                <a16:creationId xmlns:a16="http://schemas.microsoft.com/office/drawing/2014/main" id="{9D9BBD4A-0CA1-32F3-26D6-3379A9124AC1}"/>
-              </a:ext>
-            </a:extLst>
-          </p:cNvPr>
-          <p:cNvGrpSpPr/>
-          <p:nvPr/>
-        </p:nvGrpSpPr>
-        <p:grpSpPr>
-          <a:xfrm>
-            <a:off x="-132734" y="-74663"/>
-            <a:ext cx="12457469" cy="7007326"/>
-            <a:chOff x="-157315" y="-88489"/>
-            <a:chExt cx="12457469" cy="7007326"/>
-          </a:xfrm>
-        </p:grpSpPr>
-        <p:pic>
-          <p:nvPicPr>
-            <p:cNvPr id="2" name="Google Shape;84;p13" descr="image.png">
-              <a:extLst>
-                <a:ext uri="{FF2B5EF4-FFF2-40B4-BE49-F238E27FC236}">
-                  <a16:creationId xmlns:a16="http://schemas.microsoft.com/office/drawing/2014/main" id="{E85BF679-52A2-A2B8-04BF-1A2CCF31193A}"/>
-                </a:ext>
-              </a:extLst>
-            </p:cNvPr>
-            <p:cNvPicPr preferRelativeResize="0"/>
-            <p:nvPr/>
-          </p:nvPicPr>
-          <p:blipFill rotWithShape="1">
-            <a:blip r:embed="rId3">
-              <a:alphaModFix/>
-            </a:blip>
-            <a:srcRect/>
-            <a:stretch/>
-          </p:blipFill>
-          <p:spPr>
-            <a:xfrm>
-              <a:off x="-157315" y="-88489"/>
-              <a:ext cx="12457469" cy="7007326"/>
-            </a:xfrm>
-            <a:prstGeom prst="rect">
-              <a:avLst/>
-            </a:prstGeom>
-            <a:noFill/>
-            <a:ln>
-              <a:noFill/>
-            </a:ln>
-          </p:spPr>
-        </p:pic>
-        <p:pic>
-          <p:nvPicPr>
-            <p:cNvPr id="3" name="Google Shape;98;p14" descr="image.png">
-              <a:extLst>
-                <a:ext uri="{FF2B5EF4-FFF2-40B4-BE49-F238E27FC236}">
-                  <a16:creationId xmlns:a16="http://schemas.microsoft.com/office/drawing/2014/main" id="{6A9C8AA2-5CCF-3436-C5FD-C0ADC42FFDE7}"/>
-                </a:ext>
-              </a:extLst>
-            </p:cNvPr>
-            <p:cNvPicPr preferRelativeResize="0"/>
-            <p:nvPr/>
-          </p:nvPicPr>
-          <p:blipFill rotWithShape="1">
-            <a:blip r:embed="rId4">
-              <a:alphaModFix amt="50000"/>
-            </a:blip>
-            <a:srcRect/>
-            <a:stretch/>
-          </p:blipFill>
-          <p:spPr>
-            <a:xfrm>
-              <a:off x="0" y="0"/>
-              <a:ext cx="12192000" cy="6858000"/>
-            </a:xfrm>
-            <a:prstGeom prst="rect">
-              <a:avLst/>
-            </a:prstGeom>
-            <a:noFill/>
-            <a:ln>
-              <a:noFill/>
-            </a:ln>
-          </p:spPr>
-        </p:pic>
-      </p:grpSp>
-      <p:pic>
-        <p:nvPicPr>
-          <p:cNvPr id="131" name="Google Shape;131;p16" descr="image.png"/>
-          <p:cNvPicPr preferRelativeResize="0"/>
-          <p:nvPr/>
-        </p:nvPicPr>
-        <p:blipFill rotWithShape="1">
-          <a:blip r:embed="rId5">
-            <a:alphaModFix/>
-          </a:blip>
-          <a:srcRect/>
-          <a:stretch/>
-        </p:blipFill>
-        <p:spPr>
-          <a:xfrm>
-            <a:off x="571500" y="2847975"/>
-            <a:ext cx="3429000" cy="2409825"/>
-          </a:xfrm>
-          <a:prstGeom prst="rect">
-            <a:avLst/>
-          </a:prstGeom>
-          <a:noFill/>
-          <a:ln>
-            <a:noFill/>
-          </a:ln>
-        </p:spPr>
-      </p:pic>
-      <p:pic>
-        <p:nvPicPr>
-          <p:cNvPr id="132" name="Google Shape;132;p16" descr="image.png"/>
-          <p:cNvPicPr preferRelativeResize="0"/>
-          <p:nvPr/>
-        </p:nvPicPr>
-        <p:blipFill rotWithShape="1">
-          <a:blip r:embed="rId6">
-            <a:alphaModFix/>
-          </a:blip>
-          <a:srcRect/>
-          <a:stretch/>
-        </p:blipFill>
-        <p:spPr>
-          <a:xfrm>
-            <a:off x="4381500" y="2847975"/>
-            <a:ext cx="3429000" cy="2409825"/>
-          </a:xfrm>
-          <a:prstGeom prst="rect">
-            <a:avLst/>
-          </a:prstGeom>
-          <a:noFill/>
-          <a:ln>
-            <a:noFill/>
-          </a:ln>
-        </p:spPr>
-      </p:pic>
-      <p:pic>
-        <p:nvPicPr>
-          <p:cNvPr id="133" name="Google Shape;133;p16" descr="image.png"/>
-          <p:cNvPicPr preferRelativeResize="0"/>
-          <p:nvPr/>
-        </p:nvPicPr>
-        <p:blipFill rotWithShape="1">
-          <a:blip r:embed="rId6">
-            <a:alphaModFix/>
-          </a:blip>
-          <a:srcRect/>
-          <a:stretch/>
-        </p:blipFill>
-        <p:spPr>
-          <a:xfrm>
-            <a:off x="8191500" y="2847975"/>
-            <a:ext cx="3429000" cy="2409825"/>
-          </a:xfrm>
-          <a:prstGeom prst="rect">
-            <a:avLst/>
-          </a:prstGeom>
-          <a:noFill/>
-          <a:ln>
-            <a:noFill/>
-          </a:ln>
-        </p:spPr>
-      </p:pic>
-      <p:pic>
-        <p:nvPicPr>
-          <p:cNvPr id="134" name="Google Shape;134;p16" descr="image.png"/>
-          <p:cNvPicPr preferRelativeResize="0"/>
-          <p:nvPr/>
-        </p:nvPicPr>
-        <p:blipFill rotWithShape="1">
-          <a:blip r:embed="rId7">
-            <a:alphaModFix/>
-          </a:blip>
-          <a:srcRect/>
-          <a:stretch/>
-        </p:blipFill>
-        <p:spPr>
-          <a:xfrm>
-            <a:off x="2095500" y="3238500"/>
-            <a:ext cx="381000" cy="381000"/>
-          </a:xfrm>
-          <a:prstGeom prst="rect">
-            <a:avLst/>
-          </a:prstGeom>
-          <a:noFill/>
-          <a:ln>
-            <a:noFill/>
-          </a:ln>
-        </p:spPr>
-      </p:pic>
-      <p:sp>
-        <p:nvSpPr>
-          <p:cNvPr id="135" name="Google Shape;135;p16"/>
-          <p:cNvSpPr txBox="1"/>
-          <p:nvPr/>
-        </p:nvSpPr>
-        <p:spPr>
-          <a:xfrm>
-            <a:off x="1720929" y="3810000"/>
-            <a:ext cx="1130141" cy="304800"/>
-          </a:xfrm>
-          <a:prstGeom prst="rect">
-            <a:avLst/>
-          </a:prstGeom>
-          <a:noFill/>
-          <a:ln>
-            <a:noFill/>
-          </a:ln>
-        </p:spPr>
-        <p:txBody>
-          <a:bodyPr spcFirstLastPara="1" wrap="square" lIns="0" tIns="0" rIns="0" bIns="0" anchor="t" anchorCtr="0">
-            <a:spAutoFit/>
-          </a:bodyPr>
-          <a:lstStyle/>
-          <a:p>
-            <a:pPr marL="0" marR="0" lvl="0" indent="0" algn="ctr" rtl="0">
-              <a:spcBef>
-                <a:spcPts val="0"/>
-              </a:spcBef>
-              <a:spcAft>
-                <a:spcPts val="0"/>
-              </a:spcAft>
-              <a:buNone/>
-            </a:pPr>
-            <a:r>
-              <a:rPr lang="en-US" sz="1800" b="1" i="0" u="none" strike="noStrike" cap="none" dirty="0">
-                <a:solidFill>
-                  <a:srgbClr val="FBE695"/>
-                </a:solidFill>
-                <a:latin typeface="Playfair Display"/>
-                <a:ea typeface="Playfair Display"/>
-                <a:cs typeface="Playfair Display"/>
-                <a:sym typeface="Playfair Display"/>
-              </a:rPr>
-              <a:t>Feasibility</a:t>
-            </a:r>
-            <a:endParaRPr dirty="0"/>
-          </a:p>
-        </p:txBody>
-      </p:sp>
-      <p:sp>
-        <p:nvSpPr>
-          <p:cNvPr id="136" name="Google Shape;136;p16"/>
-          <p:cNvSpPr txBox="1"/>
-          <p:nvPr/>
-        </p:nvSpPr>
-        <p:spPr>
-          <a:xfrm>
-            <a:off x="866775" y="4257675"/>
-            <a:ext cx="2838450" cy="609600"/>
-          </a:xfrm>
-          <a:prstGeom prst="rect">
-            <a:avLst/>
-          </a:prstGeom>
-          <a:noFill/>
-          <a:ln>
-            <a:noFill/>
-          </a:ln>
-        </p:spPr>
-        <p:txBody>
-          <a:bodyPr spcFirstLastPara="1" wrap="square" lIns="0" tIns="0" rIns="0" bIns="0" anchor="t" anchorCtr="0">
-            <a:spAutoFit/>
-          </a:bodyPr>
-          <a:lstStyle/>
-          <a:p>
-            <a:pPr marL="0" marR="0" lvl="0" indent="0" algn="ctr" rtl="0">
-              <a:lnSpc>
-                <a:spcPct val="160000"/>
-              </a:lnSpc>
-              <a:spcBef>
-                <a:spcPts val="0"/>
-              </a:spcBef>
-              <a:spcAft>
-                <a:spcPts val="0"/>
-              </a:spcAft>
-              <a:buNone/>
-            </a:pPr>
-            <a:r>
-              <a:rPr lang="en-US" sz="1500" b="0" i="0" u="none" strike="noStrike" cap="none" dirty="0">
-                <a:solidFill>
-                  <a:srgbClr val="F2EEFA"/>
-                </a:solidFill>
-                <a:latin typeface="Poppins Light"/>
-                <a:ea typeface="Poppins Light"/>
-                <a:cs typeface="Poppins Light"/>
-                <a:sym typeface="Poppins Light"/>
-              </a:rPr>
-              <a:t>SOTA baseline: 0.42% EER (NeXt-TDNN); trainable on laptop GPU</a:t>
-            </a:r>
-            <a:endParaRPr dirty="0"/>
-          </a:p>
-        </p:txBody>
-      </p:sp>
-      <p:pic>
-        <p:nvPicPr>
-          <p:cNvPr id="137" name="Google Shape;137;p16" descr="image.png"/>
-          <p:cNvPicPr preferRelativeResize="0"/>
-          <p:nvPr/>
-        </p:nvPicPr>
-        <p:blipFill rotWithShape="1">
-          <a:blip r:embed="rId8">
-            <a:alphaModFix/>
-          </a:blip>
-          <a:srcRect/>
-          <a:stretch/>
-        </p:blipFill>
-        <p:spPr>
-          <a:xfrm>
-            <a:off x="5905500" y="3238500"/>
-            <a:ext cx="381000" cy="381000"/>
-          </a:xfrm>
-          <a:prstGeom prst="rect">
-            <a:avLst/>
-          </a:prstGeom>
-          <a:noFill/>
-          <a:ln>
-            <a:noFill/>
-          </a:ln>
-        </p:spPr>
-      </p:pic>
-      <p:sp>
-        <p:nvSpPr>
-          <p:cNvPr id="138" name="Google Shape;138;p16"/>
-          <p:cNvSpPr txBox="1"/>
-          <p:nvPr/>
-        </p:nvSpPr>
-        <p:spPr>
-          <a:xfrm>
-            <a:off x="5490924" y="3810000"/>
-            <a:ext cx="1210151" cy="304800"/>
-          </a:xfrm>
-          <a:prstGeom prst="rect">
-            <a:avLst/>
-          </a:prstGeom>
-          <a:noFill/>
-          <a:ln>
-            <a:noFill/>
-          </a:ln>
-        </p:spPr>
-        <p:txBody>
-          <a:bodyPr spcFirstLastPara="1" wrap="square" lIns="0" tIns="0" rIns="0" bIns="0" anchor="t" anchorCtr="0">
-            <a:spAutoFit/>
-          </a:bodyPr>
-          <a:lstStyle/>
-          <a:p>
-            <a:pPr marL="0" marR="0" lvl="0" indent="0" algn="ctr" rtl="0">
-              <a:spcBef>
-                <a:spcPts val="0"/>
-              </a:spcBef>
-              <a:spcAft>
-                <a:spcPts val="0"/>
-              </a:spcAft>
-              <a:buNone/>
-            </a:pPr>
-            <a:r>
-              <a:rPr lang="en-US" sz="1800" b="1" i="0" u="none" strike="noStrike" cap="none" dirty="0">
-                <a:solidFill>
-                  <a:srgbClr val="FBE695"/>
-                </a:solidFill>
-                <a:latin typeface="Playfair Display"/>
-                <a:ea typeface="Playfair Display"/>
-                <a:cs typeface="Playfair Display"/>
-                <a:sym typeface="Playfair Display"/>
-              </a:rPr>
-              <a:t>Challenges</a:t>
-            </a:r>
-            <a:endParaRPr dirty="0"/>
-          </a:p>
-        </p:txBody>
-      </p:sp>
-      <p:sp>
-        <p:nvSpPr>
-          <p:cNvPr id="139" name="Google Shape;139;p16"/>
-          <p:cNvSpPr txBox="1"/>
-          <p:nvPr/>
-        </p:nvSpPr>
-        <p:spPr>
-          <a:xfrm>
-            <a:off x="4776787" y="4257675"/>
-            <a:ext cx="2638425" cy="304800"/>
-          </a:xfrm>
-          <a:prstGeom prst="rect">
-            <a:avLst/>
-          </a:prstGeom>
-          <a:noFill/>
-          <a:ln>
-            <a:noFill/>
-          </a:ln>
-        </p:spPr>
-        <p:txBody>
-          <a:bodyPr spcFirstLastPara="1" wrap="square" lIns="0" tIns="0" rIns="0" bIns="0" anchor="t" anchorCtr="0">
-            <a:spAutoFit/>
-          </a:bodyPr>
-          <a:lstStyle/>
-          <a:p>
-            <a:pPr marL="0" marR="0" lvl="0" indent="0" algn="ctr" rtl="0">
-              <a:lnSpc>
-                <a:spcPct val="160000"/>
-              </a:lnSpc>
-              <a:spcBef>
-                <a:spcPts val="0"/>
-              </a:spcBef>
-              <a:spcAft>
-                <a:spcPts val="0"/>
-              </a:spcAft>
-              <a:buNone/>
-            </a:pPr>
-            <a:r>
-              <a:rPr lang="en-US" sz="1500" b="0" i="0" u="none" strike="noStrike" cap="none" dirty="0">
-                <a:solidFill>
-                  <a:srgbClr val="F2EEFA"/>
-                </a:solidFill>
-                <a:latin typeface="Poppins Light"/>
-                <a:ea typeface="Poppins Light"/>
-                <a:cs typeface="Poppins Light"/>
-                <a:sym typeface="Poppins Light"/>
-              </a:rPr>
-              <a:t>21× accuracy drop 2019→2021 LA (channel shift); limited Hindi data</a:t>
-            </a:r>
-            <a:endParaRPr dirty="0"/>
-          </a:p>
-        </p:txBody>
-      </p:sp>
-      <p:pic>
-        <p:nvPicPr>
-          <p:cNvPr id="140" name="Google Shape;140;p16" descr="image.png"/>
-          <p:cNvPicPr preferRelativeResize="0"/>
-          <p:nvPr/>
-        </p:nvPicPr>
-        <p:blipFill rotWithShape="1">
-          <a:blip r:embed="rId9">
-            <a:alphaModFix/>
-          </a:blip>
-          <a:srcRect/>
-          <a:stretch/>
-        </p:blipFill>
-        <p:spPr>
-          <a:xfrm>
-            <a:off x="9739312" y="3238500"/>
-            <a:ext cx="333375" cy="381000"/>
-          </a:xfrm>
-          <a:prstGeom prst="rect">
-            <a:avLst/>
-          </a:prstGeom>
-          <a:noFill/>
-          <a:ln>
-            <a:noFill/>
-          </a:ln>
-        </p:spPr>
-      </p:pic>
-      <p:sp>
-        <p:nvSpPr>
-          <p:cNvPr id="141" name="Google Shape;141;p16"/>
-          <p:cNvSpPr txBox="1"/>
-          <p:nvPr/>
-        </p:nvSpPr>
-        <p:spPr>
-          <a:xfrm>
-            <a:off x="9360931" y="3810000"/>
-            <a:ext cx="1090136" cy="304800"/>
-          </a:xfrm>
-          <a:prstGeom prst="rect">
-            <a:avLst/>
-          </a:prstGeom>
-          <a:noFill/>
-          <a:ln>
-            <a:noFill/>
-          </a:ln>
-        </p:spPr>
-        <p:txBody>
-          <a:bodyPr spcFirstLastPara="1" wrap="square" lIns="0" tIns="0" rIns="0" bIns="0" anchor="t" anchorCtr="0">
-            <a:spAutoFit/>
-          </a:bodyPr>
-          <a:lstStyle/>
-          <a:p>
-            <a:pPr marL="0" marR="0" lvl="0" indent="0" algn="ctr" rtl="0">
-              <a:spcBef>
-                <a:spcPts val="0"/>
-              </a:spcBef>
-              <a:spcAft>
-                <a:spcPts val="0"/>
-              </a:spcAft>
-              <a:buNone/>
-            </a:pPr>
-            <a:r>
-              <a:rPr lang="en-US" sz="1800" b="1" i="0" u="none" strike="noStrike" cap="none" dirty="0">
-                <a:solidFill>
-                  <a:srgbClr val="FBE695"/>
-                </a:solidFill>
-                <a:latin typeface="Playfair Display"/>
-                <a:ea typeface="Playfair Display"/>
-                <a:cs typeface="Playfair Display"/>
-                <a:sym typeface="Playfair Display"/>
-              </a:rPr>
-              <a:t>Strategies</a:t>
-            </a:r>
-            <a:endParaRPr dirty="0"/>
-          </a:p>
-        </p:txBody>
-      </p:sp>
-      <p:sp>
-        <p:nvSpPr>
-          <p:cNvPr id="142" name="Google Shape;142;p16"/>
-          <p:cNvSpPr txBox="1"/>
-          <p:nvPr/>
-        </p:nvSpPr>
-        <p:spPr>
-          <a:xfrm>
-            <a:off x="8486775" y="4257675"/>
-            <a:ext cx="2838450" cy="609600"/>
-          </a:xfrm>
-          <a:prstGeom prst="rect">
-            <a:avLst/>
-          </a:prstGeom>
-          <a:noFill/>
-          <a:ln>
-            <a:noFill/>
-          </a:ln>
-        </p:spPr>
-        <p:txBody>
-          <a:bodyPr spcFirstLastPara="1" wrap="square" lIns="0" tIns="0" rIns="0" bIns="0" anchor="t" anchorCtr="0">
-            <a:spAutoFit/>
-          </a:bodyPr>
-          <a:lstStyle/>
-          <a:p>
-            <a:pPr marL="0" marR="0" lvl="0" indent="0" algn="ctr" rtl="0">
-              <a:lnSpc>
-                <a:spcPct val="160000"/>
-              </a:lnSpc>
-              <a:spcBef>
-                <a:spcPts val="0"/>
-              </a:spcBef>
-              <a:spcAft>
-                <a:spcPts val="0"/>
-              </a:spcAft>
-              <a:buNone/>
-            </a:pPr>
-            <a:r>
-              <a:rPr lang="en-US" sz="1500" b="0" i="0" u="none" strike="noStrike" cap="none" dirty="0">
-                <a:solidFill>
-                  <a:srgbClr val="F2EEFA"/>
-                </a:solidFill>
-                <a:latin typeface="Poppins Light"/>
-                <a:ea typeface="Poppins Light"/>
-                <a:cs typeface="Poppins Light"/>
-                <a:sym typeface="Poppins Light"/>
-              </a:rPr>
-              <a:t>Fine-tune on 2021 LA + HAV-DF + Common Voice hi-IN; RawBoost</a:t>
-            </a:r>
-            <a:endParaRPr dirty="0"/>
-          </a:p>
-        </p:txBody>
-      </p:sp>
-      <p:sp>
-        <p:nvSpPr>
-          <p:cNvPr id="143" name="Google Shape;143;p16"/>
-          <p:cNvSpPr txBox="1"/>
-          <p:nvPr/>
-        </p:nvSpPr>
-        <p:spPr>
-          <a:xfrm>
-            <a:off x="571500" y="571500"/>
-            <a:ext cx="11601450" cy="628650"/>
-          </a:xfrm>
-          <a:prstGeom prst="rect">
-            <a:avLst/>
-          </a:prstGeom>
-          <a:noFill/>
-          <a:ln>
-            <a:noFill/>
-          </a:ln>
-        </p:spPr>
-        <p:txBody>
-          <a:bodyPr spcFirstLastPara="1" wrap="square" lIns="0" tIns="0" rIns="0" bIns="0" anchor="t" anchorCtr="0">
-            <a:spAutoFit/>
-          </a:bodyPr>
-          <a:lstStyle/>
-          <a:p>
-            <a:pPr marL="0" marR="0" lvl="0" indent="0" algn="l" rtl="0">
-              <a:spcBef>
-                <a:spcPts val="0"/>
-              </a:spcBef>
-              <a:spcAft>
-                <a:spcPts val="0"/>
-              </a:spcAft>
-              <a:buNone/>
-            </a:pPr>
-            <a:r>
-              <a:rPr lang="en-US" sz="3600" b="1" i="0" u="none" strike="noStrike" cap="none" dirty="0">
-                <a:solidFill>
-                  <a:srgbClr val="F2EEFA"/>
-                </a:solidFill>
-                <a:latin typeface="Playfair Display"/>
-                <a:ea typeface="Playfair Display"/>
-                <a:cs typeface="Playfair Display"/>
-                <a:sym typeface="Playfair Display"/>
-              </a:rPr>
-              <a:t>FEASIBILITY AND VIABILITY</a:t>
-            </a:r>
-            <a:endParaRPr dirty="0"/>
-          </a:p>
-        </p:txBody>
-      </p:sp>
-      <p:sp>
-        <p:nvSpPr>
-          <p:cNvPr id="144" name="Google Shape;144;p16"/>
-          <p:cNvSpPr/>
-          <p:nvPr/>
-        </p:nvSpPr>
-        <p:spPr>
-          <a:xfrm>
-            <a:off x="571500" y="1323975"/>
-            <a:ext cx="11049000" cy="19050"/>
-          </a:xfrm>
-          <a:prstGeom prst="rect">
-            <a:avLst/>
-          </a:prstGeom>
-          <a:solidFill>
-            <a:srgbClr val="D4AF37"/>
-          </a:solidFill>
-          <a:ln>
-            <a:noFill/>
-          </a:ln>
-        </p:spPr>
-        <p:txBody>
-          <a:bodyPr spcFirstLastPara="1" wrap="square" lIns="91425" tIns="45700" rIns="91425" bIns="45700" anchor="ctr" anchorCtr="0">
-            <a:noAutofit/>
-          </a:bodyPr>
-          <a:lstStyle/>
-          <a:p>
-            <a:pPr marL="0" marR="0" lvl="0" indent="0" algn="ctr" rtl="0">
-              <a:spcBef>
-                <a:spcPts val="0"/>
-              </a:spcBef>
-              <a:spcAft>
-                <a:spcPts val="0"/>
-              </a:spcAft>
-              <a:buNone/>
-            </a:pPr>
-            <a:endParaRPr sz="1800" b="0" i="0" u="none" strike="noStrike" cap="none" dirty="0">
-              <a:solidFill>
-                <a:schemeClr val="dk1"/>
-              </a:solidFill>
-              <a:latin typeface="Calibri"/>
-              <a:ea typeface="Calibri"/>
-              <a:cs typeface="Calibri"/>
-              <a:sym typeface="Calibri"/>
-            </a:endParaRPr>
-          </a:p>
-        </p:txBody>
-      </p:sp>
-      <p:sp>
-        <p:nvSpPr>
-          <p:cNvPr id="145" name="Google Shape;145;p16"/>
-          <p:cNvSpPr txBox="1"/>
-          <p:nvPr/>
-        </p:nvSpPr>
-        <p:spPr>
-          <a:xfrm>
-            <a:off x="11687175" y="6467475"/>
-            <a:ext cx="219075" cy="200025"/>
-          </a:xfrm>
-          <a:prstGeom prst="rect">
-            <a:avLst/>
-          </a:prstGeom>
-          <a:noFill/>
-          <a:ln>
-            <a:noFill/>
-          </a:ln>
-        </p:spPr>
-        <p:txBody>
-          <a:bodyPr spcFirstLastPara="1" wrap="square" lIns="0" tIns="0" rIns="0" bIns="0" anchor="t" anchorCtr="0">
-            <a:spAutoFit/>
-          </a:bodyPr>
-          <a:lstStyle/>
-          <a:p>
-            <a:pPr marL="0" marR="0" lvl="0" indent="0" algn="l" rtl="0">
-              <a:spcBef>
-                <a:spcPts val="0"/>
-              </a:spcBef>
-              <a:spcAft>
-                <a:spcPts val="0"/>
-              </a:spcAft>
-              <a:buNone/>
-            </a:pPr>
-            <a:r>
-              <a:rPr lang="en-US" sz="1050" b="0" i="0" u="none" strike="noStrike" cap="none" dirty="0">
-                <a:solidFill>
-                  <a:srgbClr val="FFFFFF"/>
-                </a:solidFill>
-                <a:latin typeface="Poppins"/>
-                <a:ea typeface="Poppins"/>
-                <a:cs typeface="Poppins"/>
-                <a:sym typeface="Poppins"/>
-              </a:rPr>
-              <a:t>04</a:t>
-            </a:r>
-            <a:endParaRPr dirty="0"/>
-          </a:p>
-        </p:txBody>
-      </p:sp>
-      <p:pic>
-        <p:nvPicPr>
-          <p:cNvPr id="5" name="Picture 4">
-            <a:extLst>
-              <a:ext uri="{FF2B5EF4-FFF2-40B4-BE49-F238E27FC236}">
-                <a16:creationId xmlns:a16="http://schemas.microsoft.com/office/drawing/2014/main" id="{B9539AD2-9821-3F8D-A3D6-35A48800DBE8}"/>
-              </a:ext>
-            </a:extLst>
-          </p:cNvPr>
-          <p:cNvPicPr>
-            <a:picLocks noChangeAspect="1"/>
-          </p:cNvPicPr>
-          <p:nvPr/>
-        </p:nvPicPr>
-        <p:blipFill>
-          <a:blip r:embed="rId10"/>
-          <a:stretch>
-            <a:fillRect/>
-          </a:stretch>
-        </p:blipFill>
-        <p:spPr>
-          <a:xfrm>
-            <a:off x="9361386" y="134593"/>
-            <a:ext cx="2259114" cy="1169718"/>
-          </a:xfrm>
-          <a:prstGeom prst="rect">
-            <a:avLst/>
-          </a:prstGeom>
-        </p:spPr>
-      </p:pic>
-    </p:spTree>
-  </p:cSld>
-  <p:clrMapOvr>
-    <a:masterClrMapping/>
-  </p:clrMapOvr>
-</p:sld>
-</file>
-
-<file path=ppt/slides/slide5.xml><?xml version="1.0" encoding="utf-8"?>
-<p:sld xmlns:a="http://schemas.openxmlformats.org/drawingml/2006/main" xmlns:r="http://schemas.openxmlformats.org/officeDocument/2006/relationships" xmlns:p="http://schemas.openxmlformats.org/presentationml/2006/main">
-  <p:cSld>
-    <p:spTree>
-      <p:nvGrpSpPr>
-        <p:cNvPr id="1" name="Shape 149"/>
-        <p:cNvGrpSpPr/>
-        <p:nvPr/>
-      </p:nvGrpSpPr>
-      <p:grpSpPr>
-        <a:xfrm>
-          <a:off x="0" y="0"/>
-          <a:ext cx="0" cy="0"/>
-          <a:chOff x="0" y="0"/>
-          <a:chExt cx="0" cy="0"/>
-        </a:xfrm>
-      </p:grpSpPr>
-      <p:grpSp>
-        <p:nvGrpSpPr>
-          <p:cNvPr id="2" name="Group 1">
-            <a:extLst>
-              <a:ext uri="{FF2B5EF4-FFF2-40B4-BE49-F238E27FC236}">
-                <a16:creationId xmlns:a16="http://schemas.microsoft.com/office/drawing/2014/main" id="{D382BC47-C1E8-211A-F7F3-99B987C7EA87}"/>
-              </a:ext>
-            </a:extLst>
-          </p:cNvPr>
-          <p:cNvGrpSpPr>
-            <a:grpSpLocks noGrp="1" noUngrp="1" noRot="1" noMove="1" noResize="1"/>
-          </p:cNvGrpSpPr>
-          <p:nvPr/>
-        </p:nvGrpSpPr>
-        <p:grpSpPr>
-          <a:xfrm>
-            <a:off x="-132734" y="-74663"/>
-            <a:ext cx="12457469" cy="7007326"/>
-            <a:chOff x="-157315" y="-88489"/>
-            <a:chExt cx="12457469" cy="7007326"/>
-          </a:xfrm>
-        </p:grpSpPr>
-        <p:pic>
-          <p:nvPicPr>
-            <p:cNvPr id="3" name="Google Shape;84;p13" descr="image.png">
-              <a:extLst>
-                <a:ext uri="{FF2B5EF4-FFF2-40B4-BE49-F238E27FC236}">
-                  <a16:creationId xmlns:a16="http://schemas.microsoft.com/office/drawing/2014/main" id="{C50263B4-4851-C499-7453-724CE8EF500B}"/>
-                </a:ext>
-              </a:extLst>
-            </p:cNvPr>
-            <p:cNvPicPr preferRelativeResize="0">
-              <a:picLocks noGrp="1" noRot="1" noMove="1" noResize="1" noEditPoints="1" noAdjustHandles="1" noChangeArrowheads="1" noChangeShapeType="1" noCrop="1"/>
-            </p:cNvPicPr>
-            <p:nvPr/>
-          </p:nvPicPr>
-          <p:blipFill rotWithShape="1">
-            <a:blip r:embed="rId3">
-              <a:alphaModFix/>
-            </a:blip>
-            <a:srcRect/>
-            <a:stretch/>
-          </p:blipFill>
-          <p:spPr>
-            <a:xfrm>
-              <a:off x="-157315" y="-88489"/>
-              <a:ext cx="12457469" cy="7007326"/>
-            </a:xfrm>
-            <a:prstGeom prst="rect">
-              <a:avLst/>
-            </a:prstGeom>
-            <a:noFill/>
-            <a:ln>
-              <a:noFill/>
-            </a:ln>
-          </p:spPr>
-        </p:pic>
-        <p:pic>
-          <p:nvPicPr>
-            <p:cNvPr id="4" name="Google Shape;98;p14" descr="image.png">
-              <a:extLst>
-                <a:ext uri="{FF2B5EF4-FFF2-40B4-BE49-F238E27FC236}">
-                  <a16:creationId xmlns:a16="http://schemas.microsoft.com/office/drawing/2014/main" id="{0ED84BD7-0591-5A0E-6A51-006CBA369A9B}"/>
-                </a:ext>
-              </a:extLst>
-            </p:cNvPr>
-            <p:cNvPicPr preferRelativeResize="0">
-              <a:picLocks noGrp="1" noRot="1" noMove="1" noResize="1" noEditPoints="1" noAdjustHandles="1" noChangeArrowheads="1" noChangeShapeType="1" noCrop="1"/>
-            </p:cNvPicPr>
-            <p:nvPr/>
-          </p:nvPicPr>
-          <p:blipFill rotWithShape="1">
-            <a:blip r:embed="rId4">
-              <a:alphaModFix amt="50000"/>
-            </a:blip>
-            <a:srcRect/>
-            <a:stretch/>
-          </p:blipFill>
-          <p:spPr>
-            <a:xfrm>
-              <a:off x="0" y="0"/>
-              <a:ext cx="12192000" cy="6858000"/>
-            </a:xfrm>
-            <a:prstGeom prst="rect">
-              <a:avLst/>
-            </a:prstGeom>
-            <a:noFill/>
-            <a:ln>
-              <a:noFill/>
-            </a:ln>
-          </p:spPr>
-        </p:pic>
-      </p:grpSp>
-      <p:sp>
-        <p:nvSpPr>
-          <p:cNvPr id="154" name="Google Shape;154;p17"/>
-          <p:cNvSpPr txBox="1"/>
-          <p:nvPr/>
-        </p:nvSpPr>
-        <p:spPr>
-          <a:xfrm>
-            <a:off x="1000125" y="1683172"/>
-            <a:ext cx="4619625" cy="314325"/>
-          </a:xfrm>
-          <a:prstGeom prst="rect">
-            <a:avLst/>
-          </a:prstGeom>
-          <a:noFill/>
-          <a:ln>
-            <a:noFill/>
-          </a:ln>
-        </p:spPr>
-        <p:txBody>
-          <a:bodyPr spcFirstLastPara="1" wrap="square" lIns="0" tIns="0" rIns="0" bIns="0" anchor="t" anchorCtr="0">
-            <a:spAutoFit/>
-          </a:bodyPr>
-          <a:lstStyle/>
-          <a:p>
-            <a:pPr marL="0" marR="0" lvl="0" indent="0" algn="l" rtl="0">
-              <a:lnSpc>
-                <a:spcPct val="150000"/>
-              </a:lnSpc>
-              <a:spcBef>
-                <a:spcPts val="0"/>
-              </a:spcBef>
-              <a:spcAft>
-                <a:spcPts val="0"/>
-              </a:spcAft>
-              <a:buNone/>
-            </a:pPr>
-            <a:r>
-              <a:rPr lang="en-US" sz="1650" b="0" i="0" u="none" strike="noStrike" cap="none" dirty="0">
-                <a:solidFill>
-                  <a:srgbClr val="FFFFFF"/>
-                </a:solidFill>
-                <a:latin typeface="Poppins Light"/>
-                <a:ea typeface="Poppins Light"/>
-                <a:cs typeface="Poppins Light"/>
-                <a:sym typeface="Poppins Light"/>
-              </a:rPr>
-              <a:t>663+ banks, 79+ apps on UPI — every voice channel is a target surface</a:t>
-            </a:r>
-            <a:endParaRPr dirty="0"/>
-          </a:p>
-        </p:txBody>
-      </p:sp>
-      <p:sp>
-        <p:nvSpPr>
-          <p:cNvPr id="155" name="Google Shape;155;p17"/>
-          <p:cNvSpPr txBox="1"/>
-          <p:nvPr/>
-        </p:nvSpPr>
-        <p:spPr>
-          <a:xfrm>
-            <a:off x="957415" y="2197585"/>
-            <a:ext cx="8865235" cy="380873"/>
-          </a:xfrm>
-          <a:prstGeom prst="rect">
-            <a:avLst/>
-          </a:prstGeom>
-          <a:noFill/>
-          <a:ln>
-            <a:noFill/>
-          </a:ln>
-        </p:spPr>
-        <p:txBody>
-          <a:bodyPr spcFirstLastPara="1" wrap="square" lIns="0" tIns="0" rIns="0" bIns="0" anchor="t" anchorCtr="0">
-            <a:spAutoFit/>
-          </a:bodyPr>
-          <a:lstStyle/>
-          <a:p>
-            <a:pPr marL="0" marR="0" lvl="0" indent="0" algn="l" rtl="0">
-              <a:lnSpc>
-                <a:spcPct val="150000"/>
-              </a:lnSpc>
-              <a:spcBef>
-                <a:spcPts val="0"/>
-              </a:spcBef>
-              <a:spcAft>
-                <a:spcPts val="0"/>
-              </a:spcAft>
-              <a:buNone/>
-            </a:pPr>
-            <a:r>
-              <a:rPr lang="en-US" sz="1650" b="0" i="0" u="none" strike="noStrike" cap="none" dirty="0">
-                <a:solidFill>
-                  <a:srgbClr val="FFFFFF"/>
-                </a:solidFill>
-                <a:latin typeface="Poppins Light"/>
-                <a:ea typeface="Poppins Light"/>
-                <a:cs typeface="Poppins Light"/>
-                <a:sym typeface="Poppins Light"/>
-              </a:rPr>
-              <a:t>Social: fewer elderly victimized · Economic: ₹805 cr/yr runway · National: digital sovereignty</a:t>
-            </a:r>
-            <a:endParaRPr dirty="0"/>
-          </a:p>
-        </p:txBody>
-      </p:sp>
-      <p:pic>
-        <p:nvPicPr>
-          <p:cNvPr id="156" name="Google Shape;156;p17" descr="image.png"/>
-          <p:cNvPicPr preferRelativeResize="0"/>
-          <p:nvPr/>
-        </p:nvPicPr>
-        <p:blipFill rotWithShape="1">
-          <a:blip r:embed="rId5">
-            <a:alphaModFix/>
-          </a:blip>
-          <a:srcRect/>
-          <a:stretch/>
-        </p:blipFill>
-        <p:spPr>
-          <a:xfrm>
-            <a:off x="571500" y="1711747"/>
-            <a:ext cx="228600" cy="247650"/>
-          </a:xfrm>
-          <a:prstGeom prst="rect">
-            <a:avLst/>
-          </a:prstGeom>
-          <a:noFill/>
-          <a:ln>
-            <a:noFill/>
-          </a:ln>
-        </p:spPr>
-      </p:pic>
-      <p:pic>
-        <p:nvPicPr>
-          <p:cNvPr id="157" name="Google Shape;157;p17" descr="image.png"/>
-          <p:cNvPicPr preferRelativeResize="0"/>
-          <p:nvPr/>
-        </p:nvPicPr>
-        <p:blipFill rotWithShape="1">
-          <a:blip r:embed="rId6">
-            <a:alphaModFix/>
-          </a:blip>
-          <a:srcRect/>
-          <a:stretch/>
-        </p:blipFill>
-        <p:spPr>
-          <a:xfrm>
-            <a:off x="571500" y="2264197"/>
-            <a:ext cx="228600" cy="247650"/>
-          </a:xfrm>
-          <a:prstGeom prst="rect">
-            <a:avLst/>
-          </a:prstGeom>
-          <a:noFill/>
-          <a:ln>
-            <a:noFill/>
-          </a:ln>
-        </p:spPr>
-      </p:pic>
-      <p:sp>
-        <p:nvSpPr>
-          <p:cNvPr id="158" name="Google Shape;158;p17"/>
-          <p:cNvSpPr txBox="1"/>
-          <p:nvPr/>
-        </p:nvSpPr>
-        <p:spPr>
-          <a:xfrm>
-            <a:off x="11801475" y="6467475"/>
-            <a:ext cx="200025" cy="161583"/>
-          </a:xfrm>
-          <a:prstGeom prst="rect">
-            <a:avLst/>
-          </a:prstGeom>
-          <a:noFill/>
-          <a:ln>
-            <a:noFill/>
-          </a:ln>
-        </p:spPr>
-        <p:txBody>
-          <a:bodyPr spcFirstLastPara="1" wrap="square" lIns="0" tIns="0" rIns="0" bIns="0" anchor="t" anchorCtr="0">
-            <a:spAutoFit/>
-          </a:bodyPr>
-          <a:lstStyle/>
-          <a:p>
-            <a:pPr marL="0" marR="0" lvl="0" indent="0" algn="l" rtl="0">
-              <a:spcBef>
-                <a:spcPts val="0"/>
-              </a:spcBef>
-              <a:spcAft>
-                <a:spcPts val="0"/>
-              </a:spcAft>
-              <a:buNone/>
-            </a:pPr>
-            <a:r>
-              <a:rPr lang="en-US" sz="1050" b="0" i="0" u="none" strike="noStrike" cap="none" dirty="0">
-                <a:solidFill>
-                  <a:schemeClr val="bg1"/>
-                </a:solidFill>
-                <a:latin typeface="Poppins"/>
-                <a:ea typeface="Poppins"/>
-                <a:cs typeface="Poppins"/>
-                <a:sym typeface="Poppins"/>
-              </a:rPr>
-              <a:t>05</a:t>
-            </a:r>
-            <a:endParaRPr dirty="0">
-              <a:solidFill>
-                <a:schemeClr val="bg1"/>
-              </a:solidFill>
-            </a:endParaRPr>
-          </a:p>
-        </p:txBody>
-      </p:sp>
-      <p:sp>
-        <p:nvSpPr>
-          <p:cNvPr id="5" name="Google Shape;143;p16">
-            <a:extLst>
-              <a:ext uri="{FF2B5EF4-FFF2-40B4-BE49-F238E27FC236}">
-                <a16:creationId xmlns:a16="http://schemas.microsoft.com/office/drawing/2014/main" id="{3CAF39FC-C49D-1484-968C-D8CC6B6281EE}"/>
-              </a:ext>
-            </a:extLst>
-          </p:cNvPr>
-          <p:cNvSpPr txBox="1"/>
-          <p:nvPr/>
-        </p:nvSpPr>
-        <p:spPr>
-          <a:xfrm>
-            <a:off x="571500" y="571500"/>
-            <a:ext cx="11601450" cy="553998"/>
-          </a:xfrm>
-          <a:prstGeom prst="rect">
-            <a:avLst/>
-          </a:prstGeom>
-          <a:noFill/>
-          <a:ln>
-            <a:noFill/>
-          </a:ln>
-        </p:spPr>
-        <p:txBody>
-          <a:bodyPr spcFirstLastPara="1" wrap="square" lIns="0" tIns="0" rIns="0" bIns="0" anchor="t" anchorCtr="0">
-            <a:spAutoFit/>
-          </a:bodyPr>
-          <a:lstStyle/>
-          <a:p>
-            <a:pPr marL="0" marR="0" lvl="0" indent="0" algn="l" rtl="0">
-              <a:spcBef>
-                <a:spcPts val="0"/>
-              </a:spcBef>
-              <a:spcAft>
-                <a:spcPts val="0"/>
-              </a:spcAft>
-              <a:buNone/>
-            </a:pPr>
-            <a:r>
-              <a:rPr lang="en-US" sz="3600" b="1" i="0" u="none" strike="noStrike" cap="none" dirty="0">
-                <a:solidFill>
-                  <a:srgbClr val="F2EEFA"/>
-                </a:solidFill>
-                <a:latin typeface="Playfair Display"/>
-                <a:ea typeface="Playfair Display"/>
-                <a:cs typeface="Playfair Display"/>
-                <a:sym typeface="Playfair Display"/>
-              </a:rPr>
-              <a:t>IMPACT AND BENEFITS</a:t>
-            </a:r>
-            <a:endParaRPr dirty="0"/>
-          </a:p>
-        </p:txBody>
-      </p:sp>
-      <p:sp>
-        <p:nvSpPr>
-          <p:cNvPr id="6" name="Google Shape;144;p16">
-            <a:extLst>
-              <a:ext uri="{FF2B5EF4-FFF2-40B4-BE49-F238E27FC236}">
-                <a16:creationId xmlns:a16="http://schemas.microsoft.com/office/drawing/2014/main" id="{FDB0C6B6-D604-F5FA-8C1F-20E675C8EE7E}"/>
-              </a:ext>
-            </a:extLst>
-          </p:cNvPr>
-          <p:cNvSpPr/>
-          <p:nvPr/>
-        </p:nvSpPr>
-        <p:spPr>
-          <a:xfrm>
-            <a:off x="571500" y="1323975"/>
-            <a:ext cx="11049000" cy="19050"/>
-          </a:xfrm>
-          <a:prstGeom prst="rect">
-            <a:avLst/>
-          </a:prstGeom>
-          <a:solidFill>
-            <a:srgbClr val="D4AF37"/>
-          </a:solidFill>
-          <a:ln>
-            <a:noFill/>
-          </a:ln>
-        </p:spPr>
-        <p:txBody>
-          <a:bodyPr spcFirstLastPara="1" wrap="square" lIns="91425" tIns="45700" rIns="91425" bIns="45700" anchor="ctr" anchorCtr="0">
-            <a:noAutofit/>
-          </a:bodyPr>
-          <a:lstStyle/>
-          <a:p>
-            <a:pPr marL="0" marR="0" lvl="0" indent="0" algn="ctr" rtl="0">
-              <a:spcBef>
-                <a:spcPts val="0"/>
-              </a:spcBef>
-              <a:spcAft>
-                <a:spcPts val="0"/>
-              </a:spcAft>
-              <a:buNone/>
-            </a:pPr>
-            <a:endParaRPr sz="1800" b="0" i="0" u="none" strike="noStrike" cap="none" dirty="0">
-              <a:solidFill>
-                <a:schemeClr val="dk1"/>
-              </a:solidFill>
-              <a:latin typeface="Calibri"/>
-              <a:ea typeface="Calibri"/>
-              <a:cs typeface="Calibri"/>
-              <a:sym typeface="Calibri"/>
-            </a:endParaRPr>
-          </a:p>
-        </p:txBody>
-      </p:sp>
-      <p:pic>
-        <p:nvPicPr>
-          <p:cNvPr id="7" name="Picture 6">
-            <a:extLst>
-              <a:ext uri="{FF2B5EF4-FFF2-40B4-BE49-F238E27FC236}">
-                <a16:creationId xmlns:a16="http://schemas.microsoft.com/office/drawing/2014/main" id="{143EAE13-7287-2B9A-1824-778F4241D50E}"/>
-              </a:ext>
-            </a:extLst>
-          </p:cNvPr>
-          <p:cNvPicPr>
-            <a:picLocks noChangeAspect="1"/>
-          </p:cNvPicPr>
-          <p:nvPr/>
-        </p:nvPicPr>
-        <p:blipFill>
-          <a:blip r:embed="rId7"/>
-          <a:stretch>
-            <a:fillRect/>
-          </a:stretch>
-        </p:blipFill>
-        <p:spPr>
-          <a:xfrm>
-            <a:off x="9361386" y="134593"/>
-            <a:ext cx="2259114" cy="1169718"/>
-          </a:xfrm>
-          <a:prstGeom prst="rect">
-            <a:avLst/>
-          </a:prstGeom>
-        </p:spPr>
-      </p:pic>
-    </p:spTree>
-  </p:cSld>
-  <p:clrMapOvr>
-    <a:masterClrMapping/>
-  </p:clrMapOvr>
-</p:sld>
-</file>
-
-<file path=ppt/slides/slide6.xml><?xml version="1.0" encoding="utf-8"?>
-<p:sld xmlns:a="http://schemas.openxmlformats.org/drawingml/2006/main" xmlns:r="http://schemas.openxmlformats.org/officeDocument/2006/relationships" xmlns:p="http://schemas.openxmlformats.org/presentationml/2006/main">
-  <p:cSld>
-    <p:spTree>
-      <p:nvGrpSpPr>
-        <p:cNvPr id="1" name="Shape 162"/>
-        <p:cNvGrpSpPr/>
-        <p:nvPr/>
-      </p:nvGrpSpPr>
-      <p:grpSpPr>
-        <a:xfrm>
-          <a:off x="0" y="0"/>
-          <a:ext cx="0" cy="0"/>
-          <a:chOff x="0" y="0"/>
-          <a:chExt cx="0" cy="0"/>
-        </a:xfrm>
-      </p:grpSpPr>
-      <p:grpSp>
-        <p:nvGrpSpPr>
-          <p:cNvPr id="2" name="Group 1">
-            <a:extLst>
-              <a:ext uri="{FF2B5EF4-FFF2-40B4-BE49-F238E27FC236}">
-                <a16:creationId xmlns:a16="http://schemas.microsoft.com/office/drawing/2014/main" id="{6C816A02-64BD-FBFB-2E8F-FE68591AE819}"/>
-              </a:ext>
-            </a:extLst>
-          </p:cNvPr>
-          <p:cNvGrpSpPr>
-            <a:grpSpLocks noGrp="1" noUngrp="1" noRot="1" noMove="1" noResize="1"/>
-          </p:cNvGrpSpPr>
-          <p:nvPr/>
-        </p:nvGrpSpPr>
-        <p:grpSpPr>
-          <a:xfrm>
-            <a:off x="-132734" y="-74663"/>
-            <a:ext cx="12457469" cy="7007326"/>
-            <a:chOff x="-157315" y="-88489"/>
-            <a:chExt cx="12457469" cy="7007326"/>
-          </a:xfrm>
-        </p:grpSpPr>
-        <p:pic>
-          <p:nvPicPr>
-            <p:cNvPr id="3" name="Google Shape;84;p13" descr="image.png">
-              <a:extLst>
-                <a:ext uri="{FF2B5EF4-FFF2-40B4-BE49-F238E27FC236}">
-                  <a16:creationId xmlns:a16="http://schemas.microsoft.com/office/drawing/2014/main" id="{0FC4E61E-2819-88A1-4D2E-25F6C534E60D}"/>
-                </a:ext>
-              </a:extLst>
-            </p:cNvPr>
-            <p:cNvPicPr preferRelativeResize="0">
-              <a:picLocks noGrp="1" noRot="1" noMove="1" noResize="1" noEditPoints="1" noAdjustHandles="1" noChangeArrowheads="1" noChangeShapeType="1" noCrop="1"/>
-            </p:cNvPicPr>
-            <p:nvPr/>
-          </p:nvPicPr>
-          <p:blipFill rotWithShape="1">
-            <a:blip r:embed="rId3">
-              <a:alphaModFix/>
-            </a:blip>
-            <a:srcRect/>
-            <a:stretch/>
-          </p:blipFill>
-          <p:spPr>
-            <a:xfrm>
-              <a:off x="-157315" y="-88489"/>
-              <a:ext cx="12457469" cy="7007326"/>
-            </a:xfrm>
-            <a:prstGeom prst="rect">
-              <a:avLst/>
-            </a:prstGeom>
-            <a:noFill/>
-            <a:ln>
-              <a:noFill/>
-            </a:ln>
-          </p:spPr>
-        </p:pic>
-        <p:pic>
-          <p:nvPicPr>
-            <p:cNvPr id="4" name="Google Shape;98;p14" descr="image.png">
-              <a:extLst>
-                <a:ext uri="{FF2B5EF4-FFF2-40B4-BE49-F238E27FC236}">
-                  <a16:creationId xmlns:a16="http://schemas.microsoft.com/office/drawing/2014/main" id="{062BE52A-6744-24D5-7827-BF7ABFAE66D8}"/>
-                </a:ext>
-              </a:extLst>
-            </p:cNvPr>
-            <p:cNvPicPr preferRelativeResize="0">
-              <a:picLocks noGrp="1" noRot="1" noMove="1" noResize="1" noEditPoints="1" noAdjustHandles="1" noChangeArrowheads="1" noChangeShapeType="1" noCrop="1"/>
-            </p:cNvPicPr>
-            <p:nvPr/>
-          </p:nvPicPr>
-          <p:blipFill rotWithShape="1">
-            <a:blip r:embed="rId4">
-              <a:alphaModFix amt="50000"/>
-            </a:blip>
-            <a:srcRect/>
-            <a:stretch/>
-          </p:blipFill>
-          <p:spPr>
-            <a:xfrm>
-              <a:off x="0" y="0"/>
-              <a:ext cx="12192000" cy="6858000"/>
-            </a:xfrm>
-            <a:prstGeom prst="rect">
-              <a:avLst/>
-            </a:prstGeom>
-            <a:noFill/>
-            <a:ln>
-              <a:noFill/>
-            </a:ln>
-          </p:spPr>
-        </p:pic>
-      </p:grpSp>
-      <p:pic>
-        <p:nvPicPr>
-          <p:cNvPr id="164" name="Google Shape;164;p18" descr="image.png"/>
-          <p:cNvPicPr preferRelativeResize="0"/>
-          <p:nvPr/>
-        </p:nvPicPr>
-        <p:blipFill rotWithShape="1">
-          <a:blip r:embed="rId5">
-            <a:alphaModFix/>
-          </a:blip>
-          <a:srcRect/>
-          <a:stretch/>
-        </p:blipFill>
-        <p:spPr>
-          <a:xfrm>
-            <a:off x="894735" y="1661038"/>
-            <a:ext cx="10491634" cy="4806437"/>
-          </a:xfrm>
-          <a:prstGeom prst="rect">
-            <a:avLst/>
-          </a:prstGeom>
-          <a:noFill/>
-          <a:ln>
-            <a:noFill/>
-          </a:ln>
-        </p:spPr>
-      </p:pic>
-      <p:sp>
-        <p:nvSpPr>
-          <p:cNvPr id="166" name="Google Shape;166;p18"/>
-          <p:cNvSpPr txBox="1"/>
-          <p:nvPr/>
-        </p:nvSpPr>
-        <p:spPr>
-          <a:xfrm>
-            <a:off x="571500" y="682747"/>
-            <a:ext cx="9291161" cy="553998"/>
-          </a:xfrm>
-          <a:prstGeom prst="rect">
-            <a:avLst/>
-          </a:prstGeom>
-          <a:noFill/>
-          <a:ln>
-            <a:noFill/>
-          </a:ln>
-        </p:spPr>
-        <p:txBody>
-          <a:bodyPr spcFirstLastPara="1" wrap="square" lIns="0" tIns="0" rIns="0" bIns="0" anchor="t" anchorCtr="0">
-            <a:spAutoFit/>
-          </a:bodyPr>
-          <a:lstStyle>
-            <a:defPPr marR="0" lvl="0" algn="l" rtl="0">
-              <a:lnSpc>
-                <a:spcPct val="100000"/>
-              </a:lnSpc>
-              <a:spcBef>
-                <a:spcPts val="0"/>
-              </a:spcBef>
-              <a:spcAft>
-                <a:spcPts val="0"/>
-              </a:spcAft>
-            </a:defPPr>
-            <a:lvl1pPr marL="0" indent="0">
-              <a:buNone/>
-              <a:defRPr sz="3600" b="1">
-                <a:solidFill>
-                  <a:srgbClr val="F2EEFA"/>
-                </a:solidFill>
-                <a:latin typeface="Playfair Display"/>
-                <a:ea typeface="Playfair Display"/>
-                <a:cs typeface="Playfair Display"/>
-              </a:defRPr>
-            </a:lvl1pPr>
-          </a:lstStyle>
-          <a:p>
-            <a:r>
-              <a:rPr lang="en-US" dirty="0">
-                <a:sym typeface="Playfair Display"/>
-              </a:rPr>
-              <a:t>RESEARCH AND REFERENCES</a:t>
-            </a:r>
-            <a:endParaRPr dirty="0"/>
-          </a:p>
-        </p:txBody>
-      </p:sp>
-      <p:grpSp>
-        <p:nvGrpSpPr>
-          <p:cNvPr id="7" name="Group 6">
-            <a:extLst>
-              <a:ext uri="{FF2B5EF4-FFF2-40B4-BE49-F238E27FC236}">
-                <a16:creationId xmlns:a16="http://schemas.microsoft.com/office/drawing/2014/main" id="{4E1C9CA6-2431-0A69-98BB-5E30EED6A492}"/>
-              </a:ext>
-            </a:extLst>
-          </p:cNvPr>
-          <p:cNvGrpSpPr/>
-          <p:nvPr/>
-        </p:nvGrpSpPr>
-        <p:grpSpPr>
-          <a:xfrm>
-            <a:off x="2306177" y="3813418"/>
-            <a:ext cx="8058150" cy="375455"/>
-            <a:chOff x="2168525" y="4214995"/>
-            <a:chExt cx="8058150" cy="375455"/>
-          </a:xfrm>
-        </p:grpSpPr>
-        <p:sp>
-          <p:nvSpPr>
-            <p:cNvPr id="168" name="Google Shape;168;p18"/>
-            <p:cNvSpPr txBox="1"/>
-            <p:nvPr/>
-          </p:nvSpPr>
-          <p:spPr>
-            <a:xfrm>
-              <a:off x="2168525" y="4214995"/>
-              <a:ext cx="8058150" cy="365670"/>
-            </a:xfrm>
-            <a:prstGeom prst="rect">
-              <a:avLst/>
-            </a:prstGeom>
-            <a:noFill/>
-            <a:ln>
-              <a:noFill/>
-            </a:ln>
-          </p:spPr>
-          <p:txBody>
-            <a:bodyPr spcFirstLastPara="1" wrap="square" lIns="428625" tIns="0" rIns="0" bIns="0" anchor="t" anchorCtr="0">
-              <a:spAutoFit/>
-            </a:bodyPr>
-            <a:lstStyle/>
-            <a:p>
-              <a:pPr marL="0" marR="0" lvl="0" indent="0" algn="ctr" rtl="0">
-                <a:lnSpc>
-                  <a:spcPct val="159944"/>
-                </a:lnSpc>
-                <a:spcBef>
-                  <a:spcPts val="0"/>
-                </a:spcBef>
-                <a:spcAft>
-                  <a:spcPts val="0"/>
-                </a:spcAft>
-                <a:buNone/>
-              </a:pPr>
-              <a:r>
-                <a:rPr lang="en-US" sz="1800" b="0" i="0" u="none" strike="noStrike" cap="none" dirty="0">
-                  <a:solidFill>
-                    <a:srgbClr val="F2EEFA"/>
-                  </a:solidFill>
-                  <a:latin typeface="Poppins Light"/>
-                  <a:ea typeface="Poppins Light"/>
-                  <a:cs typeface="Poppins Light"/>
-                  <a:sym typeface="Poppins Light"/>
-                </a:rPr>
-                <a:t>1. RBI/2024-25/105 · 2. CERT-In CIAD-2024-0060 · 3. ASVspoof 2021 LA · 4. AASIST (clovaai) · 5. UPI fraud ₹805 cr (FPJ) · 6. Hyderabad ₹1.97L (Indian Express)</a:t>
-              </a:r>
-              <a:endParaRPr dirty="0"/>
-            </a:p>
-          </p:txBody>
-        </p:sp>
-        <p:pic>
-          <p:nvPicPr>
-            <p:cNvPr id="169" name="Google Shape;169;p18" descr="image.png"/>
-            <p:cNvPicPr preferRelativeResize="0"/>
-            <p:nvPr/>
-          </p:nvPicPr>
-          <p:blipFill rotWithShape="1">
-            <a:blip r:embed="rId6">
-              <a:alphaModFix/>
-            </a:blip>
-            <a:srcRect/>
-            <a:stretch/>
-          </p:blipFill>
-          <p:spPr>
-            <a:xfrm>
-              <a:off x="3169920" y="4361850"/>
-              <a:ext cx="285750" cy="228600"/>
-            </a:xfrm>
-            <a:prstGeom prst="rect">
-              <a:avLst/>
-            </a:prstGeom>
-            <a:noFill/>
-            <a:ln>
-              <a:noFill/>
-            </a:ln>
-          </p:spPr>
-        </p:pic>
-      </p:grpSp>
-      <p:sp>
-        <p:nvSpPr>
-          <p:cNvPr id="170" name="Google Shape;170;p18"/>
-          <p:cNvSpPr txBox="1"/>
-          <p:nvPr/>
-        </p:nvSpPr>
-        <p:spPr>
-          <a:xfrm>
-            <a:off x="11696700" y="6467475"/>
-            <a:ext cx="209550" cy="200025"/>
-          </a:xfrm>
-          <a:prstGeom prst="rect">
-            <a:avLst/>
-          </a:prstGeom>
-          <a:noFill/>
-          <a:ln>
-            <a:noFill/>
-          </a:ln>
-        </p:spPr>
-        <p:txBody>
-          <a:bodyPr spcFirstLastPara="1" wrap="square" lIns="0" tIns="0" rIns="0" bIns="0" anchor="t" anchorCtr="0">
-            <a:spAutoFit/>
-          </a:bodyPr>
-          <a:lstStyle/>
-          <a:p>
-            <a:pPr marL="0" marR="0" lvl="0" indent="0" algn="l" rtl="0">
-              <a:spcBef>
-                <a:spcPts val="0"/>
-              </a:spcBef>
-              <a:spcAft>
-                <a:spcPts val="0"/>
-              </a:spcAft>
-              <a:buNone/>
-            </a:pPr>
-            <a:r>
-              <a:rPr lang="en-US" sz="1050" b="0" i="0" u="none" strike="noStrike" cap="none" dirty="0">
-                <a:solidFill>
-                  <a:srgbClr val="FFFFFF"/>
-                </a:solidFill>
-                <a:latin typeface="Poppins"/>
-                <a:ea typeface="Poppins"/>
-                <a:cs typeface="Poppins"/>
-                <a:sym typeface="Poppins"/>
-              </a:rPr>
-              <a:t>06</a:t>
-            </a:r>
-            <a:endParaRPr dirty="0"/>
-          </a:p>
-        </p:txBody>
-      </p:sp>
-      <p:pic>
-        <p:nvPicPr>
-          <p:cNvPr id="5" name="Picture 4">
-            <a:extLst>
-              <a:ext uri="{FF2B5EF4-FFF2-40B4-BE49-F238E27FC236}">
-                <a16:creationId xmlns:a16="http://schemas.microsoft.com/office/drawing/2014/main" id="{A2B84B2B-35C3-CD70-ED94-211E6AF95D2B}"/>
-              </a:ext>
-            </a:extLst>
-          </p:cNvPr>
-          <p:cNvPicPr>
-            <a:picLocks noChangeAspect="1"/>
-          </p:cNvPicPr>
-          <p:nvPr/>
-        </p:nvPicPr>
-        <p:blipFill>
-          <a:blip r:embed="rId7"/>
-          <a:stretch>
-            <a:fillRect/>
-          </a:stretch>
-        </p:blipFill>
-        <p:spPr>
-          <a:xfrm>
-            <a:off x="9793919" y="141850"/>
-            <a:ext cx="2259114" cy="1169718"/>
-          </a:xfrm>
-          <a:prstGeom prst="rect">
-            <a:avLst/>
-          </a:prstGeom>
-        </p:spPr>
-      </p:pic>
-      <p:sp>
-        <p:nvSpPr>
-          <p:cNvPr id="6" name="Google Shape;144;p16">
-            <a:extLst>
-              <a:ext uri="{FF2B5EF4-FFF2-40B4-BE49-F238E27FC236}">
-                <a16:creationId xmlns:a16="http://schemas.microsoft.com/office/drawing/2014/main" id="{D7515F0B-1E18-86AF-90B0-D093B0E72B20}"/>
-              </a:ext>
-            </a:extLst>
-          </p:cNvPr>
-          <p:cNvSpPr/>
-          <p:nvPr/>
-        </p:nvSpPr>
-        <p:spPr>
-          <a:xfrm>
-            <a:off x="571500" y="1323975"/>
-            <a:ext cx="11049000" cy="19050"/>
-          </a:xfrm>
-          <a:prstGeom prst="rect">
-            <a:avLst/>
-          </a:prstGeom>
-          <a:solidFill>
-            <a:srgbClr val="D4AF37"/>
-          </a:solidFill>
-          <a:ln>
-            <a:noFill/>
-          </a:ln>
-        </p:spPr>
-        <p:txBody>
-          <a:bodyPr spcFirstLastPara="1" wrap="square" lIns="91425" tIns="45700" rIns="91425" bIns="45700" anchor="ctr" anchorCtr="0">
-            <a:noAutofit/>
-          </a:bodyPr>
-          <a:lstStyle/>
-          <a:p>
-            <a:pPr marL="0" marR="0" lvl="0" indent="0" algn="ctr" rtl="0">
-              <a:spcBef>
-                <a:spcPts val="0"/>
-              </a:spcBef>
-              <a:spcAft>
-                <a:spcPts val="0"/>
-              </a:spcAft>
-              <a:buNone/>
-            </a:pPr>
-            <a:endParaRPr sz="1800" b="0" i="0" u="none" strike="noStrike" cap="none" dirty="0">
-              <a:solidFill>
-                <a:schemeClr val="dk1"/>
-              </a:solidFill>
-              <a:latin typeface="Calibri"/>
-              <a:ea typeface="Calibri"/>
-              <a:cs typeface="Calibri"/>
-              <a:sym typeface="Calibri"/>
-            </a:endParaRPr>
-          </a:p>
-        </p:txBody>
-      </p:sp>
-    </p:spTree>
-  </p:cSld>
-  <p:clrMapOvr>
-    <a:masterClrMapping/>
-  </p:clrMapOvr>
-</p:sld>
-</file>
-
-<file path=ppt/slides/slide8.xml><?xml version="1.0" encoding="utf-8"?>
-<p:sld xmlns:a="http://schemas.openxmlformats.org/drawingml/2006/main" xmlns:r="http://schemas.openxmlformats.org/officeDocument/2006/relationships" xmlns:p="http://schemas.openxmlformats.org/presentationml/2006/main">
-  <p:cSld>
-    <p:spTree>
-      <p:nvGrpSpPr>
-        <p:cNvPr id="1" name="Shape 97"/>
-        <p:cNvGrpSpPr/>
-        <p:nvPr/>
-      </p:nvGrpSpPr>
-      <p:grpSpPr>
-        <a:xfrm>
-          <a:off x="0" y="0"/>
-          <a:ext cx="0" cy="0"/>
-          <a:chOff x="0" y="0"/>
-          <a:chExt cx="0" cy="0"/>
-        </a:xfrm>
-      </p:grpSpPr>
-      <p:pic>
-        <p:nvPicPr>
-          <p:cNvPr id="2" name="Google Shape;84;p13" descr="image.png">
-            <a:extLst>
-              <a:ext uri="{FF2B5EF4-FFF2-40B4-BE49-F238E27FC236}">
-                <a16:creationId xmlns:a16="http://schemas.microsoft.com/office/drawing/2014/main" id="{A7427FBB-6B82-28C2-C807-6A3DF49A1F1A}"/>
-              </a:ext>
-            </a:extLst>
-          </p:cNvPr>
-          <p:cNvPicPr preferRelativeResize="0"/>
-          <p:nvPr/>
-        </p:nvPicPr>
-        <p:blipFill rotWithShape="1">
-          <a:blip r:embed="rId3">
-            <a:alphaModFix/>
-          </a:blip>
-          <a:srcRect/>
-          <a:stretch/>
-        </p:blipFill>
-        <p:spPr>
-          <a:xfrm>
-            <a:off x="-157315" y="-88489"/>
-            <a:ext cx="12457469" cy="7007326"/>
-          </a:xfrm>
-          <a:prstGeom prst="rect">
-            <a:avLst/>
-          </a:prstGeom>
-          <a:noFill/>
-          <a:ln>
-            <a:noFill/>
-          </a:ln>
-        </p:spPr>
-      </p:pic>
-      <p:pic>
-        <p:nvPicPr>
-          <p:cNvPr id="98" name="Google Shape;98;p14" descr="image.png"/>
-          <p:cNvPicPr preferRelativeResize="0"/>
-          <p:nvPr/>
-        </p:nvPicPr>
-        <p:blipFill rotWithShape="1">
-          <a:blip r:embed="rId4">
-            <a:alphaModFix amt="50000"/>
-          </a:blip>
-          <a:srcRect/>
-          <a:stretch/>
-        </p:blipFill>
-        <p:spPr>
-          <a:xfrm>
-            <a:off x="0" y="0"/>
-            <a:ext cx="12192000" cy="6858000"/>
-          </a:xfrm>
-          <a:prstGeom prst="rect">
-            <a:avLst/>
-          </a:prstGeom>
-          <a:noFill/>
-          <a:ln>
-            <a:noFill/>
-          </a:ln>
-        </p:spPr>
-      </p:pic>
-      <p:grpSp>
-        <p:nvGrpSpPr>
-          <p:cNvPr id="3" name="Group 2">
-            <a:extLst>
-              <a:ext uri="{FF2B5EF4-FFF2-40B4-BE49-F238E27FC236}">
-                <a16:creationId xmlns:a16="http://schemas.microsoft.com/office/drawing/2014/main" id="{A73E524B-A1B2-0008-AF1C-66E70946F0B4}"/>
-              </a:ext>
-            </a:extLst>
-          </p:cNvPr>
-          <p:cNvGrpSpPr/>
-          <p:nvPr/>
-        </p:nvGrpSpPr>
-        <p:grpSpPr>
-          <a:xfrm>
-            <a:off x="571500" y="2658491"/>
-            <a:ext cx="10977715" cy="380873"/>
-            <a:chOff x="571500" y="2719451"/>
-            <a:chExt cx="10977715" cy="380873"/>
-          </a:xfrm>
-        </p:grpSpPr>
-        <p:sp>
-          <p:nvSpPr>
-            <p:cNvPr id="100" name="Google Shape;100;p14"/>
-            <p:cNvSpPr txBox="1"/>
-            <p:nvPr/>
-          </p:nvSpPr>
-          <p:spPr>
-            <a:xfrm>
-              <a:off x="928840" y="2719451"/>
-              <a:ext cx="10620375" cy="380873"/>
-            </a:xfrm>
-            <a:prstGeom prst="rect">
-              <a:avLst/>
-            </a:prstGeom>
-            <a:noFill/>
-            <a:ln>
-              <a:noFill/>
-            </a:ln>
-          </p:spPr>
-          <p:txBody>
-            <a:bodyPr spcFirstLastPara="1" wrap="square" lIns="0" tIns="0" rIns="0" bIns="0" anchor="t" anchorCtr="0">
-              <a:spAutoFit/>
-            </a:bodyPr>
-            <a:lstStyle/>
-            <a:p>
-              <a:pPr marL="0" marR="0" lvl="0" indent="0" algn="l" rtl="0">
-                <a:lnSpc>
-                  <a:spcPct val="150000"/>
-                </a:lnSpc>
-                <a:spcBef>
-                  <a:spcPts val="0"/>
-                </a:spcBef>
-                <a:spcAft>
-                  <a:spcPts val="0"/>
-                </a:spcAft>
-                <a:buNone/>
-              </a:pPr>
-              <a:r>
-                <a:rPr lang="en-US" sz="1650" b="0" i="0" u="none" strike="noStrike" cap="none" dirty="0">
-                  <a:solidFill>
-                    <a:srgbClr val="FFFFFF"/>
-                  </a:solidFill>
-                  <a:latin typeface="Poppins Light"/>
-                  <a:ea typeface="Poppins Light"/>
-                  <a:cs typeface="Poppins Light"/>
-                  <a:sym typeface="Poppins Light"/>
-                </a:rPr>
-                <a:t>VOICE CLONING IS NOW A PAYMENT FRAUD VECTOR</a:t>
-              </a:r>
-              <a:endParaRPr dirty="0"/>
-            </a:p>
-          </p:txBody>
-        </p:sp>
-        <p:pic>
-          <p:nvPicPr>
-            <p:cNvPr id="105" name="Google Shape;105;p14" descr="image.png"/>
-            <p:cNvPicPr preferRelativeResize="0"/>
-            <p:nvPr/>
-          </p:nvPicPr>
-          <p:blipFill rotWithShape="1">
-            <a:blip r:embed="rId5">
-              <a:alphaModFix/>
-            </a:blip>
-            <a:srcRect/>
-            <a:stretch/>
-          </p:blipFill>
-          <p:spPr>
-            <a:xfrm>
-              <a:off x="571500" y="2819400"/>
-              <a:ext cx="200025" cy="247650"/>
-            </a:xfrm>
-            <a:prstGeom prst="rect">
-              <a:avLst/>
-            </a:prstGeom>
-            <a:noFill/>
-            <a:ln>
-              <a:noFill/>
-            </a:ln>
-          </p:spPr>
-        </p:pic>
-      </p:grpSp>
-      <p:grpSp>
-        <p:nvGrpSpPr>
-          <p:cNvPr id="4" name="Group 3">
-            <a:extLst>
-              <a:ext uri="{FF2B5EF4-FFF2-40B4-BE49-F238E27FC236}">
-                <a16:creationId xmlns:a16="http://schemas.microsoft.com/office/drawing/2014/main" id="{8BDCEEF2-B973-65CB-4419-90818D61867D}"/>
-              </a:ext>
-            </a:extLst>
-          </p:cNvPr>
-          <p:cNvGrpSpPr/>
-          <p:nvPr/>
-        </p:nvGrpSpPr>
-        <p:grpSpPr>
-          <a:xfrm>
-            <a:off x="571500" y="3188813"/>
-            <a:ext cx="5238750" cy="314325"/>
-            <a:chOff x="571500" y="3657600"/>
-            <a:chExt cx="5238750" cy="314325"/>
-          </a:xfrm>
-        </p:grpSpPr>
-        <p:sp>
-          <p:nvSpPr>
-            <p:cNvPr id="101" name="Google Shape;101;p14"/>
-            <p:cNvSpPr txBox="1"/>
-            <p:nvPr/>
-          </p:nvSpPr>
-          <p:spPr>
-            <a:xfrm>
-              <a:off x="1000125" y="3657600"/>
-              <a:ext cx="4810125" cy="314325"/>
-            </a:xfrm>
-            <a:prstGeom prst="rect">
-              <a:avLst/>
-            </a:prstGeom>
-            <a:noFill/>
-            <a:ln>
-              <a:noFill/>
-            </a:ln>
-          </p:spPr>
-          <p:txBody>
-            <a:bodyPr spcFirstLastPara="1" wrap="square" lIns="0" tIns="0" rIns="0" bIns="0" anchor="t" anchorCtr="0">
-              <a:spAutoFit/>
-            </a:bodyPr>
-            <a:lstStyle/>
-            <a:p>
-              <a:pPr marL="0" marR="0" lvl="0" indent="0" algn="l" rtl="0">
-                <a:lnSpc>
-                  <a:spcPct val="150000"/>
-                </a:lnSpc>
-                <a:spcBef>
-                  <a:spcPts val="0"/>
-                </a:spcBef>
-                <a:spcAft>
-                  <a:spcPts val="0"/>
-                </a:spcAft>
-                <a:buNone/>
-              </a:pPr>
-              <a:r>
-                <a:rPr lang="en-US" sz="1650" b="0" i="0" u="none" strike="noStrike" cap="none" dirty="0">
-                  <a:solidFill>
-                    <a:srgbClr val="FFFFFF"/>
-                  </a:solidFill>
-                  <a:latin typeface="Poppins Light"/>
-                  <a:ea typeface="Poppins Light"/>
-                  <a:cs typeface="Poppins Light"/>
-                  <a:sym typeface="Poppins Light"/>
-                </a:rPr>
-                <a:t>UPI fraud: ₹805 crore, 10.64 lakh incidents (Apr–Nov FY26)</a:t>
-              </a:r>
-              <a:endParaRPr dirty="0"/>
-            </a:p>
-          </p:txBody>
-        </p:sp>
-        <p:pic>
-          <p:nvPicPr>
-            <p:cNvPr id="106" name="Google Shape;106;p14" descr="image.png"/>
-            <p:cNvPicPr preferRelativeResize="0"/>
-            <p:nvPr/>
-          </p:nvPicPr>
-          <p:blipFill rotWithShape="1">
-            <a:blip r:embed="rId5">
-              <a:alphaModFix/>
-            </a:blip>
-            <a:srcRect/>
-            <a:stretch/>
-          </p:blipFill>
-          <p:spPr>
-            <a:xfrm>
-              <a:off x="571500" y="3686175"/>
-              <a:ext cx="200025" cy="247650"/>
-            </a:xfrm>
-            <a:prstGeom prst="rect">
-              <a:avLst/>
-            </a:prstGeom>
-            <a:noFill/>
-            <a:ln>
-              <a:noFill/>
-            </a:ln>
-          </p:spPr>
-        </p:pic>
-      </p:grpSp>
-      <p:grpSp>
-        <p:nvGrpSpPr>
-          <p:cNvPr id="5" name="Group 4">
-            <a:extLst>
-              <a:ext uri="{FF2B5EF4-FFF2-40B4-BE49-F238E27FC236}">
-                <a16:creationId xmlns:a16="http://schemas.microsoft.com/office/drawing/2014/main" id="{776B38BC-4A69-5F43-A0F5-137CD55E4FA8}"/>
-              </a:ext>
-            </a:extLst>
-          </p:cNvPr>
-          <p:cNvGrpSpPr/>
-          <p:nvPr/>
-        </p:nvGrpSpPr>
-        <p:grpSpPr>
-          <a:xfrm>
-            <a:off x="571500" y="3741263"/>
-            <a:ext cx="5238750" cy="314325"/>
-            <a:chOff x="571500" y="4210050"/>
-            <a:chExt cx="5238750" cy="314325"/>
-          </a:xfrm>
-        </p:grpSpPr>
-        <p:sp>
-          <p:nvSpPr>
-            <p:cNvPr id="102" name="Google Shape;102;p14"/>
-            <p:cNvSpPr txBox="1"/>
-            <p:nvPr/>
-          </p:nvSpPr>
-          <p:spPr>
-            <a:xfrm>
-              <a:off x="1000125" y="4210050"/>
-              <a:ext cx="4810125" cy="314325"/>
-            </a:xfrm>
-            <a:prstGeom prst="rect">
-              <a:avLst/>
-            </a:prstGeom>
-            <a:noFill/>
-            <a:ln>
-              <a:noFill/>
-            </a:ln>
-          </p:spPr>
-          <p:txBody>
-            <a:bodyPr spcFirstLastPara="1" wrap="square" lIns="0" tIns="0" rIns="0" bIns="0" anchor="t" anchorCtr="0">
-              <a:spAutoFit/>
-            </a:bodyPr>
-            <a:lstStyle/>
-            <a:p>
-              <a:pPr marL="0" marR="0" lvl="0" indent="0" algn="l" rtl="0">
-                <a:lnSpc>
-                  <a:spcPct val="150000"/>
-                </a:lnSpc>
-                <a:spcBef>
-                  <a:spcPts val="0"/>
-                </a:spcBef>
-                <a:spcAft>
-                  <a:spcPts val="0"/>
-                </a:spcAft>
-                <a:buNone/>
-              </a:pPr>
-              <a:r>
-                <a:rPr lang="en-US" sz="1650" b="0" i="0" u="none" strike="noStrike" cap="none" dirty="0">
-                  <a:solidFill>
-                    <a:srgbClr val="FFFFFF"/>
-                  </a:solidFill>
-                  <a:latin typeface="Poppins Light"/>
-                  <a:ea typeface="Poppins Light"/>
-                  <a:cs typeface="Poppins Light"/>
-                  <a:sym typeface="Poppins Light"/>
-                </a:rPr>
-                <a:t>One cloned voice, ₹1.97 lakh lost, 10 minutes (Hyderabad, 2025)</a:t>
-              </a:r>
-              <a:endParaRPr dirty="0"/>
-            </a:p>
-          </p:txBody>
-        </p:sp>
-        <p:pic>
-          <p:nvPicPr>
-            <p:cNvPr id="107" name="Google Shape;107;p14" descr="image.png"/>
-            <p:cNvPicPr preferRelativeResize="0"/>
-            <p:nvPr/>
-          </p:nvPicPr>
-          <p:blipFill rotWithShape="1">
-            <a:blip r:embed="rId5">
-              <a:alphaModFix/>
-            </a:blip>
-            <a:srcRect/>
-            <a:stretch/>
-          </p:blipFill>
-          <p:spPr>
-            <a:xfrm>
-              <a:off x="571500" y="4238625"/>
-              <a:ext cx="200025" cy="247650"/>
-            </a:xfrm>
-            <a:prstGeom prst="rect">
-              <a:avLst/>
-            </a:prstGeom>
-            <a:noFill/>
-            <a:ln>
-              <a:noFill/>
-            </a:ln>
-          </p:spPr>
-        </p:pic>
-      </p:grpSp>
-      <p:grpSp>
-        <p:nvGrpSpPr>
-          <p:cNvPr id="6" name="Group 5">
-            <a:extLst>
-              <a:ext uri="{FF2B5EF4-FFF2-40B4-BE49-F238E27FC236}">
-                <a16:creationId xmlns:a16="http://schemas.microsoft.com/office/drawing/2014/main" id="{CF6956BC-D0DD-126D-0DC6-421091A25E5A}"/>
-              </a:ext>
-            </a:extLst>
-          </p:cNvPr>
-          <p:cNvGrpSpPr/>
-          <p:nvPr/>
-        </p:nvGrpSpPr>
-        <p:grpSpPr>
-          <a:xfrm>
-            <a:off x="571500" y="4293713"/>
-            <a:ext cx="5238750" cy="314325"/>
-            <a:chOff x="571500" y="4762500"/>
-            <a:chExt cx="5238750" cy="314325"/>
-          </a:xfrm>
-        </p:grpSpPr>
-        <p:sp>
-          <p:nvSpPr>
-            <p:cNvPr id="103" name="Google Shape;103;p14"/>
-            <p:cNvSpPr txBox="1"/>
-            <p:nvPr/>
-          </p:nvSpPr>
-          <p:spPr>
-            <a:xfrm>
-              <a:off x="1000125" y="4762500"/>
-              <a:ext cx="4810125" cy="314325"/>
-            </a:xfrm>
-            <a:prstGeom prst="rect">
-              <a:avLst/>
-            </a:prstGeom>
-            <a:noFill/>
-            <a:ln>
-              <a:noFill/>
-            </a:ln>
-          </p:spPr>
-          <p:txBody>
-            <a:bodyPr spcFirstLastPara="1" wrap="square" lIns="0" tIns="0" rIns="0" bIns="0" anchor="t" anchorCtr="0">
-              <a:spAutoFit/>
-            </a:bodyPr>
-            <a:lstStyle/>
-            <a:p>
-              <a:pPr marL="0" marR="0" lvl="0" indent="0" algn="l" rtl="0">
-                <a:lnSpc>
-                  <a:spcPct val="150000"/>
-                </a:lnSpc>
-                <a:spcBef>
-                  <a:spcPts val="0"/>
-                </a:spcBef>
-                <a:spcAft>
-                  <a:spcPts val="0"/>
-                </a:spcAft>
-                <a:buNone/>
-              </a:pPr>
-              <a:r>
-                <a:rPr lang="en-US" sz="1650" b="0" i="0" u="none" strike="noStrike" cap="none" dirty="0">
-                  <a:solidFill>
-                    <a:srgbClr val="FFFFFF"/>
-                  </a:solidFill>
-                  <a:latin typeface="Poppins Light"/>
-                  <a:ea typeface="Poppins Light"/>
-                  <a:cs typeface="Poppins Light"/>
-                  <a:sym typeface="Poppins Light"/>
-                </a:rPr>
-                <a:t>GenAI voice cloning: 10,000 frauds/day per scammer (expert est.)</a:t>
-              </a:r>
-              <a:endParaRPr dirty="0"/>
-            </a:p>
-          </p:txBody>
-        </p:sp>
-        <p:pic>
-          <p:nvPicPr>
-            <p:cNvPr id="108" name="Google Shape;108;p14" descr="image.png"/>
-            <p:cNvPicPr preferRelativeResize="0"/>
-            <p:nvPr/>
-          </p:nvPicPr>
-          <p:blipFill rotWithShape="1">
-            <a:blip r:embed="rId5">
-              <a:alphaModFix/>
-            </a:blip>
-            <a:srcRect/>
-            <a:stretch/>
-          </p:blipFill>
-          <p:spPr>
-            <a:xfrm>
-              <a:off x="571500" y="4791075"/>
-              <a:ext cx="200025" cy="247650"/>
-            </a:xfrm>
-            <a:prstGeom prst="rect">
-              <a:avLst/>
-            </a:prstGeom>
-            <a:noFill/>
-            <a:ln>
-              <a:noFill/>
-            </a:ln>
-          </p:spPr>
-        </p:pic>
-      </p:grpSp>
-      <p:sp>
-        <p:nvSpPr>
-          <p:cNvPr id="109" name="Google Shape;109;p14"/>
-          <p:cNvSpPr txBox="1"/>
-          <p:nvPr/>
-        </p:nvSpPr>
-        <p:spPr>
-          <a:xfrm>
-            <a:off x="571500" y="571500"/>
-            <a:ext cx="11601450" cy="628650"/>
-          </a:xfrm>
-          <a:prstGeom prst="rect">
-            <a:avLst/>
-          </a:prstGeom>
-          <a:noFill/>
-          <a:ln>
-            <a:noFill/>
-          </a:ln>
-        </p:spPr>
-        <p:txBody>
-          <a:bodyPr spcFirstLastPara="1" wrap="square" lIns="0" tIns="0" rIns="0" bIns="0" anchor="t" anchorCtr="0">
-            <a:spAutoFit/>
-          </a:bodyPr>
-          <a:lstStyle/>
-          <a:p>
-            <a:pPr marL="0" marR="0" lvl="0" indent="0" algn="l" rtl="0">
-              <a:spcBef>
-                <a:spcPts val="0"/>
-              </a:spcBef>
-              <a:spcAft>
-                <a:spcPts val="0"/>
-              </a:spcAft>
-              <a:buNone/>
-            </a:pPr>
-            <a:r>
-              <a:rPr lang="en-US" sz="3600" b="1" i="0" u="none" strike="noStrike" cap="none" dirty="0">
-                <a:solidFill>
-                  <a:srgbClr val="F2EEFA"/>
-                </a:solidFill>
-                <a:latin typeface="Playfair Display"/>
-                <a:ea typeface="Playfair Display"/>
-                <a:cs typeface="Playfair Display"/>
-                <a:sym typeface="Playfair Display"/>
-              </a:rPr>
-              <a:t>PROBLEM STATEMENT</a:t>
-            </a:r>
-            <a:endParaRPr dirty="0"/>
-          </a:p>
-        </p:txBody>
-      </p:sp>
-      <p:sp>
-        <p:nvSpPr>
-          <p:cNvPr id="110" name="Google Shape;110;p14"/>
-          <p:cNvSpPr/>
-          <p:nvPr/>
-        </p:nvSpPr>
-        <p:spPr>
-          <a:xfrm>
-            <a:off x="571500" y="1323975"/>
-            <a:ext cx="11049000" cy="19050"/>
-          </a:xfrm>
-          <a:prstGeom prst="rect">
-            <a:avLst/>
-          </a:prstGeom>
-          <a:solidFill>
-            <a:srgbClr val="D4AF37"/>
-          </a:solidFill>
-          <a:ln>
-            <a:noFill/>
-          </a:ln>
-        </p:spPr>
-        <p:txBody>
-          <a:bodyPr spcFirstLastPara="1" wrap="square" lIns="91425" tIns="45700" rIns="91425" bIns="45700" anchor="ctr" anchorCtr="0">
-            <a:noAutofit/>
-          </a:bodyPr>
-          <a:lstStyle/>
-          <a:p>
-            <a:pPr marL="0" marR="0" lvl="0" indent="0" algn="ctr" rtl="0">
-              <a:spcBef>
-                <a:spcPts val="0"/>
-              </a:spcBef>
-              <a:spcAft>
-                <a:spcPts val="0"/>
-              </a:spcAft>
-              <a:buNone/>
-            </a:pPr>
-            <a:endParaRPr sz="1800" b="0" i="0" u="none" strike="noStrike" cap="none" dirty="0">
-              <a:solidFill>
-                <a:schemeClr val="dk1"/>
-              </a:solidFill>
-              <a:latin typeface="Calibri"/>
-              <a:ea typeface="Calibri"/>
-              <a:cs typeface="Calibri"/>
-              <a:sym typeface="Calibri"/>
-            </a:endParaRPr>
-          </a:p>
-        </p:txBody>
-      </p:sp>
-      <p:sp>
-        <p:nvSpPr>
-          <p:cNvPr id="111" name="Google Shape;111;p14"/>
-          <p:cNvSpPr txBox="1"/>
-          <p:nvPr/>
-        </p:nvSpPr>
-        <p:spPr>
-          <a:xfrm>
-            <a:off x="11706225" y="6467475"/>
-            <a:ext cx="200025" cy="161583"/>
-          </a:xfrm>
-          <a:prstGeom prst="rect">
-            <a:avLst/>
-          </a:prstGeom>
-          <a:noFill/>
-          <a:ln>
-            <a:noFill/>
-          </a:ln>
-        </p:spPr>
-        <p:txBody>
-          <a:bodyPr spcFirstLastPara="1" wrap="square" lIns="0" tIns="0" rIns="0" bIns="0" anchor="t" anchorCtr="0">
-            <a:spAutoFit/>
-          </a:bodyPr>
-          <a:lstStyle/>
-          <a:p>
-            <a:pPr marL="0" marR="0" lvl="0" indent="0" algn="l" rtl="0">
-              <a:spcBef>
-                <a:spcPts val="0"/>
-              </a:spcBef>
-              <a:spcAft>
-                <a:spcPts val="0"/>
-              </a:spcAft>
-              <a:buNone/>
-            </a:pPr>
-            <a:r>
-              <a:rPr lang="en-US" sz="1050" b="0" i="0" u="none" strike="noStrike" cap="none" dirty="0">
-                <a:solidFill>
-                  <a:srgbClr val="FFFFFF"/>
-                </a:solidFill>
-                <a:latin typeface="Poppins"/>
-                <a:ea typeface="Poppins"/>
-                <a:cs typeface="Poppins"/>
-                <a:sym typeface="Poppins"/>
-              </a:rPr>
-              <a:t>02</a:t>
-            </a:r>
-            <a:endParaRPr dirty="0"/>
-          </a:p>
-        </p:txBody>
-      </p:sp>
-      <p:pic>
-        <p:nvPicPr>
-          <p:cNvPr id="7" name="Picture 6">
-            <a:extLst>
-              <a:ext uri="{FF2B5EF4-FFF2-40B4-BE49-F238E27FC236}">
-                <a16:creationId xmlns:a16="http://schemas.microsoft.com/office/drawing/2014/main" id="{81D6A019-74ED-9001-54F2-BCA9F7EF5C85}"/>
-              </a:ext>
-            </a:extLst>
-          </p:cNvPr>
-          <p:cNvPicPr>
-            <a:picLocks noChangeAspect="1"/>
-          </p:cNvPicPr>
-          <p:nvPr/>
-        </p:nvPicPr>
-        <p:blipFill>
-          <a:blip r:embed="rId6"/>
-          <a:stretch>
-            <a:fillRect/>
-          </a:stretch>
-        </p:blipFill>
-        <p:spPr>
-          <a:xfrm>
-            <a:off x="9361386" y="134593"/>
-            <a:ext cx="2259114" cy="1169718"/>
-          </a:xfrm>
-          <a:prstGeom prst="rect">
-            <a:avLst/>
-          </a:prstGeom>
-        </p:spPr>
-      </p:pic>
-    </p:spTree>
-  </p:cSld>
-  <p:clrMapOvr>
-    <a:masterClrMapping/>
-  </p:clrMapOvr>
-</p:sld>
-</file>
-
-<file path=ppt/slides/slide9.xml><?xml version="1.0" encoding="utf-8"?>
-<p:sld xmlns:a="http://schemas.openxmlformats.org/drawingml/2006/main" xmlns:r="http://schemas.openxmlformats.org/officeDocument/2006/relationships" xmlns:p="http://schemas.openxmlformats.org/presentationml/2006/main">
-  <p:cSld>
-    <p:spTree>
-      <p:nvGrpSpPr>
-        <p:cNvPr id="1" name="Shape 97"/>
-        <p:cNvGrpSpPr/>
-        <p:nvPr/>
-      </p:nvGrpSpPr>
-      <p:grpSpPr>
-        <a:xfrm>
-          <a:off x="0" y="0"/>
-          <a:ext cx="0" cy="0"/>
-          <a:chOff x="0" y="0"/>
-          <a:chExt cx="0" cy="0"/>
-        </a:xfrm>
-      </p:grpSpPr>
-      <p:pic>
-        <p:nvPicPr>
-          <p:cNvPr id="2" name="Google Shape;84;p13" descr="image.png">
-            <a:extLst>
-              <a:ext uri="{FF2B5EF4-FFF2-40B4-BE49-F238E27FC236}">
-                <a16:creationId xmlns:a16="http://schemas.microsoft.com/office/drawing/2014/main" id="{A7427FBB-6B82-28C2-C807-6A3DF49A1F1A}"/>
-              </a:ext>
-            </a:extLst>
-          </p:cNvPr>
-          <p:cNvPicPr preferRelativeResize="0"/>
-          <p:nvPr/>
-        </p:nvPicPr>
-        <p:blipFill rotWithShape="1">
-          <a:blip r:embed="rId3">
-            <a:alphaModFix/>
-          </a:blip>
-          <a:srcRect/>
-          <a:stretch/>
-        </p:blipFill>
-        <p:spPr>
-          <a:xfrm>
-            <a:off x="-157315" y="-88489"/>
-            <a:ext cx="12457469" cy="7007326"/>
-          </a:xfrm>
-          <a:prstGeom prst="rect">
-            <a:avLst/>
-          </a:prstGeom>
-          <a:noFill/>
-          <a:ln>
-            <a:noFill/>
-          </a:ln>
-        </p:spPr>
-      </p:pic>
-      <p:pic>
-        <p:nvPicPr>
-          <p:cNvPr id="98" name="Google Shape;98;p14" descr="image.png"/>
-          <p:cNvPicPr preferRelativeResize="0"/>
-          <p:nvPr/>
-        </p:nvPicPr>
-        <p:blipFill rotWithShape="1">
-          <a:blip r:embed="rId4">
-            <a:alphaModFix amt="50000"/>
-          </a:blip>
-          <a:srcRect/>
-          <a:stretch/>
-        </p:blipFill>
-        <p:spPr>
-          <a:xfrm>
-            <a:off x="0" y="0"/>
-            <a:ext cx="12192000" cy="6858000"/>
-          </a:xfrm>
-          <a:prstGeom prst="rect">
-            <a:avLst/>
-          </a:prstGeom>
-          <a:noFill/>
-          <a:ln>
-            <a:noFill/>
-          </a:ln>
-        </p:spPr>
-      </p:pic>
-      <p:grpSp>
-        <p:nvGrpSpPr>
-          <p:cNvPr id="3" name="Group 2">
-            <a:extLst>
-              <a:ext uri="{FF2B5EF4-FFF2-40B4-BE49-F238E27FC236}">
-                <a16:creationId xmlns:a16="http://schemas.microsoft.com/office/drawing/2014/main" id="{A73E524B-A1B2-0008-AF1C-66E70946F0B4}"/>
-              </a:ext>
-            </a:extLst>
-          </p:cNvPr>
-          <p:cNvGrpSpPr/>
-          <p:nvPr/>
-        </p:nvGrpSpPr>
-        <p:grpSpPr>
-          <a:xfrm>
-            <a:off x="571500" y="2658491"/>
-            <a:ext cx="10977715" cy="380873"/>
-            <a:chOff x="571500" y="2719451"/>
-            <a:chExt cx="10977715" cy="380873"/>
-          </a:xfrm>
-        </p:grpSpPr>
-        <p:sp>
-          <p:nvSpPr>
-            <p:cNvPr id="100" name="Google Shape;100;p14"/>
-            <p:cNvSpPr txBox="1"/>
-            <p:nvPr/>
-          </p:nvSpPr>
-          <p:spPr>
-            <a:xfrm>
-              <a:off x="928840" y="2719451"/>
-              <a:ext cx="10620375" cy="380873"/>
-            </a:xfrm>
-            <a:prstGeom prst="rect">
-              <a:avLst/>
-            </a:prstGeom>
-            <a:noFill/>
-            <a:ln>
-              <a:noFill/>
-            </a:ln>
-          </p:spPr>
-          <p:txBody>
-            <a:bodyPr spcFirstLastPara="1" wrap="square" lIns="0" tIns="0" rIns="0" bIns="0" anchor="t" anchorCtr="0">
-              <a:spAutoFit/>
-            </a:bodyPr>
-            <a:lstStyle/>
-            <a:p>
-              <a:pPr marL="0" marR="0" lvl="0" indent="0" algn="l" rtl="0">
-                <a:lnSpc>
-                  <a:spcPct val="150000"/>
-                </a:lnSpc>
-                <a:spcBef>
-                  <a:spcPts val="0"/>
-                </a:spcBef>
-                <a:spcAft>
-                  <a:spcPts val="0"/>
-                </a:spcAft>
-                <a:buNone/>
-              </a:pPr>
-              <a:r>
-                <a:rPr lang="en-US" sz="1650" b="0" i="0" u="none" strike="noStrike" cap="none" dirty="0">
-                  <a:solidFill>
-                    <a:srgbClr val="FFFFFF"/>
-                  </a:solidFill>
-                  <a:latin typeface="Poppins Light"/>
-                  <a:ea typeface="Poppins Light"/>
-                  <a:cs typeface="Poppins Light"/>
-                  <a:sym typeface="Poppins Light"/>
-                </a:rPr>
-                <a:t>Real model: fine-tuned anti-spoof network (AASIST-hindi)</a:t>
-              </a:r>
-              <a:endParaRPr dirty="0"/>
-            </a:p>
-          </p:txBody>
-        </p:sp>
-        <p:pic>
-          <p:nvPicPr>
-            <p:cNvPr id="105" name="Google Shape;105;p14" descr="image.png"/>
-            <p:cNvPicPr preferRelativeResize="0"/>
-            <p:nvPr/>
-          </p:nvPicPr>
-          <p:blipFill rotWithShape="1">
-            <a:blip r:embed="rId5">
-              <a:alphaModFix/>
-            </a:blip>
-            <a:srcRect/>
-            <a:stretch/>
-          </p:blipFill>
-          <p:spPr>
-            <a:xfrm>
-              <a:off x="571500" y="2819400"/>
-              <a:ext cx="200025" cy="247650"/>
-            </a:xfrm>
-            <a:prstGeom prst="rect">
-              <a:avLst/>
-            </a:prstGeom>
-            <a:noFill/>
-            <a:ln>
-              <a:noFill/>
-            </a:ln>
-          </p:spPr>
-        </p:pic>
-      </p:grpSp>
-      <p:grpSp>
-        <p:nvGrpSpPr>
-          <p:cNvPr id="4" name="Group 3">
-            <a:extLst>
-              <a:ext uri="{FF2B5EF4-FFF2-40B4-BE49-F238E27FC236}">
-                <a16:creationId xmlns:a16="http://schemas.microsoft.com/office/drawing/2014/main" id="{8BDCEEF2-B973-65CB-4419-90818D61867D}"/>
-              </a:ext>
-            </a:extLst>
-          </p:cNvPr>
-          <p:cNvGrpSpPr/>
-          <p:nvPr/>
-        </p:nvGrpSpPr>
-        <p:grpSpPr>
-          <a:xfrm>
-            <a:off x="571500" y="3188813"/>
-            <a:ext cx="5238750" cy="314325"/>
-            <a:chOff x="571500" y="3657600"/>
-            <a:chExt cx="5238750" cy="314325"/>
-          </a:xfrm>
-        </p:grpSpPr>
-        <p:sp>
-          <p:nvSpPr>
-            <p:cNvPr id="101" name="Google Shape;101;p14"/>
-            <p:cNvSpPr txBox="1"/>
-            <p:nvPr/>
-          </p:nvSpPr>
-          <p:spPr>
-            <a:xfrm>
-              <a:off x="1000125" y="3657600"/>
-              <a:ext cx="4810125" cy="314325"/>
-            </a:xfrm>
-            <a:prstGeom prst="rect">
-              <a:avLst/>
-            </a:prstGeom>
-            <a:noFill/>
-            <a:ln>
-              <a:noFill/>
-            </a:ln>
-          </p:spPr>
-          <p:txBody>
-            <a:bodyPr spcFirstLastPara="1" wrap="square" lIns="0" tIns="0" rIns="0" bIns="0" anchor="t" anchorCtr="0">
-              <a:spAutoFit/>
-            </a:bodyPr>
-            <a:lstStyle/>
-            <a:p>
-              <a:pPr marL="0" marR="0" lvl="0" indent="0" algn="l" rtl="0">
-                <a:lnSpc>
-                  <a:spcPct val="150000"/>
-                </a:lnSpc>
-                <a:spcBef>
-                  <a:spcPts val="0"/>
-                </a:spcBef>
-                <a:spcAft>
-                  <a:spcPts val="0"/>
-                </a:spcAft>
-                <a:buNone/>
-              </a:pPr>
-              <a:r>
-                <a:rPr lang="en-US" sz="1650" b="0" i="0" u="none" strike="noStrike" cap="none" dirty="0">
-                  <a:solidFill>
-                    <a:srgbClr val="FFFFFF"/>
-                  </a:solidFill>
-                  <a:latin typeface="Poppins Light"/>
-                  <a:ea typeface="Poppins Light"/>
-                  <a:cs typeface="Poppins Light"/>
-                  <a:sym typeface="Poppins Light"/>
-                </a:rPr>
-                <a:t>Live API: audio in → spoof_score + verdict (&lt;500 ms)</a:t>
-              </a:r>
-              <a:endParaRPr dirty="0"/>
-            </a:p>
-          </p:txBody>
-        </p:sp>
-        <p:pic>
-          <p:nvPicPr>
-            <p:cNvPr id="106" name="Google Shape;106;p14" descr="image.png"/>
-            <p:cNvPicPr preferRelativeResize="0"/>
-            <p:nvPr/>
-          </p:nvPicPr>
-          <p:blipFill rotWithShape="1">
-            <a:blip r:embed="rId5">
-              <a:alphaModFix/>
-            </a:blip>
-            <a:srcRect/>
-            <a:stretch/>
-          </p:blipFill>
-          <p:spPr>
-            <a:xfrm>
-              <a:off x="571500" y="3686175"/>
-              <a:ext cx="200025" cy="247650"/>
-            </a:xfrm>
-            <a:prstGeom prst="rect">
-              <a:avLst/>
-            </a:prstGeom>
-            <a:noFill/>
-            <a:ln>
-              <a:noFill/>
-            </a:ln>
-          </p:spPr>
-        </p:pic>
-      </p:grpSp>
-      <p:grpSp>
-        <p:nvGrpSpPr>
-          <p:cNvPr id="5" name="Group 4">
-            <a:extLst>
-              <a:ext uri="{FF2B5EF4-FFF2-40B4-BE49-F238E27FC236}">
-                <a16:creationId xmlns:a16="http://schemas.microsoft.com/office/drawing/2014/main" id="{776B38BC-4A69-5F43-A0F5-137CD55E4FA8}"/>
-              </a:ext>
-            </a:extLst>
-          </p:cNvPr>
-          <p:cNvGrpSpPr/>
-          <p:nvPr/>
-        </p:nvGrpSpPr>
-        <p:grpSpPr>
-          <a:xfrm>
-            <a:off x="571500" y="3741263"/>
-            <a:ext cx="5238750" cy="314325"/>
-            <a:chOff x="571500" y="4210050"/>
-            <a:chExt cx="5238750" cy="314325"/>
-          </a:xfrm>
-        </p:grpSpPr>
-        <p:sp>
-          <p:nvSpPr>
-            <p:cNvPr id="102" name="Google Shape;102;p14"/>
-            <p:cNvSpPr txBox="1"/>
-            <p:nvPr/>
-          </p:nvSpPr>
-          <p:spPr>
-            <a:xfrm>
-              <a:off x="1000125" y="4210050"/>
-              <a:ext cx="4810125" cy="314325"/>
-            </a:xfrm>
-            <a:prstGeom prst="rect">
-              <a:avLst/>
-            </a:prstGeom>
-            <a:noFill/>
-            <a:ln>
-              <a:noFill/>
-            </a:ln>
-          </p:spPr>
-          <p:txBody>
-            <a:bodyPr spcFirstLastPara="1" wrap="square" lIns="0" tIns="0" rIns="0" bIns="0" anchor="t" anchorCtr="0">
-              <a:spAutoFit/>
-            </a:bodyPr>
-            <a:lstStyle/>
-            <a:p>
-              <a:pPr marL="0" marR="0" lvl="0" indent="0" algn="l" rtl="0">
-                <a:lnSpc>
-                  <a:spcPct val="150000"/>
-                </a:lnSpc>
-                <a:spcBef>
-                  <a:spcPts val="0"/>
-                </a:spcBef>
-                <a:spcAft>
-                  <a:spcPts val="0"/>
-                </a:spcAft>
-                <a:buNone/>
-              </a:pPr>
-              <a:r>
-                <a:rPr lang="en-US" sz="1650" b="0" i="0" u="none" strike="noStrike" cap="none" dirty="0">
-                  <a:solidFill>
-                    <a:srgbClr val="FFFFFF"/>
-                  </a:solidFill>
-                  <a:latin typeface="Poppins Light"/>
-                  <a:ea typeface="Poppins Light"/>
-                  <a:cs typeface="Poppins Light"/>
-                  <a:sym typeface="Poppins Light"/>
-                </a:rPr>
-                <a:t>GitHub: full code + training pipeline (link)</a:t>
-              </a:r>
-              <a:endParaRPr dirty="0"/>
-            </a:p>
-          </p:txBody>
-        </p:sp>
-        <p:pic>
-          <p:nvPicPr>
-            <p:cNvPr id="107" name="Google Shape;107;p14" descr="image.png"/>
-            <p:cNvPicPr preferRelativeResize="0"/>
-            <p:nvPr/>
-          </p:nvPicPr>
-          <p:blipFill rotWithShape="1">
-            <a:blip r:embed="rId5">
-              <a:alphaModFix/>
-            </a:blip>
-            <a:srcRect/>
-            <a:stretch/>
-          </p:blipFill>
-          <p:spPr>
-            <a:xfrm>
-              <a:off x="571500" y="4238625"/>
-              <a:ext cx="200025" cy="247650"/>
-            </a:xfrm>
-            <a:prstGeom prst="rect">
-              <a:avLst/>
-            </a:prstGeom>
-            <a:noFill/>
-            <a:ln>
-              <a:noFill/>
-            </a:ln>
-          </p:spPr>
-        </p:pic>
-      </p:grpSp>
-      <p:grpSp>
-        <p:nvGrpSpPr>
-          <p:cNvPr id="6" name="Group 5">
-            <a:extLst>
-              <a:ext uri="{FF2B5EF4-FFF2-40B4-BE49-F238E27FC236}">
-                <a16:creationId xmlns:a16="http://schemas.microsoft.com/office/drawing/2014/main" id="{CF6956BC-D0DD-126D-0DC6-421091A25E5A}"/>
-              </a:ext>
-            </a:extLst>
-          </p:cNvPr>
-          <p:cNvGrpSpPr/>
-          <p:nvPr/>
-        </p:nvGrpSpPr>
-        <p:grpSpPr>
-          <a:xfrm>
-            <a:off x="571500" y="4293713"/>
-            <a:ext cx="5238750" cy="314325"/>
-            <a:chOff x="571500" y="4762500"/>
-            <a:chExt cx="5238750" cy="314325"/>
-          </a:xfrm>
-        </p:grpSpPr>
-        <p:sp>
-          <p:nvSpPr>
-            <p:cNvPr id="103" name="Google Shape;103;p14"/>
-            <p:cNvSpPr txBox="1"/>
-            <p:nvPr/>
-          </p:nvSpPr>
-          <p:spPr>
-            <a:xfrm>
-              <a:off x="1000125" y="4762500"/>
-              <a:ext cx="4810125" cy="314325"/>
-            </a:xfrm>
-            <a:prstGeom prst="rect">
-              <a:avLst/>
-            </a:prstGeom>
-            <a:noFill/>
-            <a:ln>
-              <a:noFill/>
-            </a:ln>
-          </p:spPr>
-          <p:txBody>
-            <a:bodyPr spcFirstLastPara="1" wrap="square" lIns="0" tIns="0" rIns="0" bIns="0" anchor="t" anchorCtr="0">
-              <a:spAutoFit/>
-            </a:bodyPr>
-            <a:lstStyle/>
-            <a:p>
-              <a:pPr marL="0" marR="0" lvl="0" indent="0" algn="l" rtl="0">
-                <a:lnSpc>
-                  <a:spcPct val="150000"/>
-                </a:lnSpc>
-                <a:spcBef>
-                  <a:spcPts val="0"/>
-                </a:spcBef>
-                <a:spcAft>
-                  <a:spcPts val="0"/>
-                </a:spcAft>
-                <a:buNone/>
-              </a:pPr>
-              <a:r>
-                <a:rPr lang="en-US" sz="1650" b="0" i="0" u="none" strike="noStrike" cap="none" dirty="0">
-                  <a:solidFill>
-                    <a:srgbClr val="FFFFFF"/>
-                  </a:solidFill>
-                  <a:latin typeface="Poppins Light"/>
-                  <a:ea typeface="Poppins Light"/>
-                  <a:cs typeface="Poppins Light"/>
-                  <a:sym typeface="Poppins Light"/>
-                </a:rPr>
-                <a:t>Demo video: 90-sec call-scenario (link)</a:t>
-              </a:r>
-              <a:endParaRPr dirty="0"/>
-            </a:p>
-          </p:txBody>
-        </p:sp>
-        <p:pic>
-          <p:nvPicPr>
-            <p:cNvPr id="108" name="Google Shape;108;p14" descr="image.png"/>
-            <p:cNvPicPr preferRelativeResize="0"/>
-            <p:nvPr/>
-          </p:nvPicPr>
-          <p:blipFill rotWithShape="1">
-            <a:blip r:embed="rId5">
-              <a:alphaModFix/>
-            </a:blip>
-            <a:srcRect/>
-            <a:stretch/>
-          </p:blipFill>
-          <p:spPr>
-            <a:xfrm>
-              <a:off x="571500" y="4791075"/>
-              <a:ext cx="200025" cy="247650"/>
-            </a:xfrm>
-            <a:prstGeom prst="rect">
-              <a:avLst/>
-            </a:prstGeom>
-            <a:noFill/>
-            <a:ln>
-              <a:noFill/>
-            </a:ln>
-          </p:spPr>
-        </p:pic>
-      </p:grpSp>
-      <p:sp>
-        <p:nvSpPr>
-          <p:cNvPr id="109" name="Google Shape;109;p14"/>
-          <p:cNvSpPr txBox="1"/>
-          <p:nvPr/>
-        </p:nvSpPr>
-        <p:spPr>
-          <a:xfrm>
-            <a:off x="571500" y="571500"/>
-            <a:ext cx="11601450" cy="628650"/>
-          </a:xfrm>
-          <a:prstGeom prst="rect">
-            <a:avLst/>
-          </a:prstGeom>
-          <a:noFill/>
-          <a:ln>
-            <a:noFill/>
-          </a:ln>
-        </p:spPr>
-        <p:txBody>
-          <a:bodyPr spcFirstLastPara="1" wrap="square" lIns="0" tIns="0" rIns="0" bIns="0" anchor="t" anchorCtr="0">
-            <a:spAutoFit/>
-          </a:bodyPr>
-          <a:lstStyle/>
-          <a:p>
-            <a:pPr marL="0" marR="0" lvl="0" indent="0" algn="l" rtl="0">
-              <a:spcBef>
-                <a:spcPts val="0"/>
-              </a:spcBef>
-              <a:spcAft>
-                <a:spcPts val="0"/>
-              </a:spcAft>
-              <a:buNone/>
-            </a:pPr>
-            <a:r>
-              <a:rPr lang="en-US" sz="3600" b="1" i="0" u="none" strike="noStrike" cap="none" dirty="0">
-                <a:solidFill>
-                  <a:srgbClr val="F2EEFA"/>
-                </a:solidFill>
-                <a:latin typeface="Playfair Display"/>
-                <a:ea typeface="Playfair Display"/>
-                <a:cs typeface="Playfair Display"/>
-                <a:sym typeface="Playfair Display"/>
-              </a:rPr>
-              <a:t>WORKING PROTOTYPE — LIVE DEMO</a:t>
-            </a:r>
-            <a:endParaRPr dirty="0"/>
-          </a:p>
-        </p:txBody>
-      </p:sp>
-      <p:sp>
-        <p:nvSpPr>
-          <p:cNvPr id="110" name="Google Shape;110;p14"/>
-          <p:cNvSpPr/>
-          <p:nvPr/>
-        </p:nvSpPr>
-        <p:spPr>
-          <a:xfrm>
-            <a:off x="571500" y="1323975"/>
-            <a:ext cx="11049000" cy="19050"/>
-          </a:xfrm>
-          <a:prstGeom prst="rect">
-            <a:avLst/>
-          </a:prstGeom>
-          <a:solidFill>
-            <a:srgbClr val="D4AF37"/>
-          </a:solidFill>
-          <a:ln>
-            <a:noFill/>
-          </a:ln>
-        </p:spPr>
-        <p:txBody>
-          <a:bodyPr spcFirstLastPara="1" wrap="square" lIns="91425" tIns="45700" rIns="91425" bIns="45700" anchor="ctr" anchorCtr="0">
-            <a:noAutofit/>
-          </a:bodyPr>
-          <a:lstStyle/>
-          <a:p>
-            <a:pPr marL="0" marR="0" lvl="0" indent="0" algn="ctr" rtl="0">
-              <a:spcBef>
-                <a:spcPts val="0"/>
-              </a:spcBef>
-              <a:spcAft>
-                <a:spcPts val="0"/>
-              </a:spcAft>
-              <a:buNone/>
-            </a:pPr>
-            <a:endParaRPr sz="1800" b="0" i="0" u="none" strike="noStrike" cap="none" dirty="0">
-              <a:solidFill>
-                <a:schemeClr val="dk1"/>
-              </a:solidFill>
-              <a:latin typeface="Calibri"/>
-              <a:ea typeface="Calibri"/>
-              <a:cs typeface="Calibri"/>
-              <a:sym typeface="Calibri"/>
-            </a:endParaRPr>
-          </a:p>
-        </p:txBody>
-      </p:sp>
-      <p:sp>
-        <p:nvSpPr>
-          <p:cNvPr id="111" name="Google Shape;111;p14"/>
-          <p:cNvSpPr txBox="1"/>
-          <p:nvPr/>
-        </p:nvSpPr>
-        <p:spPr>
-          <a:xfrm>
-            <a:off x="11706225" y="6467475"/>
-            <a:ext cx="200025" cy="161583"/>
-          </a:xfrm>
-          <a:prstGeom prst="rect">
-            <a:avLst/>
-          </a:prstGeom>
-          <a:noFill/>
-          <a:ln>
-            <a:noFill/>
-          </a:ln>
-        </p:spPr>
-        <p:txBody>
-          <a:bodyPr spcFirstLastPara="1" wrap="square" lIns="0" tIns="0" rIns="0" bIns="0" anchor="t" anchorCtr="0">
-            <a:spAutoFit/>
-          </a:bodyPr>
-          <a:lstStyle/>
-          <a:p>
-            <a:pPr marL="0" marR="0" lvl="0" indent="0" algn="l" rtl="0">
-              <a:spcBef>
-                <a:spcPts val="0"/>
-              </a:spcBef>
-              <a:spcAft>
-                <a:spcPts val="0"/>
-              </a:spcAft>
-              <a:buNone/>
-            </a:pPr>
-            <a:r>
-              <a:rPr lang="en-US" sz="1050" b="0" i="0" u="none" strike="noStrike" cap="none" dirty="0">
-                <a:solidFill>
-                  <a:srgbClr val="FFFFFF"/>
-                </a:solidFill>
-                <a:latin typeface="Poppins"/>
-                <a:ea typeface="Poppins"/>
-                <a:cs typeface="Poppins"/>
-                <a:sym typeface="Poppins"/>
-              </a:rPr>
-              <a:t>07</a:t>
             </a:r>
             <a:endParaRPr dirty="0"/>
           </a:p>

--- a/assets/Kavach_IIC3_deck.pptx
+++ b/assets/Kavach_IIC3_deck.pptx
@@ -12883,7 +12883,7 @@
                 <a:cs typeface="Playfair Display"/>
                 <a:sym typeface="Playfair Display"/>
               </a:rPr>
-              <a:t>ELDERSHIELD — SPOOF-SCORE EVERY VOICE, BEFORE THE PAYMENT</a:t>
+              <a:t>KAVACH — SPOOF-SCORE EVERY VOICE, BEFORE THE PAYMENT</a:t>
             </a:r>
             <a:endParaRPr dirty="0"/>
           </a:p>

--- a/assets/Kavach_IIC3_deck.pptx
+++ b/assets/Kavach_IIC3_deck.pptx
@@ -11427,7 +11427,7 @@
                 <a:cs typeface="Poppins Light"/>
                 <a:sym typeface="Poppins Light"/>
               </a:rPr>
-              <a:t>Kavach — Real-Time AI Voice-Clone Detection for UPI &amp; Voice Banking</a:t>
+              <a:t>Kavach - Real-Time AI Voice-Clone Detection for UPI &amp; Voice Banking</a:t>
             </a:r>
             <a:endParaRPr dirty="0"/>
           </a:p>
@@ -11480,7 +11480,7 @@
                 <a:cs typeface="Poppins Light"/>
                 <a:sym typeface="Poppins Light"/>
               </a:rPr>
-              <a:t>Team Name: {{TEAM_NAME}}</a:t>
+              <a:t>Team Name: 511</a:t>
             </a:r>
             <a:endParaRPr dirty="0"/>
           </a:p>
@@ -12883,7 +12883,7 @@
                 <a:cs typeface="Playfair Display"/>
                 <a:sym typeface="Playfair Display"/>
               </a:rPr>
-              <a:t>KAVACH — SPOOF-SCORE EVERY VOICE, BEFORE THE PAYMENT</a:t>
+              <a:t>KAVACH - SPOOF-SCORE EVERY VOICE, BEFORE THE PAYMENT</a:t>
             </a:r>
             <a:endParaRPr dirty="0"/>
           </a:p>
@@ -14493,7 +14493,7 @@
                 <a:cs typeface="Poppins Light"/>
                 <a:sym typeface="Poppins Light"/>
               </a:rPr>
-              <a:t>663+ banks, 79+ apps on UPI — every voice channel is a target surface</a:t>
+              <a:t>663+ banks, 79+ apps on UPI - every voice channel is a target surface</a:t>
             </a:r>
             <a:endParaRPr dirty="0"/>
           </a:p>
@@ -15333,7 +15333,7 @@
                 <a:cs typeface="Playfair Display"/>
                 <a:sym typeface="Playfair Display"/>
               </a:rPr>
-              <a:t>WORKING PROTOTYPE — LIVE DEMO</a:t>
+              <a:t>WORKING PROTOTYPE - LIVE DEMO</a:t>
             </a:r>
             <a:endParaRPr dirty="0"/>
           </a:p>
